--- a/zebraish-christian-onboarding-es.pptx
+++ b/zebraish-christian-onboarding-es.pptx
@@ -3555,7 +3555,7 @@
     <p:bg>
       <p:bgPr>
         <a:solidFill>
-          <a:srgbClr val="141720"/>
+          <a:srgbClr val="0B0D12"/>
         </a:solidFill>
         <a:effectLst/>
       </p:bgPr>
@@ -3569,207 +3569,227 @@
       <p:grpSpPr/>
       <p:sp>
         <p:nvSpPr>
-          <p:cNvPr id="2" name="Rectangle 1"/>
-          <p:cNvSpPr/>
-          <p:nvPr/>
-        </p:nvSpPr>
-        <p:spPr>
-          <a:xfrm>
-            <a:off x="0" y="0"/>
-            <a:ext cx="164592" cy="6858000"/>
-          </a:xfrm>
-          <a:prstGeom prst="rect">
-            <a:avLst/>
-          </a:prstGeom>
-          <a:solidFill>
-            <a:srgbClr val="1D68C0"/>
-          </a:solidFill>
-          <a:ln>
-            <a:noFill/>
+          <p:cNvPr id="2" name="TextBox 1"/>
+          <p:cNvSpPr txBox="1"/>
+          <p:nvPr/>
+        </p:nvSpPr>
+        <p:spPr>
+          <a:xfrm>
+            <a:off x="685800" y="502920"/>
+            <a:ext cx="7315200" cy="365760"/>
+          </a:xfrm>
+          <a:prstGeom prst="rect">
+            <a:avLst/>
+          </a:prstGeom>
+          <a:noFill/>
+        </p:spPr>
+        <p:txBody>
+          <a:bodyPr wrap="square" anchor="t" lIns="0" rIns="0" tIns="0" bIns="0">
+            <a:spAutoFit/>
+          </a:bodyPr>
+          <a:lstStyle/>
+          <a:p>
+            <a:pPr algn="l">
+              <a:lnSpc>
+                <a:spcPct val="115000"/>
+              </a:lnSpc>
+            </a:pPr>
+            <a:r>
+              <a:rPr sz="1250" b="1">
+                <a:solidFill>
+                  <a:srgbClr val="4E9BF0"/>
+                </a:solidFill>
+                <a:latin typeface="Helvetica Neue"/>
+              </a:rPr>
+              <a:t>COMISIÓN Y PAGOS</a:t>
+            </a:r>
+          </a:p>
+        </p:txBody>
+      </p:sp>
+      <p:sp>
+        <p:nvSpPr>
+          <p:cNvPr id="3" name="TextBox 2"/>
+          <p:cNvSpPr txBox="1"/>
+          <p:nvPr/>
+        </p:nvSpPr>
+        <p:spPr>
+          <a:xfrm>
+            <a:off x="685800" y="868680"/>
+            <a:ext cx="10515600" cy="914400"/>
+          </a:xfrm>
+          <a:prstGeom prst="rect">
+            <a:avLst/>
+          </a:prstGeom>
+          <a:noFill/>
+        </p:spPr>
+        <p:txBody>
+          <a:bodyPr wrap="square" anchor="t" lIns="0" rIns="0" tIns="0" bIns="0">
+            <a:spAutoFit/>
+          </a:bodyPr>
+          <a:lstStyle/>
+          <a:p>
+            <a:pPr algn="l">
+              <a:lnSpc>
+                <a:spcPct val="105000"/>
+              </a:lnSpc>
+            </a:pPr>
+            <a:r>
+              <a:rPr sz="2700" b="1">
+                <a:solidFill>
+                  <a:srgbClr val="FFFFFF"/>
+                </a:solidFill>
+                <a:latin typeface="Helvetica Neue"/>
+              </a:rPr>
+              <a:t>Presentación de clientes — sin código de referido</a:t>
+            </a:r>
+          </a:p>
+        </p:txBody>
+      </p:sp>
+      <p:cxnSp>
+        <p:nvCxnSpPr>
+          <p:cNvPr id="4" name="Connector 3"/>
+          <p:cNvCxnSpPr/>
+          <p:nvPr/>
+        </p:nvCxnSpPr>
+        <p:spPr>
+          <a:xfrm>
+            <a:off x="685800" y="1691640"/>
+            <a:ext cx="10817352" cy="0"/>
+          </a:xfrm>
+          <a:prstGeom prst="line">
+            <a:avLst/>
+          </a:prstGeom>
+          <a:ln w="12700">
+            <a:solidFill>
+              <a:srgbClr val="2A2E3A"/>
+            </a:solidFill>
           </a:ln>
-          <a:effectLst/>
         </p:spPr>
         <p:style>
-          <a:lnRef idx="1">
+          <a:lnRef idx="2">
             <a:schemeClr val="accent1"/>
           </a:lnRef>
-          <a:fillRef idx="3">
+          <a:fillRef idx="0">
             <a:schemeClr val="accent1"/>
           </a:fillRef>
-          <a:effectRef idx="2">
+          <a:effectRef idx="1">
             <a:schemeClr val="accent1"/>
           </a:effectRef>
           <a:fontRef idx="minor">
-            <a:schemeClr val="lt1"/>
+            <a:schemeClr val="tx1"/>
           </a:fontRef>
         </p:style>
-        <p:txBody>
-          <a:bodyPr rtlCol="0" anchor="ctr"/>
-          <a:lstStyle/>
-          <a:p>
-            <a:pPr algn="ctr"/>
-          </a:p>
-        </p:txBody>
-      </p:sp>
-      <p:sp>
-        <p:nvSpPr>
-          <p:cNvPr id="3" name="TextBox 2"/>
-          <p:cNvSpPr txBox="1"/>
-          <p:nvPr/>
-        </p:nvSpPr>
-        <p:spPr>
-          <a:xfrm>
-            <a:off x="868680" y="2286000"/>
-            <a:ext cx="1828800" cy="1097280"/>
-          </a:xfrm>
-          <a:prstGeom prst="rect">
-            <a:avLst/>
-          </a:prstGeom>
-          <a:noFill/>
-        </p:spPr>
-        <p:txBody>
-          <a:bodyPr wrap="square" anchor="t" lIns="0" rIns="0" tIns="0" bIns="0">
-            <a:spAutoFit/>
-          </a:bodyPr>
-          <a:lstStyle/>
-          <a:p>
-            <a:pPr algn="l">
-              <a:lnSpc>
-                <a:spcPct val="115000"/>
-              </a:lnSpc>
-            </a:pPr>
-            <a:r>
-              <a:rPr sz="6400" b="1">
+      </p:cxnSp>
+      <p:sp>
+        <p:nvSpPr>
+          <p:cNvPr id="5" name="TextBox 4"/>
+          <p:cNvSpPr txBox="1"/>
+          <p:nvPr/>
+        </p:nvSpPr>
+        <p:spPr>
+          <a:xfrm>
+            <a:off x="685800" y="1965960"/>
+            <a:ext cx="10424160" cy="3931920"/>
+          </a:xfrm>
+          <a:prstGeom prst="rect">
+            <a:avLst/>
+          </a:prstGeom>
+          <a:noFill/>
+        </p:spPr>
+        <p:txBody>
+          <a:bodyPr wrap="square" lIns="0" rIns="0">
+            <a:spAutoFit/>
+          </a:bodyPr>
+          <a:lstStyle/>
+          <a:p>
+            <a:pPr>
+              <a:lnSpc>
+                <a:spcPct val="125000"/>
+              </a:lnSpc>
+              <a:spcAft>
+                <a:spcPts val="1000"/>
+              </a:spcAft>
+            </a:pPr>
+            <a:r>
+              <a:rPr sz="1550" b="1">
                 <a:solidFill>
                   <a:srgbClr val="4E9BF0"/>
                 </a:solidFill>
                 <a:latin typeface="Helvetica Neue"/>
               </a:rPr>
-              <a:t>03</a:t>
-            </a:r>
-          </a:p>
-        </p:txBody>
-      </p:sp>
-      <p:sp>
-        <p:nvSpPr>
-          <p:cNvPr id="4" name="TextBox 3"/>
-          <p:cNvSpPr txBox="1"/>
-          <p:nvPr/>
-        </p:nvSpPr>
-        <p:spPr>
-          <a:xfrm>
-            <a:off x="896112" y="2103120"/>
-            <a:ext cx="7315200" cy="365760"/>
-          </a:xfrm>
-          <a:prstGeom prst="rect">
-            <a:avLst/>
-          </a:prstGeom>
-          <a:noFill/>
-        </p:spPr>
-        <p:txBody>
-          <a:bodyPr wrap="square" anchor="t" lIns="0" rIns="0" tIns="0" bIns="0">
-            <a:spAutoFit/>
-          </a:bodyPr>
-          <a:lstStyle/>
-          <a:p>
-            <a:pPr algn="l">
-              <a:lnSpc>
-                <a:spcPct val="115000"/>
-              </a:lnSpc>
-            </a:pPr>
-            <a:r>
-              <a:rPr sz="1250" b="1">
+              <a:t>—  </a:t>
+            </a:r>
+            <a:r>
+              <a:rPr sz="1550">
+                <a:solidFill>
+                  <a:srgbClr val="FFFFFF"/>
+                </a:solidFill>
+                <a:latin typeface="Helvetica Neue"/>
+              </a:rPr>
+              <a:t>Cuando presentas a un cliente, el proyecto se abre a través del Portal de Proyectos y Pagos de Zebraish (o simplemente se lo dices a Joshua y él lo abre): recibe un identificador único de proyecto, como ZB-00017.</a:t>
+            </a:r>
+          </a:p>
+          <a:p>
+            <a:pPr>
+              <a:lnSpc>
+                <a:spcPct val="125000"/>
+              </a:lnSpc>
+              <a:spcAft>
+                <a:spcPts val="1000"/>
+              </a:spcAft>
+            </a:pPr>
+            <a:r>
+              <a:rPr sz="1550" b="1">
                 <a:solidFill>
                   <a:srgbClr val="4E9BF0"/>
                 </a:solidFill>
                 <a:latin typeface="Helvetica Neue"/>
               </a:rPr>
-              <a:t>COMISIÓN Y PAGOS</a:t>
-            </a:r>
-          </a:p>
-        </p:txBody>
-      </p:sp>
-      <p:sp>
-        <p:nvSpPr>
-          <p:cNvPr id="5" name="TextBox 4"/>
-          <p:cNvSpPr txBox="1"/>
-          <p:nvPr/>
-        </p:nvSpPr>
-        <p:spPr>
-          <a:xfrm>
-            <a:off x="868680" y="3429000"/>
-            <a:ext cx="9875520" cy="1097280"/>
-          </a:xfrm>
-          <a:prstGeom prst="rect">
-            <a:avLst/>
-          </a:prstGeom>
-          <a:noFill/>
-        </p:spPr>
-        <p:txBody>
-          <a:bodyPr wrap="square" anchor="t" lIns="0" rIns="0" tIns="0" bIns="0">
-            <a:spAutoFit/>
-          </a:bodyPr>
-          <a:lstStyle/>
-          <a:p>
-            <a:pPr algn="l">
-              <a:lnSpc>
-                <a:spcPct val="115000"/>
-              </a:lnSpc>
-            </a:pPr>
-            <a:r>
-              <a:rPr sz="3400" b="1">
+              <a:t>—  </a:t>
+            </a:r>
+            <a:r>
+              <a:rPr sz="1550">
                 <a:solidFill>
                   <a:srgbClr val="FFFFFF"/>
                 </a:solidFill>
                 <a:latin typeface="Helvetica Neue"/>
               </a:rPr>
-              <a:t>Cómo se mueve el dinero</a:t>
-            </a:r>
-          </a:p>
-        </p:txBody>
-      </p:sp>
-      <p:sp>
-        <p:nvSpPr>
-          <p:cNvPr id="6" name="TextBox 5"/>
-          <p:cNvSpPr txBox="1"/>
-          <p:nvPr/>
-        </p:nvSpPr>
-        <p:spPr>
-          <a:xfrm>
-            <a:off x="868680" y="4251960"/>
-            <a:ext cx="8412480" cy="1097280"/>
-          </a:xfrm>
-          <a:prstGeom prst="rect">
-            <a:avLst/>
-          </a:prstGeom>
-          <a:noFill/>
-        </p:spPr>
-        <p:txBody>
-          <a:bodyPr wrap="square" anchor="t" lIns="0" rIns="0" tIns="0" bIns="0">
-            <a:spAutoFit/>
-          </a:bodyPr>
-          <a:lstStyle/>
-          <a:p>
-            <a:pPr algn="l">
-              <a:lnSpc>
-                <a:spcPct val="135000"/>
-              </a:lnSpc>
-            </a:pPr>
-            <a:r>
-              <a:rPr sz="1550" b="0">
-                <a:solidFill>
-                  <a:srgbClr val="A6ACBA"/>
-                </a:solidFill>
-                <a:latin typeface="Helvetica Neue"/>
-              </a:rPr>
-              <a:t>Presentación de clientes, comisión y el pago semanal, en términos claros.</a:t>
+              <a:t>No hay ningún código o enlace de referido personal que gestionar ni compartir.</a:t>
+            </a:r>
+          </a:p>
+          <a:p>
+            <a:pPr>
+              <a:lnSpc>
+                <a:spcPct val="125000"/>
+              </a:lnSpc>
+              <a:spcAft>
+                <a:spcPts val="1000"/>
+              </a:spcAft>
+            </a:pPr>
+            <a:r>
+              <a:rPr sz="1550" b="1">
+                <a:solidFill>
+                  <a:srgbClr val="4E9BF0"/>
+                </a:solidFill>
+                <a:latin typeface="Helvetica Neue"/>
+              </a:rPr>
+              <a:t>—  </a:t>
+            </a:r>
+            <a:r>
+              <a:rPr sz="1550">
+                <a:solidFill>
+                  <a:srgbClr val="FFFFFF"/>
+                </a:solidFill>
+                <a:latin typeface="Helvetica Neue"/>
+              </a:rPr>
+              <a:t>La comisión no se calcula asociando clientes individuales contigo: se basa en todos los pagos elegibles que reciba Zebraish durante tu Periodo.</a:t>
             </a:r>
           </a:p>
         </p:txBody>
       </p:sp>
       <p:pic>
         <p:nvPicPr>
-          <p:cNvPr id="7" name="Picture 6" descr="logo-head.png"/>
+          <p:cNvPr id="6" name="Picture 5" descr="logo-head.png"/>
           <p:cNvPicPr>
             <a:picLocks noChangeAspect="1"/>
           </p:cNvPicPr>
@@ -3793,7 +3813,7 @@
       </p:pic>
       <p:sp>
         <p:nvSpPr>
-          <p:cNvPr id="8" name="TextBox 7"/>
+          <p:cNvPr id="7" name="TextBox 6"/>
           <p:cNvSpPr txBox="1"/>
           <p:nvPr/>
         </p:nvSpPr>
@@ -3832,7 +3852,7 @@
       </p:sp>
       <p:sp>
         <p:nvSpPr>
-          <p:cNvPr id="9" name="TextBox 8"/>
+          <p:cNvPr id="8" name="TextBox 7"/>
           <p:cNvSpPr txBox="1"/>
           <p:nvPr/>
         </p:nvSpPr>
@@ -3871,7 +3891,7 @@
       </p:sp>
       <p:cxnSp>
         <p:nvCxnSpPr>
-          <p:cNvPr id="10" name="Connector 9"/>
+          <p:cNvPr id="9" name="Connector 8"/>
           <p:cNvCxnSpPr/>
           <p:nvPr/>
         </p:nvCxnSpPr>
@@ -3993,7 +4013,7 @@
           <a:p>
             <a:pPr algn="l">
               <a:lnSpc>
-                <a:spcPct val="105000"/>
+                <a:spcPct val="115000"/>
               </a:lnSpc>
             </a:pPr>
             <a:r>
@@ -4003,7 +4023,7 @@
                 </a:solidFill>
                 <a:latin typeface="Helvetica Neue"/>
               </a:rPr>
-              <a:t>Presentación de clientes — sin código de referido</a:t>
+              <a:t>La comisión, de un vistazo</a:t>
             </a:r>
           </a:p>
         </p:txBody>
@@ -4051,108 +4071,318 @@
         </p:nvSpPr>
         <p:spPr>
           <a:xfrm>
-            <a:off x="685800" y="1965960"/>
-            <a:ext cx="10424160" cy="3931920"/>
-          </a:xfrm>
-          <a:prstGeom prst="rect">
-            <a:avLst/>
-          </a:prstGeom>
-          <a:noFill/>
-        </p:spPr>
-        <p:txBody>
-          <a:bodyPr wrap="square" lIns="0" rIns="0">
-            <a:spAutoFit/>
-          </a:bodyPr>
-          <a:lstStyle/>
-          <a:p>
-            <a:pPr>
-              <a:lnSpc>
-                <a:spcPct val="125000"/>
-              </a:lnSpc>
-              <a:spcAft>
-                <a:spcPts val="1000"/>
-              </a:spcAft>
-            </a:pPr>
-            <a:r>
-              <a:rPr sz="1550" b="1">
+            <a:off x="685800" y="2148840"/>
+            <a:ext cx="3605784" cy="1280160"/>
+          </a:xfrm>
+          <a:prstGeom prst="rect">
+            <a:avLst/>
+          </a:prstGeom>
+          <a:noFill/>
+        </p:spPr>
+        <p:txBody>
+          <a:bodyPr wrap="square" anchor="t" lIns="0" rIns="0" tIns="0" bIns="0">
+            <a:spAutoFit/>
+          </a:bodyPr>
+          <a:lstStyle/>
+          <a:p>
+            <a:pPr algn="l">
+              <a:lnSpc>
+                <a:spcPct val="115000"/>
+              </a:lnSpc>
+            </a:pPr>
+            <a:r>
+              <a:rPr sz="4600" b="1">
                 <a:solidFill>
                   <a:srgbClr val="4E9BF0"/>
                 </a:solidFill>
                 <a:latin typeface="Helvetica Neue"/>
               </a:rPr>
-              <a:t>—  </a:t>
-            </a:r>
-            <a:r>
-              <a:rPr sz="1550">
+              <a:t>10%</a:t>
+            </a:r>
+          </a:p>
+        </p:txBody>
+      </p:sp>
+      <p:sp>
+        <p:nvSpPr>
+          <p:cNvPr id="6" name="TextBox 5"/>
+          <p:cNvSpPr txBox="1"/>
+          <p:nvPr/>
+        </p:nvSpPr>
+        <p:spPr>
+          <a:xfrm>
+            <a:off x="685800" y="3246120"/>
+            <a:ext cx="3285744" cy="822960"/>
+          </a:xfrm>
+          <a:prstGeom prst="rect">
+            <a:avLst/>
+          </a:prstGeom>
+          <a:noFill/>
+        </p:spPr>
+        <p:txBody>
+          <a:bodyPr wrap="square" anchor="t" lIns="0" rIns="0" tIns="0" bIns="0">
+            <a:spAutoFit/>
+          </a:bodyPr>
+          <a:lstStyle/>
+          <a:p>
+            <a:pPr algn="l">
+              <a:lnSpc>
+                <a:spcPct val="130000"/>
+              </a:lnSpc>
+            </a:pPr>
+            <a:r>
+              <a:rPr sz="1350" b="0">
+                <a:solidFill>
+                  <a:srgbClr val="A6ACBA"/>
+                </a:solidFill>
+                <a:latin typeface="Helvetica Neue"/>
+              </a:rPr>
+              <a:t>de todos los pagos elegibles de clientes de Zebraish recibidos durante tu Periodo</a:t>
+            </a:r>
+          </a:p>
+        </p:txBody>
+      </p:sp>
+      <p:sp>
+        <p:nvSpPr>
+          <p:cNvPr id="7" name="TextBox 6"/>
+          <p:cNvSpPr txBox="1"/>
+          <p:nvPr/>
+        </p:nvSpPr>
+        <p:spPr>
+          <a:xfrm>
+            <a:off x="4291584" y="2148840"/>
+            <a:ext cx="3605784" cy="1280160"/>
+          </a:xfrm>
+          <a:prstGeom prst="rect">
+            <a:avLst/>
+          </a:prstGeom>
+          <a:noFill/>
+        </p:spPr>
+        <p:txBody>
+          <a:bodyPr wrap="square" anchor="t" lIns="0" rIns="0" tIns="0" bIns="0">
+            <a:spAutoFit/>
+          </a:bodyPr>
+          <a:lstStyle/>
+          <a:p>
+            <a:pPr algn="l">
+              <a:lnSpc>
+                <a:spcPct val="115000"/>
+              </a:lnSpc>
+            </a:pPr>
+            <a:r>
+              <a:rPr sz="4600" b="1">
+                <a:solidFill>
+                  <a:srgbClr val="4E9BF0"/>
+                </a:solidFill>
+                <a:latin typeface="Helvetica Neue"/>
+              </a:rPr>
+              <a:t>Semanal</a:t>
+            </a:r>
+          </a:p>
+        </p:txBody>
+      </p:sp>
+      <p:sp>
+        <p:nvSpPr>
+          <p:cNvPr id="8" name="TextBox 7"/>
+          <p:cNvSpPr txBox="1"/>
+          <p:nvPr/>
+        </p:nvSpPr>
+        <p:spPr>
+          <a:xfrm>
+            <a:off x="4291584" y="3246120"/>
+            <a:ext cx="3285744" cy="822960"/>
+          </a:xfrm>
+          <a:prstGeom prst="rect">
+            <a:avLst/>
+          </a:prstGeom>
+          <a:noFill/>
+        </p:spPr>
+        <p:txBody>
+          <a:bodyPr wrap="square" anchor="t" lIns="0" rIns="0" tIns="0" bIns="0">
+            <a:spAutoFit/>
+          </a:bodyPr>
+          <a:lstStyle/>
+          <a:p>
+            <a:pPr algn="l">
+              <a:lnSpc>
+                <a:spcPct val="130000"/>
+              </a:lnSpc>
+            </a:pPr>
+            <a:r>
+              <a:rPr sz="1350" b="0">
+                <a:solidFill>
+                  <a:srgbClr val="A6ACBA"/>
+                </a:solidFill>
+                <a:latin typeface="Helvetica Neue"/>
+              </a:rPr>
+              <a:t>la comisión se calcula y se paga cada semana</a:t>
+            </a:r>
+          </a:p>
+        </p:txBody>
+      </p:sp>
+      <p:sp>
+        <p:nvSpPr>
+          <p:cNvPr id="9" name="TextBox 8"/>
+          <p:cNvSpPr txBox="1"/>
+          <p:nvPr/>
+        </p:nvSpPr>
+        <p:spPr>
+          <a:xfrm>
+            <a:off x="7897368" y="2148840"/>
+            <a:ext cx="3605784" cy="1280160"/>
+          </a:xfrm>
+          <a:prstGeom prst="rect">
+            <a:avLst/>
+          </a:prstGeom>
+          <a:noFill/>
+        </p:spPr>
+        <p:txBody>
+          <a:bodyPr wrap="square" anchor="t" lIns="0" rIns="0" tIns="0" bIns="0">
+            <a:spAutoFit/>
+          </a:bodyPr>
+          <a:lstStyle/>
+          <a:p>
+            <a:pPr algn="l">
+              <a:lnSpc>
+                <a:spcPct val="115000"/>
+              </a:lnSpc>
+            </a:pPr>
+            <a:r>
+              <a:rPr sz="4600" b="1">
+                <a:solidFill>
+                  <a:srgbClr val="4E9BF0"/>
+                </a:solidFill>
+                <a:latin typeface="Helvetica Neue"/>
+              </a:rPr>
+              <a:t>Domingo</a:t>
+            </a:r>
+          </a:p>
+        </p:txBody>
+      </p:sp>
+      <p:sp>
+        <p:nvSpPr>
+          <p:cNvPr id="10" name="TextBox 9"/>
+          <p:cNvSpPr txBox="1"/>
+          <p:nvPr/>
+        </p:nvSpPr>
+        <p:spPr>
+          <a:xfrm>
+            <a:off x="7897368" y="3246120"/>
+            <a:ext cx="3285744" cy="822960"/>
+          </a:xfrm>
+          <a:prstGeom prst="rect">
+            <a:avLst/>
+          </a:prstGeom>
+          <a:noFill/>
+        </p:spPr>
+        <p:txBody>
+          <a:bodyPr wrap="square" anchor="t" lIns="0" rIns="0" tIns="0" bIns="0">
+            <a:spAutoFit/>
+          </a:bodyPr>
+          <a:lstStyle/>
+          <a:p>
+            <a:pPr algn="l">
+              <a:lnSpc>
+                <a:spcPct val="130000"/>
+              </a:lnSpc>
+            </a:pPr>
+            <a:r>
+              <a:rPr sz="1350" b="0">
+                <a:solidFill>
+                  <a:srgbClr val="A6ACBA"/>
+                </a:solidFill>
+                <a:latin typeface="Helvetica Neue"/>
+              </a:rPr>
+              <a:t>día de pago — revisado y enviado por transferencia bancaria</a:t>
+            </a:r>
+          </a:p>
+        </p:txBody>
+      </p:sp>
+      <p:sp>
+        <p:nvSpPr>
+          <p:cNvPr id="11" name="Rectangle 10"/>
+          <p:cNvSpPr/>
+          <p:nvPr/>
+        </p:nvSpPr>
+        <p:spPr>
+          <a:xfrm>
+            <a:off x="685800" y="5029200"/>
+            <a:ext cx="10817352" cy="18288"/>
+          </a:xfrm>
+          <a:prstGeom prst="rect">
+            <a:avLst/>
+          </a:prstGeom>
+          <a:solidFill>
+            <a:srgbClr val="2A2E3A"/>
+          </a:solidFill>
+          <a:ln>
+            <a:noFill/>
+          </a:ln>
+          <a:effectLst/>
+        </p:spPr>
+        <p:style>
+          <a:lnRef idx="1">
+            <a:schemeClr val="accent1"/>
+          </a:lnRef>
+          <a:fillRef idx="3">
+            <a:schemeClr val="accent1"/>
+          </a:fillRef>
+          <a:effectRef idx="2">
+            <a:schemeClr val="accent1"/>
+          </a:effectRef>
+          <a:fontRef idx="minor">
+            <a:schemeClr val="lt1"/>
+          </a:fontRef>
+        </p:style>
+        <p:txBody>
+          <a:bodyPr rtlCol="0" anchor="ctr"/>
+          <a:lstStyle/>
+          <a:p>
+            <a:pPr algn="ctr"/>
+          </a:p>
+        </p:txBody>
+      </p:sp>
+      <p:sp>
+        <p:nvSpPr>
+          <p:cNvPr id="12" name="TextBox 11"/>
+          <p:cNvSpPr txBox="1"/>
+          <p:nvPr/>
+        </p:nvSpPr>
+        <p:spPr>
+          <a:xfrm>
+            <a:off x="685800" y="5212080"/>
+            <a:ext cx="10332720" cy="1005840"/>
+          </a:xfrm>
+          <a:prstGeom prst="rect">
+            <a:avLst/>
+          </a:prstGeom>
+          <a:noFill/>
+        </p:spPr>
+        <p:txBody>
+          <a:bodyPr wrap="square" anchor="t" lIns="0" rIns="0" tIns="0" bIns="0">
+            <a:spAutoFit/>
+          </a:bodyPr>
+          <a:lstStyle/>
+          <a:p>
+            <a:pPr algn="l">
+              <a:lnSpc>
+                <a:spcPct val="135000"/>
+              </a:lnSpc>
+            </a:pPr>
+            <a:r>
+              <a:rPr sz="1400" b="0">
                 <a:solidFill>
                   <a:srgbClr val="FFFFFF"/>
                 </a:solidFill>
                 <a:latin typeface="Helvetica Neue"/>
               </a:rPr>
-              <a:t>Cuando presentas a un cliente, el proyecto se abre a través del Portal de Proyectos y Pagos de Zebraish (o simplemente se lo dices a Joshua y él lo abre): recibe un identificador único de proyecto, como ZB-00017.</a:t>
-            </a:r>
-          </a:p>
-          <a:p>
-            <a:pPr>
-              <a:lnSpc>
-                <a:spcPct val="125000"/>
-              </a:lnSpc>
-              <a:spcAft>
-                <a:spcPts val="1000"/>
-              </a:spcAft>
-            </a:pPr>
-            <a:r>
-              <a:rPr sz="1550" b="1">
-                <a:solidFill>
-                  <a:srgbClr val="4E9BF0"/>
-                </a:solidFill>
-                <a:latin typeface="Helvetica Neue"/>
-              </a:rPr>
-              <a:t>—  </a:t>
-            </a:r>
-            <a:r>
-              <a:rPr sz="1550">
-                <a:solidFill>
-                  <a:srgbClr val="FFFFFF"/>
-                </a:solidFill>
-                <a:latin typeface="Helvetica Neue"/>
-              </a:rPr>
-              <a:t>No hay ningún código o enlace de referido personal que gestionar ni compartir.</a:t>
-            </a:r>
-          </a:p>
-          <a:p>
-            <a:pPr>
-              <a:lnSpc>
-                <a:spcPct val="125000"/>
-              </a:lnSpc>
-              <a:spcAft>
-                <a:spcPts val="1000"/>
-              </a:spcAft>
-            </a:pPr>
-            <a:r>
-              <a:rPr sz="1550" b="1">
-                <a:solidFill>
-                  <a:srgbClr val="4E9BF0"/>
-                </a:solidFill>
-                <a:latin typeface="Helvetica Neue"/>
-              </a:rPr>
-              <a:t>—  </a:t>
-            </a:r>
-            <a:r>
-              <a:rPr sz="1550">
-                <a:solidFill>
-                  <a:srgbClr val="FFFFFF"/>
-                </a:solidFill>
-                <a:latin typeface="Helvetica Neue"/>
-              </a:rPr>
-              <a:t>La comisión no se calcula asociando clientes individuales contigo: se basa en todos los pagos elegibles que reciba Zebraish durante tu Periodo.</a:t>
+              <a:t>Sin límite arbitrario a lo que puedes ganar, y sin salario fijo: la compensación se basa en comisión durante el Periodo Inicial.</a:t>
             </a:r>
           </a:p>
         </p:txBody>
       </p:sp>
       <p:pic>
         <p:nvPicPr>
-          <p:cNvPr id="6" name="Picture 5" descr="logo-head.png"/>
+          <p:cNvPr id="13" name="Picture 12" descr="logo-head.png"/>
           <p:cNvPicPr>
             <a:picLocks noChangeAspect="1"/>
           </p:cNvPicPr>
@@ -4176,7 +4406,7 @@
       </p:pic>
       <p:sp>
         <p:nvSpPr>
-          <p:cNvPr id="7" name="TextBox 6"/>
+          <p:cNvPr id="14" name="TextBox 13"/>
           <p:cNvSpPr txBox="1"/>
           <p:nvPr/>
         </p:nvSpPr>
@@ -4215,7 +4445,7 @@
       </p:sp>
       <p:sp>
         <p:nvSpPr>
-          <p:cNvPr id="8" name="TextBox 7"/>
+          <p:cNvPr id="15" name="TextBox 14"/>
           <p:cNvSpPr txBox="1"/>
           <p:nvPr/>
         </p:nvSpPr>
@@ -4254,7 +4484,7 @@
       </p:sp>
       <p:cxnSp>
         <p:nvCxnSpPr>
-          <p:cNvPr id="9" name="Connector 8"/>
+          <p:cNvPr id="16" name="Connector 15"/>
           <p:cNvCxnSpPr/>
           <p:nvPr/>
         </p:nvCxnSpPr>
@@ -4386,7 +4616,7 @@
                 </a:solidFill>
                 <a:latin typeface="Helvetica Neue"/>
               </a:rPr>
-              <a:t>La comisión, de un vistazo</a:t>
+              <a:t>Pago semanal — cómo funciona</a:t>
             </a:r>
           </a:p>
         </p:txBody>
@@ -4428,254 +4658,20 @@
       </p:cxnSp>
       <p:sp>
         <p:nvSpPr>
-          <p:cNvPr id="5" name="TextBox 4"/>
-          <p:cNvSpPr txBox="1"/>
-          <p:nvPr/>
-        </p:nvSpPr>
-        <p:spPr>
-          <a:xfrm>
-            <a:off x="685800" y="2148840"/>
-            <a:ext cx="3605784" cy="1280160"/>
-          </a:xfrm>
-          <a:prstGeom prst="rect">
-            <a:avLst/>
-          </a:prstGeom>
-          <a:noFill/>
-        </p:spPr>
-        <p:txBody>
-          <a:bodyPr wrap="square" anchor="t" lIns="0" rIns="0" tIns="0" bIns="0">
-            <a:spAutoFit/>
-          </a:bodyPr>
-          <a:lstStyle/>
-          <a:p>
-            <a:pPr algn="l">
-              <a:lnSpc>
-                <a:spcPct val="115000"/>
-              </a:lnSpc>
-            </a:pPr>
-            <a:r>
-              <a:rPr sz="4600" b="1">
-                <a:solidFill>
-                  <a:srgbClr val="4E9BF0"/>
-                </a:solidFill>
-                <a:latin typeface="Helvetica Neue"/>
-              </a:rPr>
-              <a:t>10%</a:t>
-            </a:r>
-          </a:p>
-        </p:txBody>
-      </p:sp>
-      <p:sp>
-        <p:nvSpPr>
-          <p:cNvPr id="6" name="TextBox 5"/>
-          <p:cNvSpPr txBox="1"/>
-          <p:nvPr/>
-        </p:nvSpPr>
-        <p:spPr>
-          <a:xfrm>
-            <a:off x="685800" y="3246120"/>
-            <a:ext cx="3285744" cy="822960"/>
-          </a:xfrm>
-          <a:prstGeom prst="rect">
-            <a:avLst/>
-          </a:prstGeom>
-          <a:noFill/>
-        </p:spPr>
-        <p:txBody>
-          <a:bodyPr wrap="square" anchor="t" lIns="0" rIns="0" tIns="0" bIns="0">
-            <a:spAutoFit/>
-          </a:bodyPr>
-          <a:lstStyle/>
-          <a:p>
-            <a:pPr algn="l">
-              <a:lnSpc>
-                <a:spcPct val="130000"/>
-              </a:lnSpc>
-            </a:pPr>
-            <a:r>
-              <a:rPr sz="1350" b="0">
-                <a:solidFill>
-                  <a:srgbClr val="A6ACBA"/>
-                </a:solidFill>
-                <a:latin typeface="Helvetica Neue"/>
-              </a:rPr>
-              <a:t>de todos los pagos elegibles de clientes de Zebraish recibidos durante tu Periodo</a:t>
-            </a:r>
-          </a:p>
-        </p:txBody>
-      </p:sp>
-      <p:sp>
-        <p:nvSpPr>
-          <p:cNvPr id="7" name="TextBox 6"/>
-          <p:cNvSpPr txBox="1"/>
-          <p:nvPr/>
-        </p:nvSpPr>
-        <p:spPr>
-          <a:xfrm>
-            <a:off x="4291584" y="2148840"/>
-            <a:ext cx="3605784" cy="1280160"/>
-          </a:xfrm>
-          <a:prstGeom prst="rect">
-            <a:avLst/>
-          </a:prstGeom>
-          <a:noFill/>
-        </p:spPr>
-        <p:txBody>
-          <a:bodyPr wrap="square" anchor="t" lIns="0" rIns="0" tIns="0" bIns="0">
-            <a:spAutoFit/>
-          </a:bodyPr>
-          <a:lstStyle/>
-          <a:p>
-            <a:pPr algn="l">
-              <a:lnSpc>
-                <a:spcPct val="115000"/>
-              </a:lnSpc>
-            </a:pPr>
-            <a:r>
-              <a:rPr sz="4600" b="1">
-                <a:solidFill>
-                  <a:srgbClr val="4E9BF0"/>
-                </a:solidFill>
-                <a:latin typeface="Helvetica Neue"/>
-              </a:rPr>
-              <a:t>Semanal</a:t>
-            </a:r>
-          </a:p>
-        </p:txBody>
-      </p:sp>
-      <p:sp>
-        <p:nvSpPr>
-          <p:cNvPr id="8" name="TextBox 7"/>
-          <p:cNvSpPr txBox="1"/>
-          <p:nvPr/>
-        </p:nvSpPr>
-        <p:spPr>
-          <a:xfrm>
-            <a:off x="4291584" y="3246120"/>
-            <a:ext cx="3285744" cy="822960"/>
-          </a:xfrm>
-          <a:prstGeom prst="rect">
-            <a:avLst/>
-          </a:prstGeom>
-          <a:noFill/>
-        </p:spPr>
-        <p:txBody>
-          <a:bodyPr wrap="square" anchor="t" lIns="0" rIns="0" tIns="0" bIns="0">
-            <a:spAutoFit/>
-          </a:bodyPr>
-          <a:lstStyle/>
-          <a:p>
-            <a:pPr algn="l">
-              <a:lnSpc>
-                <a:spcPct val="130000"/>
-              </a:lnSpc>
-            </a:pPr>
-            <a:r>
-              <a:rPr sz="1350" b="0">
-                <a:solidFill>
-                  <a:srgbClr val="A6ACBA"/>
-                </a:solidFill>
-                <a:latin typeface="Helvetica Neue"/>
-              </a:rPr>
-              <a:t>la comisión se calcula y se paga cada semana</a:t>
-            </a:r>
-          </a:p>
-        </p:txBody>
-      </p:sp>
-      <p:sp>
-        <p:nvSpPr>
-          <p:cNvPr id="9" name="TextBox 8"/>
-          <p:cNvSpPr txBox="1"/>
-          <p:nvPr/>
-        </p:nvSpPr>
-        <p:spPr>
-          <a:xfrm>
-            <a:off x="7897368" y="2148840"/>
-            <a:ext cx="3605784" cy="1280160"/>
-          </a:xfrm>
-          <a:prstGeom prst="rect">
-            <a:avLst/>
-          </a:prstGeom>
-          <a:noFill/>
-        </p:spPr>
-        <p:txBody>
-          <a:bodyPr wrap="square" anchor="t" lIns="0" rIns="0" tIns="0" bIns="0">
-            <a:spAutoFit/>
-          </a:bodyPr>
-          <a:lstStyle/>
-          <a:p>
-            <a:pPr algn="l">
-              <a:lnSpc>
-                <a:spcPct val="115000"/>
-              </a:lnSpc>
-            </a:pPr>
-            <a:r>
-              <a:rPr sz="4600" b="1">
-                <a:solidFill>
-                  <a:srgbClr val="4E9BF0"/>
-                </a:solidFill>
-                <a:latin typeface="Helvetica Neue"/>
-              </a:rPr>
-              <a:t>Domingo</a:t>
-            </a:r>
-          </a:p>
-        </p:txBody>
-      </p:sp>
-      <p:sp>
-        <p:nvSpPr>
-          <p:cNvPr id="10" name="TextBox 9"/>
-          <p:cNvSpPr txBox="1"/>
-          <p:nvPr/>
-        </p:nvSpPr>
-        <p:spPr>
-          <a:xfrm>
-            <a:off x="7897368" y="3246120"/>
-            <a:ext cx="3285744" cy="822960"/>
-          </a:xfrm>
-          <a:prstGeom prst="rect">
-            <a:avLst/>
-          </a:prstGeom>
-          <a:noFill/>
-        </p:spPr>
-        <p:txBody>
-          <a:bodyPr wrap="square" anchor="t" lIns="0" rIns="0" tIns="0" bIns="0">
-            <a:spAutoFit/>
-          </a:bodyPr>
-          <a:lstStyle/>
-          <a:p>
-            <a:pPr algn="l">
-              <a:lnSpc>
-                <a:spcPct val="130000"/>
-              </a:lnSpc>
-            </a:pPr>
-            <a:r>
-              <a:rPr sz="1350" b="0">
-                <a:solidFill>
-                  <a:srgbClr val="A6ACBA"/>
-                </a:solidFill>
-                <a:latin typeface="Helvetica Neue"/>
-              </a:rPr>
-              <a:t>día de pago — revisado y enviado por transferencia bancaria</a:t>
-            </a:r>
-          </a:p>
-        </p:txBody>
-      </p:sp>
-      <p:sp>
-        <p:nvSpPr>
-          <p:cNvPr id="11" name="Rectangle 10"/>
+          <p:cNvPr id="5" name="Rectangle 4"/>
           <p:cNvSpPr/>
           <p:nvPr/>
         </p:nvSpPr>
         <p:spPr>
           <a:xfrm>
-            <a:off x="685800" y="5029200"/>
-            <a:ext cx="10817352" cy="18288"/>
+            <a:off x="685800" y="1920240"/>
+            <a:ext cx="10817352" cy="621792"/>
           </a:xfrm>
           <a:prstGeom prst="rect">
             <a:avLst/>
           </a:prstGeom>
           <a:solidFill>
-            <a:srgbClr val="2A2E3A"/>
+            <a:srgbClr val="1D68C0"/>
           </a:solidFill>
           <a:ln>
             <a:noFill/>
@@ -4706,14 +4702,258 @@
       </p:sp>
       <p:sp>
         <p:nvSpPr>
+          <p:cNvPr id="6" name="TextBox 5"/>
+          <p:cNvSpPr txBox="1"/>
+          <p:nvPr/>
+        </p:nvSpPr>
+        <p:spPr>
+          <a:xfrm>
+            <a:off x="868680" y="2029968"/>
+            <a:ext cx="4846320" cy="621792"/>
+          </a:xfrm>
+          <a:prstGeom prst="rect">
+            <a:avLst/>
+          </a:prstGeom>
+          <a:noFill/>
+        </p:spPr>
+        <p:txBody>
+          <a:bodyPr wrap="square" anchor="t" lIns="0" rIns="0" tIns="0" bIns="0">
+            <a:spAutoFit/>
+          </a:bodyPr>
+          <a:lstStyle/>
+          <a:p>
+            <a:pPr algn="l">
+              <a:lnSpc>
+                <a:spcPct val="115000"/>
+              </a:lnSpc>
+            </a:pPr>
+            <a:r>
+              <a:rPr sz="1250" b="1">
+                <a:solidFill>
+                  <a:srgbClr val="FFFFFF"/>
+                </a:solidFill>
+                <a:latin typeface="Helvetica Neue"/>
+              </a:rPr>
+              <a:t>Paso</a:t>
+            </a:r>
+          </a:p>
+        </p:txBody>
+      </p:sp>
+      <p:sp>
+        <p:nvSpPr>
+          <p:cNvPr id="7" name="TextBox 6"/>
+          <p:cNvSpPr txBox="1"/>
+          <p:nvPr/>
+        </p:nvSpPr>
+        <p:spPr>
+          <a:xfrm>
+            <a:off x="5989320" y="2029968"/>
+            <a:ext cx="5422392" cy="621792"/>
+          </a:xfrm>
+          <a:prstGeom prst="rect">
+            <a:avLst/>
+          </a:prstGeom>
+          <a:noFill/>
+        </p:spPr>
+        <p:txBody>
+          <a:bodyPr wrap="square" anchor="t" lIns="0" rIns="0" tIns="0" bIns="0">
+            <a:spAutoFit/>
+          </a:bodyPr>
+          <a:lstStyle/>
+          <a:p>
+            <a:pPr algn="l">
+              <a:lnSpc>
+                <a:spcPct val="115000"/>
+              </a:lnSpc>
+            </a:pPr>
+            <a:r>
+              <a:rPr sz="1250" b="1">
+                <a:solidFill>
+                  <a:srgbClr val="FFFFFF"/>
+                </a:solidFill>
+                <a:latin typeface="Helvetica Neue"/>
+              </a:rPr>
+              <a:t>Qué ocurre</a:t>
+            </a:r>
+          </a:p>
+        </p:txBody>
+      </p:sp>
+      <p:sp>
+        <p:nvSpPr>
+          <p:cNvPr id="8" name="Rectangle 7"/>
+          <p:cNvSpPr/>
+          <p:nvPr/>
+        </p:nvSpPr>
+        <p:spPr>
+          <a:xfrm>
+            <a:off x="685800" y="2542032"/>
+            <a:ext cx="10817352" cy="621792"/>
+          </a:xfrm>
+          <a:prstGeom prst="rect">
+            <a:avLst/>
+          </a:prstGeom>
+          <a:solidFill>
+            <a:srgbClr val="141720"/>
+          </a:solidFill>
+          <a:ln>
+            <a:noFill/>
+          </a:ln>
+          <a:effectLst/>
+        </p:spPr>
+        <p:style>
+          <a:lnRef idx="1">
+            <a:schemeClr val="accent1"/>
+          </a:lnRef>
+          <a:fillRef idx="3">
+            <a:schemeClr val="accent1"/>
+          </a:fillRef>
+          <a:effectRef idx="2">
+            <a:schemeClr val="accent1"/>
+          </a:effectRef>
+          <a:fontRef idx="minor">
+            <a:schemeClr val="lt1"/>
+          </a:fontRef>
+        </p:style>
+        <p:txBody>
+          <a:bodyPr rtlCol="0" anchor="ctr"/>
+          <a:lstStyle/>
+          <a:p>
+            <a:pPr algn="ctr"/>
+          </a:p>
+        </p:txBody>
+      </p:sp>
+      <p:sp>
+        <p:nvSpPr>
+          <p:cNvPr id="9" name="TextBox 8"/>
+          <p:cNvSpPr txBox="1"/>
+          <p:nvPr/>
+        </p:nvSpPr>
+        <p:spPr>
+          <a:xfrm>
+            <a:off x="868680" y="2633472"/>
+            <a:ext cx="4846320" cy="621792"/>
+          </a:xfrm>
+          <a:prstGeom prst="rect">
+            <a:avLst/>
+          </a:prstGeom>
+          <a:noFill/>
+        </p:spPr>
+        <p:txBody>
+          <a:bodyPr wrap="square" anchor="t" lIns="0" rIns="0" tIns="0" bIns="0">
+            <a:spAutoFit/>
+          </a:bodyPr>
+          <a:lstStyle/>
+          <a:p>
+            <a:pPr algn="l">
+              <a:lnSpc>
+                <a:spcPct val="115000"/>
+              </a:lnSpc>
+            </a:pPr>
+            <a:r>
+              <a:rPr sz="1300" b="1">
+                <a:solidFill>
+                  <a:srgbClr val="FFFFFF"/>
+                </a:solidFill>
+                <a:latin typeface="Helvetica Neue"/>
+              </a:rPr>
+              <a:t>Revisión del domingo</a:t>
+            </a:r>
+          </a:p>
+        </p:txBody>
+      </p:sp>
+      <p:sp>
+        <p:nvSpPr>
+          <p:cNvPr id="10" name="TextBox 9"/>
+          <p:cNvSpPr txBox="1"/>
+          <p:nvPr/>
+        </p:nvSpPr>
+        <p:spPr>
+          <a:xfrm>
+            <a:off x="5989320" y="2633472"/>
+            <a:ext cx="5422392" cy="621792"/>
+          </a:xfrm>
+          <a:prstGeom prst="rect">
+            <a:avLst/>
+          </a:prstGeom>
+          <a:noFill/>
+        </p:spPr>
+        <p:txBody>
+          <a:bodyPr wrap="square" anchor="t" lIns="0" rIns="0" tIns="0" bIns="0">
+            <a:spAutoFit/>
+          </a:bodyPr>
+          <a:lstStyle/>
+          <a:p>
+            <a:pPr algn="l">
+              <a:lnSpc>
+                <a:spcPct val="115000"/>
+              </a:lnSpc>
+            </a:pPr>
+            <a:r>
+              <a:rPr sz="1300" b="0">
+                <a:solidFill>
+                  <a:srgbClr val="A6ACBA"/>
+                </a:solidFill>
+                <a:latin typeface="Helvetica Neue"/>
+              </a:rPr>
+              <a:t>Joshua totaliza todos los pagos elegibles que Zebraish recibió de lunes a domingo.</a:t>
+            </a:r>
+          </a:p>
+        </p:txBody>
+      </p:sp>
+      <p:sp>
+        <p:nvSpPr>
+          <p:cNvPr id="11" name="Rectangle 10"/>
+          <p:cNvSpPr/>
+          <p:nvPr/>
+        </p:nvSpPr>
+        <p:spPr>
+          <a:xfrm>
+            <a:off x="685800" y="3163824"/>
+            <a:ext cx="10817352" cy="621792"/>
+          </a:xfrm>
+          <a:prstGeom prst="rect">
+            <a:avLst/>
+          </a:prstGeom>
+          <a:solidFill>
+            <a:srgbClr val="0B0D12"/>
+          </a:solidFill>
+          <a:ln>
+            <a:noFill/>
+          </a:ln>
+          <a:effectLst/>
+        </p:spPr>
+        <p:style>
+          <a:lnRef idx="1">
+            <a:schemeClr val="accent1"/>
+          </a:lnRef>
+          <a:fillRef idx="3">
+            <a:schemeClr val="accent1"/>
+          </a:fillRef>
+          <a:effectRef idx="2">
+            <a:schemeClr val="accent1"/>
+          </a:effectRef>
+          <a:fontRef idx="minor">
+            <a:schemeClr val="lt1"/>
+          </a:fontRef>
+        </p:style>
+        <p:txBody>
+          <a:bodyPr rtlCol="0" anchor="ctr"/>
+          <a:lstStyle/>
+          <a:p>
+            <a:pPr algn="ctr"/>
+          </a:p>
+        </p:txBody>
+      </p:sp>
+      <p:sp>
+        <p:nvSpPr>
           <p:cNvPr id="12" name="TextBox 11"/>
           <p:cNvSpPr txBox="1"/>
           <p:nvPr/>
         </p:nvSpPr>
         <p:spPr>
           <a:xfrm>
-            <a:off x="685800" y="5212080"/>
-            <a:ext cx="10332720" cy="1005840"/>
+            <a:off x="868680" y="3255264"/>
+            <a:ext cx="4846320" cy="621792"/>
           </a:xfrm>
           <a:prstGeom prst="rect">
             <a:avLst/>
@@ -4728,24 +4968,464 @@
           <a:p>
             <a:pPr algn="l">
               <a:lnSpc>
-                <a:spcPct val="135000"/>
-              </a:lnSpc>
-            </a:pPr>
-            <a:r>
-              <a:rPr sz="1400" b="0">
+                <a:spcPct val="115000"/>
+              </a:lnSpc>
+            </a:pPr>
+            <a:r>
+              <a:rPr sz="1300" b="1">
                 <a:solidFill>
                   <a:srgbClr val="FFFFFF"/>
                 </a:solidFill>
                 <a:latin typeface="Helvetica Neue"/>
               </a:rPr>
-              <a:t>Sin límite arbitrario a lo que puedes ganar, y sin salario fijo: la compensación se basa en comisión durante el Periodo Inicial.</a:t>
-            </a:r>
-          </a:p>
-        </p:txBody>
-      </p:sp>
+              <a:t>Cálculo</a:t>
+            </a:r>
+          </a:p>
+        </p:txBody>
+      </p:sp>
+      <p:sp>
+        <p:nvSpPr>
+          <p:cNvPr id="13" name="TextBox 12"/>
+          <p:cNvSpPr txBox="1"/>
+          <p:nvPr/>
+        </p:nvSpPr>
+        <p:spPr>
+          <a:xfrm>
+            <a:off x="5989320" y="3255264"/>
+            <a:ext cx="5422392" cy="621792"/>
+          </a:xfrm>
+          <a:prstGeom prst="rect">
+            <a:avLst/>
+          </a:prstGeom>
+          <a:noFill/>
+        </p:spPr>
+        <p:txBody>
+          <a:bodyPr wrap="square" anchor="t" lIns="0" rIns="0" tIns="0" bIns="0">
+            <a:spAutoFit/>
+          </a:bodyPr>
+          <a:lstStyle/>
+          <a:p>
+            <a:pPr algn="l">
+              <a:lnSpc>
+                <a:spcPct val="115000"/>
+              </a:lnSpc>
+            </a:pPr>
+            <a:r>
+              <a:rPr sz="1300" b="0">
+                <a:solidFill>
+                  <a:srgbClr val="A6ACBA"/>
+                </a:solidFill>
+                <a:latin typeface="Helvetica Neue"/>
+              </a:rPr>
+              <a:t>El 10% de ese total semanal es tu comisión de la semana.</a:t>
+            </a:r>
+          </a:p>
+        </p:txBody>
+      </p:sp>
+      <p:sp>
+        <p:nvSpPr>
+          <p:cNvPr id="14" name="Rectangle 13"/>
+          <p:cNvSpPr/>
+          <p:nvPr/>
+        </p:nvSpPr>
+        <p:spPr>
+          <a:xfrm>
+            <a:off x="685800" y="3785616"/>
+            <a:ext cx="10817352" cy="621792"/>
+          </a:xfrm>
+          <a:prstGeom prst="rect">
+            <a:avLst/>
+          </a:prstGeom>
+          <a:solidFill>
+            <a:srgbClr val="141720"/>
+          </a:solidFill>
+          <a:ln>
+            <a:noFill/>
+          </a:ln>
+          <a:effectLst/>
+        </p:spPr>
+        <p:style>
+          <a:lnRef idx="1">
+            <a:schemeClr val="accent1"/>
+          </a:lnRef>
+          <a:fillRef idx="3">
+            <a:schemeClr val="accent1"/>
+          </a:fillRef>
+          <a:effectRef idx="2">
+            <a:schemeClr val="accent1"/>
+          </a:effectRef>
+          <a:fontRef idx="minor">
+            <a:schemeClr val="lt1"/>
+          </a:fontRef>
+        </p:style>
+        <p:txBody>
+          <a:bodyPr rtlCol="0" anchor="ctr"/>
+          <a:lstStyle/>
+          <a:p>
+            <a:pPr algn="ctr"/>
+          </a:p>
+        </p:txBody>
+      </p:sp>
+      <p:sp>
+        <p:nvSpPr>
+          <p:cNvPr id="15" name="TextBox 14"/>
+          <p:cNvSpPr txBox="1"/>
+          <p:nvPr/>
+        </p:nvSpPr>
+        <p:spPr>
+          <a:xfrm>
+            <a:off x="868680" y="3877056"/>
+            <a:ext cx="4846320" cy="621792"/>
+          </a:xfrm>
+          <a:prstGeom prst="rect">
+            <a:avLst/>
+          </a:prstGeom>
+          <a:noFill/>
+        </p:spPr>
+        <p:txBody>
+          <a:bodyPr wrap="square" anchor="t" lIns="0" rIns="0" tIns="0" bIns="0">
+            <a:spAutoFit/>
+          </a:bodyPr>
+          <a:lstStyle/>
+          <a:p>
+            <a:pPr algn="l">
+              <a:lnSpc>
+                <a:spcPct val="115000"/>
+              </a:lnSpc>
+            </a:pPr>
+            <a:r>
+              <a:rPr sz="1300" b="1">
+                <a:solidFill>
+                  <a:srgbClr val="FFFFFF"/>
+                </a:solidFill>
+                <a:latin typeface="Helvetica Neue"/>
+              </a:rPr>
+              <a:t>Pago</a:t>
+            </a:r>
+          </a:p>
+        </p:txBody>
+      </p:sp>
+      <p:sp>
+        <p:nvSpPr>
+          <p:cNvPr id="16" name="TextBox 15"/>
+          <p:cNvSpPr txBox="1"/>
+          <p:nvPr/>
+        </p:nvSpPr>
+        <p:spPr>
+          <a:xfrm>
+            <a:off x="5989320" y="3877056"/>
+            <a:ext cx="5422392" cy="621792"/>
+          </a:xfrm>
+          <a:prstGeom prst="rect">
+            <a:avLst/>
+          </a:prstGeom>
+          <a:noFill/>
+        </p:spPr>
+        <p:txBody>
+          <a:bodyPr wrap="square" anchor="t" lIns="0" rIns="0" tIns="0" bIns="0">
+            <a:spAutoFit/>
+          </a:bodyPr>
+          <a:lstStyle/>
+          <a:p>
+            <a:pPr algn="l">
+              <a:lnSpc>
+                <a:spcPct val="115000"/>
+              </a:lnSpc>
+            </a:pPr>
+            <a:r>
+              <a:rPr sz="1300" b="0">
+                <a:solidFill>
+                  <a:srgbClr val="A6ACBA"/>
+                </a:solidFill>
+                <a:latin typeface="Helvetica Neue"/>
+              </a:rPr>
+              <a:t>Se envía por transferencia bancaria ese mismo día, o el siguiente día hábil si una transferencia en domingo no es posible.</a:t>
+            </a:r>
+          </a:p>
+        </p:txBody>
+      </p:sp>
+      <p:sp>
+        <p:nvSpPr>
+          <p:cNvPr id="17" name="Rectangle 16"/>
+          <p:cNvSpPr/>
+          <p:nvPr/>
+        </p:nvSpPr>
+        <p:spPr>
+          <a:xfrm>
+            <a:off x="685800" y="4407408"/>
+            <a:ext cx="10817352" cy="621792"/>
+          </a:xfrm>
+          <a:prstGeom prst="rect">
+            <a:avLst/>
+          </a:prstGeom>
+          <a:solidFill>
+            <a:srgbClr val="0B0D12"/>
+          </a:solidFill>
+          <a:ln>
+            <a:noFill/>
+          </a:ln>
+          <a:effectLst/>
+        </p:spPr>
+        <p:style>
+          <a:lnRef idx="1">
+            <a:schemeClr val="accent1"/>
+          </a:lnRef>
+          <a:fillRef idx="3">
+            <a:schemeClr val="accent1"/>
+          </a:fillRef>
+          <a:effectRef idx="2">
+            <a:schemeClr val="accent1"/>
+          </a:effectRef>
+          <a:fontRef idx="minor">
+            <a:schemeClr val="lt1"/>
+          </a:fontRef>
+        </p:style>
+        <p:txBody>
+          <a:bodyPr rtlCol="0" anchor="ctr"/>
+          <a:lstStyle/>
+          <a:p>
+            <a:pPr algn="ctr"/>
+          </a:p>
+        </p:txBody>
+      </p:sp>
+      <p:sp>
+        <p:nvSpPr>
+          <p:cNvPr id="18" name="TextBox 17"/>
+          <p:cNvSpPr txBox="1"/>
+          <p:nvPr/>
+        </p:nvSpPr>
+        <p:spPr>
+          <a:xfrm>
+            <a:off x="868680" y="4498848"/>
+            <a:ext cx="4846320" cy="621792"/>
+          </a:xfrm>
+          <a:prstGeom prst="rect">
+            <a:avLst/>
+          </a:prstGeom>
+          <a:noFill/>
+        </p:spPr>
+        <p:txBody>
+          <a:bodyPr wrap="square" anchor="t" lIns="0" rIns="0" tIns="0" bIns="0">
+            <a:spAutoFit/>
+          </a:bodyPr>
+          <a:lstStyle/>
+          <a:p>
+            <a:pPr algn="l">
+              <a:lnSpc>
+                <a:spcPct val="115000"/>
+              </a:lnSpc>
+            </a:pPr>
+            <a:r>
+              <a:rPr sz="1300" b="1">
+                <a:solidFill>
+                  <a:srgbClr val="FFFFFF"/>
+                </a:solidFill>
+                <a:latin typeface="Helvetica Neue"/>
+              </a:rPr>
+              <a:t>Exclusiones</a:t>
+            </a:r>
+          </a:p>
+        </p:txBody>
+      </p:sp>
+      <p:sp>
+        <p:nvSpPr>
+          <p:cNvPr id="19" name="TextBox 18"/>
+          <p:cNvSpPr txBox="1"/>
+          <p:nvPr/>
+        </p:nvSpPr>
+        <p:spPr>
+          <a:xfrm>
+            <a:off x="5989320" y="4498848"/>
+            <a:ext cx="5422392" cy="621792"/>
+          </a:xfrm>
+          <a:prstGeom prst="rect">
+            <a:avLst/>
+          </a:prstGeom>
+          <a:noFill/>
+        </p:spPr>
+        <p:txBody>
+          <a:bodyPr wrap="square" anchor="t" lIns="0" rIns="0" tIns="0" bIns="0">
+            <a:spAutoFit/>
+          </a:bodyPr>
+          <a:lstStyle/>
+          <a:p>
+            <a:pPr algn="l">
+              <a:lnSpc>
+                <a:spcPct val="115000"/>
+              </a:lnSpc>
+            </a:pPr>
+            <a:r>
+              <a:rPr sz="1300" b="0">
+                <a:solidFill>
+                  <a:srgbClr val="A6ACBA"/>
+                </a:solidFill>
+                <a:latin typeface="Helvetica Neue"/>
+              </a:rPr>
+              <a:t>Reembolsos, contracargos, pedidos cancelados o fraudulentos no cuentan.</a:t>
+            </a:r>
+          </a:p>
+        </p:txBody>
+      </p:sp>
+      <p:sp>
+        <p:nvSpPr>
+          <p:cNvPr id="20" name="Rectangle 19"/>
+          <p:cNvSpPr/>
+          <p:nvPr/>
+        </p:nvSpPr>
+        <p:spPr>
+          <a:xfrm>
+            <a:off x="685800" y="5029200"/>
+            <a:ext cx="10817352" cy="621792"/>
+          </a:xfrm>
+          <a:prstGeom prst="rect">
+            <a:avLst/>
+          </a:prstGeom>
+          <a:solidFill>
+            <a:srgbClr val="141720"/>
+          </a:solidFill>
+          <a:ln>
+            <a:noFill/>
+          </a:ln>
+          <a:effectLst/>
+        </p:spPr>
+        <p:style>
+          <a:lnRef idx="1">
+            <a:schemeClr val="accent1"/>
+          </a:lnRef>
+          <a:fillRef idx="3">
+            <a:schemeClr val="accent1"/>
+          </a:fillRef>
+          <a:effectRef idx="2">
+            <a:schemeClr val="accent1"/>
+          </a:effectRef>
+          <a:fontRef idx="minor">
+            <a:schemeClr val="lt1"/>
+          </a:fontRef>
+        </p:style>
+        <p:txBody>
+          <a:bodyPr rtlCol="0" anchor="ctr"/>
+          <a:lstStyle/>
+          <a:p>
+            <a:pPr algn="ctr"/>
+          </a:p>
+        </p:txBody>
+      </p:sp>
+      <p:sp>
+        <p:nvSpPr>
+          <p:cNvPr id="21" name="TextBox 20"/>
+          <p:cNvSpPr txBox="1"/>
+          <p:nvPr/>
+        </p:nvSpPr>
+        <p:spPr>
+          <a:xfrm>
+            <a:off x="868680" y="5120640"/>
+            <a:ext cx="4846320" cy="621792"/>
+          </a:xfrm>
+          <a:prstGeom prst="rect">
+            <a:avLst/>
+          </a:prstGeom>
+          <a:noFill/>
+        </p:spPr>
+        <p:txBody>
+          <a:bodyPr wrap="square" anchor="t" lIns="0" rIns="0" tIns="0" bIns="0">
+            <a:spAutoFit/>
+          </a:bodyPr>
+          <a:lstStyle/>
+          <a:p>
+            <a:pPr algn="l">
+              <a:lnSpc>
+                <a:spcPct val="115000"/>
+              </a:lnSpc>
+            </a:pPr>
+            <a:r>
+              <a:rPr sz="1300" b="1">
+                <a:solidFill>
+                  <a:srgbClr val="FFFFFF"/>
+                </a:solidFill>
+                <a:latin typeface="Helvetica Neue"/>
+              </a:rPr>
+              <a:t>Ejemplo</a:t>
+            </a:r>
+          </a:p>
+        </p:txBody>
+      </p:sp>
+      <p:sp>
+        <p:nvSpPr>
+          <p:cNvPr id="22" name="TextBox 21"/>
+          <p:cNvSpPr txBox="1"/>
+          <p:nvPr/>
+        </p:nvSpPr>
+        <p:spPr>
+          <a:xfrm>
+            <a:off x="5989320" y="5120640"/>
+            <a:ext cx="5422392" cy="621792"/>
+          </a:xfrm>
+          <a:prstGeom prst="rect">
+            <a:avLst/>
+          </a:prstGeom>
+          <a:noFill/>
+        </p:spPr>
+        <p:txBody>
+          <a:bodyPr wrap="square" anchor="t" lIns="0" rIns="0" tIns="0" bIns="0">
+            <a:spAutoFit/>
+          </a:bodyPr>
+          <a:lstStyle/>
+          <a:p>
+            <a:pPr algn="l">
+              <a:lnSpc>
+                <a:spcPct val="115000"/>
+              </a:lnSpc>
+            </a:pPr>
+            <a:r>
+              <a:rPr sz="1300" b="0">
+                <a:solidFill>
+                  <a:srgbClr val="A6ACBA"/>
+                </a:solidFill>
+                <a:latin typeface="Helvetica Neue"/>
+              </a:rPr>
+              <a:t>485.000 ₦ en pagos elegibles esa semana → 48.500 ₦ de comisión pagados ese domingo.</a:t>
+            </a:r>
+          </a:p>
+        </p:txBody>
+      </p:sp>
+      <p:cxnSp>
+        <p:nvCxnSpPr>
+          <p:cNvPr id="23" name="Connector 22"/>
+          <p:cNvCxnSpPr/>
+          <p:nvPr/>
+        </p:nvCxnSpPr>
+        <p:spPr>
+          <a:xfrm>
+            <a:off x="685800" y="1920240"/>
+            <a:ext cx="10817352" cy="0"/>
+          </a:xfrm>
+          <a:prstGeom prst="line">
+            <a:avLst/>
+          </a:prstGeom>
+          <a:ln w="12700">
+            <a:solidFill>
+              <a:srgbClr val="2A2E3A"/>
+            </a:solidFill>
+          </a:ln>
+        </p:spPr>
+        <p:style>
+          <a:lnRef idx="2">
+            <a:schemeClr val="accent1"/>
+          </a:lnRef>
+          <a:fillRef idx="0">
+            <a:schemeClr val="accent1"/>
+          </a:fillRef>
+          <a:effectRef idx="1">
+            <a:schemeClr val="accent1"/>
+          </a:effectRef>
+          <a:fontRef idx="minor">
+            <a:schemeClr val="tx1"/>
+          </a:fontRef>
+        </p:style>
+      </p:cxnSp>
       <p:pic>
         <p:nvPicPr>
-          <p:cNvPr id="13" name="Picture 12" descr="logo-head.png"/>
+          <p:cNvPr id="24" name="Picture 23" descr="logo-head.png"/>
           <p:cNvPicPr>
             <a:picLocks noChangeAspect="1"/>
           </p:cNvPicPr>
@@ -4769,7 +5449,7 @@
       </p:pic>
       <p:sp>
         <p:nvSpPr>
-          <p:cNvPr id="14" name="TextBox 13"/>
+          <p:cNvPr id="25" name="TextBox 24"/>
           <p:cNvSpPr txBox="1"/>
           <p:nvPr/>
         </p:nvSpPr>
@@ -4808,7 +5488,7 @@
       </p:sp>
       <p:sp>
         <p:nvSpPr>
-          <p:cNvPr id="15" name="TextBox 14"/>
+          <p:cNvPr id="26" name="TextBox 25"/>
           <p:cNvSpPr txBox="1"/>
           <p:nvPr/>
         </p:nvSpPr>
@@ -4847,7 +5527,7 @@
       </p:sp>
       <p:cxnSp>
         <p:nvCxnSpPr>
-          <p:cNvPr id="16" name="Connector 15"/>
+          <p:cNvPr id="27" name="Connector 26"/>
           <p:cNvCxnSpPr/>
           <p:nvPr/>
         </p:nvCxnSpPr>
@@ -4969,7 +5649,7 @@
           <a:p>
             <a:pPr algn="l">
               <a:lnSpc>
-                <a:spcPct val="115000"/>
+                <a:spcPct val="105000"/>
               </a:lnSpc>
             </a:pPr>
             <a:r>
@@ -4979,7 +5659,7 @@
                 </a:solidFill>
                 <a:latin typeface="Helvetica Neue"/>
               </a:rPr>
-              <a:t>Pago semanal — cómo funciona</a:t>
+              <a:t>Tu Panel de Colaborador</a:t>
             </a:r>
           </a:p>
         </p:txBody>
@@ -5021,774 +5701,114 @@
       </p:cxnSp>
       <p:sp>
         <p:nvSpPr>
-          <p:cNvPr id="5" name="Rectangle 4"/>
-          <p:cNvSpPr/>
-          <p:nvPr/>
-        </p:nvSpPr>
-        <p:spPr>
-          <a:xfrm>
-            <a:off x="685800" y="1920240"/>
-            <a:ext cx="10817352" cy="621792"/>
-          </a:xfrm>
-          <a:prstGeom prst="rect">
-            <a:avLst/>
-          </a:prstGeom>
-          <a:solidFill>
-            <a:srgbClr val="1D68C0"/>
-          </a:solidFill>
-          <a:ln>
-            <a:noFill/>
-          </a:ln>
-          <a:effectLst/>
-        </p:spPr>
-        <p:style>
-          <a:lnRef idx="1">
-            <a:schemeClr val="accent1"/>
-          </a:lnRef>
-          <a:fillRef idx="3">
-            <a:schemeClr val="accent1"/>
-          </a:fillRef>
-          <a:effectRef idx="2">
-            <a:schemeClr val="accent1"/>
-          </a:effectRef>
-          <a:fontRef idx="minor">
-            <a:schemeClr val="lt1"/>
-          </a:fontRef>
-        </p:style>
-        <p:txBody>
-          <a:bodyPr rtlCol="0" anchor="ctr"/>
-          <a:lstStyle/>
-          <a:p>
-            <a:pPr algn="ctr"/>
-          </a:p>
-        </p:txBody>
-      </p:sp>
-      <p:sp>
-        <p:nvSpPr>
-          <p:cNvPr id="6" name="TextBox 5"/>
-          <p:cNvSpPr txBox="1"/>
-          <p:nvPr/>
-        </p:nvSpPr>
-        <p:spPr>
-          <a:xfrm>
-            <a:off x="868680" y="2029968"/>
-            <a:ext cx="4846320" cy="621792"/>
-          </a:xfrm>
-          <a:prstGeom prst="rect">
-            <a:avLst/>
-          </a:prstGeom>
-          <a:noFill/>
-        </p:spPr>
-        <p:txBody>
-          <a:bodyPr wrap="square" anchor="t" lIns="0" rIns="0" tIns="0" bIns="0">
-            <a:spAutoFit/>
-          </a:bodyPr>
-          <a:lstStyle/>
-          <a:p>
-            <a:pPr algn="l">
-              <a:lnSpc>
-                <a:spcPct val="115000"/>
-              </a:lnSpc>
-            </a:pPr>
-            <a:r>
-              <a:rPr sz="1250" b="1">
+          <p:cNvPr id="5" name="TextBox 4"/>
+          <p:cNvSpPr txBox="1"/>
+          <p:nvPr/>
+        </p:nvSpPr>
+        <p:spPr>
+          <a:xfrm>
+            <a:off x="685800" y="1965960"/>
+            <a:ext cx="10424160" cy="3931920"/>
+          </a:xfrm>
+          <a:prstGeom prst="rect">
+            <a:avLst/>
+          </a:prstGeom>
+          <a:noFill/>
+        </p:spPr>
+        <p:txBody>
+          <a:bodyPr wrap="square" lIns="0" rIns="0">
+            <a:spAutoFit/>
+          </a:bodyPr>
+          <a:lstStyle/>
+          <a:p>
+            <a:pPr>
+              <a:lnSpc>
+                <a:spcPct val="125000"/>
+              </a:lnSpc>
+              <a:spcAft>
+                <a:spcPts val="1000"/>
+              </a:spcAft>
+            </a:pPr>
+            <a:r>
+              <a:rPr sz="1550" b="1">
+                <a:solidFill>
+                  <a:srgbClr val="4E9BF0"/>
+                </a:solidFill>
+                <a:latin typeface="Helvetica Neue"/>
+              </a:rPr>
+              <a:t>—  </a:t>
+            </a:r>
+            <a:r>
+              <a:rPr sz="1550">
                 <a:solidFill>
                   <a:srgbClr val="FFFFFF"/>
                 </a:solidFill>
                 <a:latin typeface="Helvetica Neue"/>
               </a:rPr>
-              <a:t>Paso</a:t>
-            </a:r>
-          </a:p>
-        </p:txBody>
-      </p:sp>
-      <p:sp>
-        <p:nvSpPr>
-          <p:cNvPr id="7" name="TextBox 6"/>
-          <p:cNvSpPr txBox="1"/>
-          <p:nvPr/>
-        </p:nvSpPr>
-        <p:spPr>
-          <a:xfrm>
-            <a:off x="5989320" y="2029968"/>
-            <a:ext cx="5422392" cy="621792"/>
-          </a:xfrm>
-          <a:prstGeom prst="rect">
-            <a:avLst/>
-          </a:prstGeom>
-          <a:noFill/>
-        </p:spPr>
-        <p:txBody>
-          <a:bodyPr wrap="square" anchor="t" lIns="0" rIns="0" tIns="0" bIns="0">
-            <a:spAutoFit/>
-          </a:bodyPr>
-          <a:lstStyle/>
-          <a:p>
-            <a:pPr algn="l">
-              <a:lnSpc>
-                <a:spcPct val="115000"/>
-              </a:lnSpc>
-            </a:pPr>
-            <a:r>
-              <a:rPr sz="1250" b="1">
+              <a:t>Una vista privada de tu comisión semanal: identificadores de proyecto, importes y estado PAGADO / PENDIENTE.</a:t>
+            </a:r>
+          </a:p>
+          <a:p>
+            <a:pPr>
+              <a:lnSpc>
+                <a:spcPct val="125000"/>
+              </a:lnSpc>
+              <a:spcAft>
+                <a:spcPts val="1000"/>
+              </a:spcAft>
+            </a:pPr>
+            <a:r>
+              <a:rPr sz="1550" b="1">
+                <a:solidFill>
+                  <a:srgbClr val="4E9BF0"/>
+                </a:solidFill>
+                <a:latin typeface="Helvetica Neue"/>
+              </a:rPr>
+              <a:t>—  </a:t>
+            </a:r>
+            <a:r>
+              <a:rPr sz="1550">
                 <a:solidFill>
                   <a:srgbClr val="FFFFFF"/>
                 </a:solidFill>
                 <a:latin typeface="Helvetica Neue"/>
               </a:rPr>
-              <a:t>Qué ocurre</a:t>
-            </a:r>
-          </a:p>
-        </p:txBody>
-      </p:sp>
-      <p:sp>
-        <p:nvSpPr>
-          <p:cNvPr id="8" name="Rectangle 7"/>
-          <p:cNvSpPr/>
-          <p:nvPr/>
-        </p:nvSpPr>
-        <p:spPr>
-          <a:xfrm>
-            <a:off x="685800" y="2542032"/>
-            <a:ext cx="10817352" cy="621792"/>
-          </a:xfrm>
-          <a:prstGeom prst="rect">
-            <a:avLst/>
-          </a:prstGeom>
-          <a:solidFill>
-            <a:srgbClr val="141720"/>
-          </a:solidFill>
-          <a:ln>
-            <a:noFill/>
-          </a:ln>
-          <a:effectLst/>
-        </p:spPr>
-        <p:style>
-          <a:lnRef idx="1">
-            <a:schemeClr val="accent1"/>
-          </a:lnRef>
-          <a:fillRef idx="3">
-            <a:schemeClr val="accent1"/>
-          </a:fillRef>
-          <a:effectRef idx="2">
-            <a:schemeClr val="accent1"/>
-          </a:effectRef>
-          <a:fontRef idx="minor">
-            <a:schemeClr val="lt1"/>
-          </a:fontRef>
-        </p:style>
-        <p:txBody>
-          <a:bodyPr rtlCol="0" anchor="ctr"/>
-          <a:lstStyle/>
-          <a:p>
-            <a:pPr algn="ctr"/>
-          </a:p>
-        </p:txBody>
-      </p:sp>
-      <p:sp>
-        <p:nvSpPr>
-          <p:cNvPr id="9" name="TextBox 8"/>
-          <p:cNvSpPr txBox="1"/>
-          <p:nvPr/>
-        </p:nvSpPr>
-        <p:spPr>
-          <a:xfrm>
-            <a:off x="868680" y="2633472"/>
-            <a:ext cx="4846320" cy="621792"/>
-          </a:xfrm>
-          <a:prstGeom prst="rect">
-            <a:avLst/>
-          </a:prstGeom>
-          <a:noFill/>
-        </p:spPr>
-        <p:txBody>
-          <a:bodyPr wrap="square" anchor="t" lIns="0" rIns="0" tIns="0" bIns="0">
-            <a:spAutoFit/>
-          </a:bodyPr>
-          <a:lstStyle/>
-          <a:p>
-            <a:pPr algn="l">
-              <a:lnSpc>
-                <a:spcPct val="115000"/>
-              </a:lnSpc>
-            </a:pPr>
-            <a:r>
-              <a:rPr sz="1300" b="1">
+              <a:t>Verás lo suficiente para verificar que cada pago se calcula correctamente, sin que se te expongan los datos de contacto de los clientes de Zebraish.</a:t>
+            </a:r>
+          </a:p>
+          <a:p>
+            <a:pPr>
+              <a:lnSpc>
+                <a:spcPct val="125000"/>
+              </a:lnSpc>
+              <a:spcAft>
+                <a:spcPts val="1000"/>
+              </a:spcAft>
+            </a:pPr>
+            <a:r>
+              <a:rPr sz="1550" b="1">
+                <a:solidFill>
+                  <a:srgbClr val="4E9BF0"/>
+                </a:solidFill>
+                <a:latin typeface="Helvetica Neue"/>
+              </a:rPr>
+              <a:t>—  </a:t>
+            </a:r>
+            <a:r>
+              <a:rPr sz="1550">
                 <a:solidFill>
                   <a:srgbClr val="FFFFFF"/>
                 </a:solidFill>
                 <a:latin typeface="Helvetica Neue"/>
               </a:rPr>
-              <a:t>Revisión del domingo</a:t>
-            </a:r>
-          </a:p>
-        </p:txBody>
-      </p:sp>
-      <p:sp>
-        <p:nvSpPr>
-          <p:cNvPr id="10" name="TextBox 9"/>
-          <p:cNvSpPr txBox="1"/>
-          <p:nvPr/>
-        </p:nvSpPr>
-        <p:spPr>
-          <a:xfrm>
-            <a:off x="5989320" y="2633472"/>
-            <a:ext cx="5422392" cy="621792"/>
-          </a:xfrm>
-          <a:prstGeom prst="rect">
-            <a:avLst/>
-          </a:prstGeom>
-          <a:noFill/>
-        </p:spPr>
-        <p:txBody>
-          <a:bodyPr wrap="square" anchor="t" lIns="0" rIns="0" tIns="0" bIns="0">
-            <a:spAutoFit/>
-          </a:bodyPr>
-          <a:lstStyle/>
-          <a:p>
-            <a:pPr algn="l">
-              <a:lnSpc>
-                <a:spcPct val="115000"/>
-              </a:lnSpc>
-            </a:pPr>
-            <a:r>
-              <a:rPr sz="1300" b="0">
-                <a:solidFill>
-                  <a:srgbClr val="A6ACBA"/>
-                </a:solidFill>
-                <a:latin typeface="Helvetica Neue"/>
-              </a:rPr>
-              <a:t>Joshua totaliza todos los pagos elegibles que Zebraish recibió de lunes a domingo.</a:t>
-            </a:r>
-          </a:p>
-        </p:txBody>
-      </p:sp>
-      <p:sp>
-        <p:nvSpPr>
-          <p:cNvPr id="11" name="Rectangle 10"/>
-          <p:cNvSpPr/>
-          <p:nvPr/>
-        </p:nvSpPr>
-        <p:spPr>
-          <a:xfrm>
-            <a:off x="685800" y="3163824"/>
-            <a:ext cx="10817352" cy="621792"/>
-          </a:xfrm>
-          <a:prstGeom prst="rect">
-            <a:avLst/>
-          </a:prstGeom>
-          <a:solidFill>
-            <a:srgbClr val="0B0D12"/>
-          </a:solidFill>
-          <a:ln>
-            <a:noFill/>
-          </a:ln>
-          <a:effectLst/>
-        </p:spPr>
-        <p:style>
-          <a:lnRef idx="1">
-            <a:schemeClr val="accent1"/>
-          </a:lnRef>
-          <a:fillRef idx="3">
-            <a:schemeClr val="accent1"/>
-          </a:fillRef>
-          <a:effectRef idx="2">
-            <a:schemeClr val="accent1"/>
-          </a:effectRef>
-          <a:fontRef idx="minor">
-            <a:schemeClr val="lt1"/>
-          </a:fontRef>
-        </p:style>
-        <p:txBody>
-          <a:bodyPr rtlCol="0" anchor="ctr"/>
-          <a:lstStyle/>
-          <a:p>
-            <a:pPr algn="ctr"/>
-          </a:p>
-        </p:txBody>
-      </p:sp>
-      <p:sp>
-        <p:nvSpPr>
-          <p:cNvPr id="12" name="TextBox 11"/>
-          <p:cNvSpPr txBox="1"/>
-          <p:nvPr/>
-        </p:nvSpPr>
-        <p:spPr>
-          <a:xfrm>
-            <a:off x="868680" y="3255264"/>
-            <a:ext cx="4846320" cy="621792"/>
-          </a:xfrm>
-          <a:prstGeom prst="rect">
-            <a:avLst/>
-          </a:prstGeom>
-          <a:noFill/>
-        </p:spPr>
-        <p:txBody>
-          <a:bodyPr wrap="square" anchor="t" lIns="0" rIns="0" tIns="0" bIns="0">
-            <a:spAutoFit/>
-          </a:bodyPr>
-          <a:lstStyle/>
-          <a:p>
-            <a:pPr algn="l">
-              <a:lnSpc>
-                <a:spcPct val="115000"/>
-              </a:lnSpc>
-            </a:pPr>
-            <a:r>
-              <a:rPr sz="1300" b="1">
-                <a:solidFill>
-                  <a:srgbClr val="FFFFFF"/>
-                </a:solidFill>
-                <a:latin typeface="Helvetica Neue"/>
-              </a:rPr>
-              <a:t>Cálculo</a:t>
-            </a:r>
-          </a:p>
-        </p:txBody>
-      </p:sp>
-      <p:sp>
-        <p:nvSpPr>
-          <p:cNvPr id="13" name="TextBox 12"/>
-          <p:cNvSpPr txBox="1"/>
-          <p:nvPr/>
-        </p:nvSpPr>
-        <p:spPr>
-          <a:xfrm>
-            <a:off x="5989320" y="3255264"/>
-            <a:ext cx="5422392" cy="621792"/>
-          </a:xfrm>
-          <a:prstGeom prst="rect">
-            <a:avLst/>
-          </a:prstGeom>
-          <a:noFill/>
-        </p:spPr>
-        <p:txBody>
-          <a:bodyPr wrap="square" anchor="t" lIns="0" rIns="0" tIns="0" bIns="0">
-            <a:spAutoFit/>
-          </a:bodyPr>
-          <a:lstStyle/>
-          <a:p>
-            <a:pPr algn="l">
-              <a:lnSpc>
-                <a:spcPct val="115000"/>
-              </a:lnSpc>
-            </a:pPr>
-            <a:r>
-              <a:rPr sz="1300" b="0">
-                <a:solidFill>
-                  <a:srgbClr val="A6ACBA"/>
-                </a:solidFill>
-                <a:latin typeface="Helvetica Neue"/>
-              </a:rPr>
-              <a:t>El 10% de ese total semanal es tu comisión de la semana.</a:t>
-            </a:r>
-          </a:p>
-        </p:txBody>
-      </p:sp>
-      <p:sp>
-        <p:nvSpPr>
-          <p:cNvPr id="14" name="Rectangle 13"/>
-          <p:cNvSpPr/>
-          <p:nvPr/>
-        </p:nvSpPr>
-        <p:spPr>
-          <a:xfrm>
-            <a:off x="685800" y="3785616"/>
-            <a:ext cx="10817352" cy="621792"/>
-          </a:xfrm>
-          <a:prstGeom prst="rect">
-            <a:avLst/>
-          </a:prstGeom>
-          <a:solidFill>
-            <a:srgbClr val="141720"/>
-          </a:solidFill>
-          <a:ln>
-            <a:noFill/>
-          </a:ln>
-          <a:effectLst/>
-        </p:spPr>
-        <p:style>
-          <a:lnRef idx="1">
-            <a:schemeClr val="accent1"/>
-          </a:lnRef>
-          <a:fillRef idx="3">
-            <a:schemeClr val="accent1"/>
-          </a:fillRef>
-          <a:effectRef idx="2">
-            <a:schemeClr val="accent1"/>
-          </a:effectRef>
-          <a:fontRef idx="minor">
-            <a:schemeClr val="lt1"/>
-          </a:fontRef>
-        </p:style>
-        <p:txBody>
-          <a:bodyPr rtlCol="0" anchor="ctr"/>
-          <a:lstStyle/>
-          <a:p>
-            <a:pPr algn="ctr"/>
-          </a:p>
-        </p:txBody>
-      </p:sp>
-      <p:sp>
-        <p:nvSpPr>
-          <p:cNvPr id="15" name="TextBox 14"/>
-          <p:cNvSpPr txBox="1"/>
-          <p:nvPr/>
-        </p:nvSpPr>
-        <p:spPr>
-          <a:xfrm>
-            <a:off x="868680" y="3877056"/>
-            <a:ext cx="4846320" cy="621792"/>
-          </a:xfrm>
-          <a:prstGeom prst="rect">
-            <a:avLst/>
-          </a:prstGeom>
-          <a:noFill/>
-        </p:spPr>
-        <p:txBody>
-          <a:bodyPr wrap="square" anchor="t" lIns="0" rIns="0" tIns="0" bIns="0">
-            <a:spAutoFit/>
-          </a:bodyPr>
-          <a:lstStyle/>
-          <a:p>
-            <a:pPr algn="l">
-              <a:lnSpc>
-                <a:spcPct val="115000"/>
-              </a:lnSpc>
-            </a:pPr>
-            <a:r>
-              <a:rPr sz="1300" b="1">
-                <a:solidFill>
-                  <a:srgbClr val="FFFFFF"/>
-                </a:solidFill>
-                <a:latin typeface="Helvetica Neue"/>
-              </a:rPr>
-              <a:t>Pago</a:t>
-            </a:r>
-          </a:p>
-        </p:txBody>
-      </p:sp>
-      <p:sp>
-        <p:nvSpPr>
-          <p:cNvPr id="16" name="TextBox 15"/>
-          <p:cNvSpPr txBox="1"/>
-          <p:nvPr/>
-        </p:nvSpPr>
-        <p:spPr>
-          <a:xfrm>
-            <a:off x="5989320" y="3877056"/>
-            <a:ext cx="5422392" cy="621792"/>
-          </a:xfrm>
-          <a:prstGeom prst="rect">
-            <a:avLst/>
-          </a:prstGeom>
-          <a:noFill/>
-        </p:spPr>
-        <p:txBody>
-          <a:bodyPr wrap="square" anchor="t" lIns="0" rIns="0" tIns="0" bIns="0">
-            <a:spAutoFit/>
-          </a:bodyPr>
-          <a:lstStyle/>
-          <a:p>
-            <a:pPr algn="l">
-              <a:lnSpc>
-                <a:spcPct val="115000"/>
-              </a:lnSpc>
-            </a:pPr>
-            <a:r>
-              <a:rPr sz="1300" b="0">
-                <a:solidFill>
-                  <a:srgbClr val="A6ACBA"/>
-                </a:solidFill>
-                <a:latin typeface="Helvetica Neue"/>
-              </a:rPr>
-              <a:t>Se envía por transferencia bancaria ese mismo día, o el siguiente día hábil si una transferencia en domingo no es posible.</a:t>
-            </a:r>
-          </a:p>
-        </p:txBody>
-      </p:sp>
-      <p:sp>
-        <p:nvSpPr>
-          <p:cNvPr id="17" name="Rectangle 16"/>
-          <p:cNvSpPr/>
-          <p:nvPr/>
-        </p:nvSpPr>
-        <p:spPr>
-          <a:xfrm>
-            <a:off x="685800" y="4407408"/>
-            <a:ext cx="10817352" cy="621792"/>
-          </a:xfrm>
-          <a:prstGeom prst="rect">
-            <a:avLst/>
-          </a:prstGeom>
-          <a:solidFill>
-            <a:srgbClr val="0B0D12"/>
-          </a:solidFill>
-          <a:ln>
-            <a:noFill/>
-          </a:ln>
-          <a:effectLst/>
-        </p:spPr>
-        <p:style>
-          <a:lnRef idx="1">
-            <a:schemeClr val="accent1"/>
-          </a:lnRef>
-          <a:fillRef idx="3">
-            <a:schemeClr val="accent1"/>
-          </a:fillRef>
-          <a:effectRef idx="2">
-            <a:schemeClr val="accent1"/>
-          </a:effectRef>
-          <a:fontRef idx="minor">
-            <a:schemeClr val="lt1"/>
-          </a:fontRef>
-        </p:style>
-        <p:txBody>
-          <a:bodyPr rtlCol="0" anchor="ctr"/>
-          <a:lstStyle/>
-          <a:p>
-            <a:pPr algn="ctr"/>
-          </a:p>
-        </p:txBody>
-      </p:sp>
-      <p:sp>
-        <p:nvSpPr>
-          <p:cNvPr id="18" name="TextBox 17"/>
-          <p:cNvSpPr txBox="1"/>
-          <p:nvPr/>
-        </p:nvSpPr>
-        <p:spPr>
-          <a:xfrm>
-            <a:off x="868680" y="4498848"/>
-            <a:ext cx="4846320" cy="621792"/>
-          </a:xfrm>
-          <a:prstGeom prst="rect">
-            <a:avLst/>
-          </a:prstGeom>
-          <a:noFill/>
-        </p:spPr>
-        <p:txBody>
-          <a:bodyPr wrap="square" anchor="t" lIns="0" rIns="0" tIns="0" bIns="0">
-            <a:spAutoFit/>
-          </a:bodyPr>
-          <a:lstStyle/>
-          <a:p>
-            <a:pPr algn="l">
-              <a:lnSpc>
-                <a:spcPct val="115000"/>
-              </a:lnSpc>
-            </a:pPr>
-            <a:r>
-              <a:rPr sz="1300" b="1">
-                <a:solidFill>
-                  <a:srgbClr val="FFFFFF"/>
-                </a:solidFill>
-                <a:latin typeface="Helvetica Neue"/>
-              </a:rPr>
-              <a:t>Exclusiones</a:t>
-            </a:r>
-          </a:p>
-        </p:txBody>
-      </p:sp>
-      <p:sp>
-        <p:nvSpPr>
-          <p:cNvPr id="19" name="TextBox 18"/>
-          <p:cNvSpPr txBox="1"/>
-          <p:nvPr/>
-        </p:nvSpPr>
-        <p:spPr>
-          <a:xfrm>
-            <a:off x="5989320" y="4498848"/>
-            <a:ext cx="5422392" cy="621792"/>
-          </a:xfrm>
-          <a:prstGeom prst="rect">
-            <a:avLst/>
-          </a:prstGeom>
-          <a:noFill/>
-        </p:spPr>
-        <p:txBody>
-          <a:bodyPr wrap="square" anchor="t" lIns="0" rIns="0" tIns="0" bIns="0">
-            <a:spAutoFit/>
-          </a:bodyPr>
-          <a:lstStyle/>
-          <a:p>
-            <a:pPr algn="l">
-              <a:lnSpc>
-                <a:spcPct val="115000"/>
-              </a:lnSpc>
-            </a:pPr>
-            <a:r>
-              <a:rPr sz="1300" b="0">
-                <a:solidFill>
-                  <a:srgbClr val="A6ACBA"/>
-                </a:solidFill>
-                <a:latin typeface="Helvetica Neue"/>
-              </a:rPr>
-              <a:t>Reembolsos, contracargos, pedidos cancelados o fraudulentos no cuentan.</a:t>
-            </a:r>
-          </a:p>
-        </p:txBody>
-      </p:sp>
-      <p:sp>
-        <p:nvSpPr>
-          <p:cNvPr id="20" name="Rectangle 19"/>
-          <p:cNvSpPr/>
-          <p:nvPr/>
-        </p:nvSpPr>
-        <p:spPr>
-          <a:xfrm>
-            <a:off x="685800" y="5029200"/>
-            <a:ext cx="10817352" cy="621792"/>
-          </a:xfrm>
-          <a:prstGeom prst="rect">
-            <a:avLst/>
-          </a:prstGeom>
-          <a:solidFill>
-            <a:srgbClr val="141720"/>
-          </a:solidFill>
-          <a:ln>
-            <a:noFill/>
-          </a:ln>
-          <a:effectLst/>
-        </p:spPr>
-        <p:style>
-          <a:lnRef idx="1">
-            <a:schemeClr val="accent1"/>
-          </a:lnRef>
-          <a:fillRef idx="3">
-            <a:schemeClr val="accent1"/>
-          </a:fillRef>
-          <a:effectRef idx="2">
-            <a:schemeClr val="accent1"/>
-          </a:effectRef>
-          <a:fontRef idx="minor">
-            <a:schemeClr val="lt1"/>
-          </a:fontRef>
-        </p:style>
-        <p:txBody>
-          <a:bodyPr rtlCol="0" anchor="ctr"/>
-          <a:lstStyle/>
-          <a:p>
-            <a:pPr algn="ctr"/>
-          </a:p>
-        </p:txBody>
-      </p:sp>
-      <p:sp>
-        <p:nvSpPr>
-          <p:cNvPr id="21" name="TextBox 20"/>
-          <p:cNvSpPr txBox="1"/>
-          <p:nvPr/>
-        </p:nvSpPr>
-        <p:spPr>
-          <a:xfrm>
-            <a:off x="868680" y="5120640"/>
-            <a:ext cx="4846320" cy="621792"/>
-          </a:xfrm>
-          <a:prstGeom prst="rect">
-            <a:avLst/>
-          </a:prstGeom>
-          <a:noFill/>
-        </p:spPr>
-        <p:txBody>
-          <a:bodyPr wrap="square" anchor="t" lIns="0" rIns="0" tIns="0" bIns="0">
-            <a:spAutoFit/>
-          </a:bodyPr>
-          <a:lstStyle/>
-          <a:p>
-            <a:pPr algn="l">
-              <a:lnSpc>
-                <a:spcPct val="115000"/>
-              </a:lnSpc>
-            </a:pPr>
-            <a:r>
-              <a:rPr sz="1300" b="1">
-                <a:solidFill>
-                  <a:srgbClr val="FFFFFF"/>
-                </a:solidFill>
-                <a:latin typeface="Helvetica Neue"/>
-              </a:rPr>
-              <a:t>Ejemplo</a:t>
-            </a:r>
-          </a:p>
-        </p:txBody>
-      </p:sp>
-      <p:sp>
-        <p:nvSpPr>
-          <p:cNvPr id="22" name="TextBox 21"/>
-          <p:cNvSpPr txBox="1"/>
-          <p:nvPr/>
-        </p:nvSpPr>
-        <p:spPr>
-          <a:xfrm>
-            <a:off x="5989320" y="5120640"/>
-            <a:ext cx="5422392" cy="621792"/>
-          </a:xfrm>
-          <a:prstGeom prst="rect">
-            <a:avLst/>
-          </a:prstGeom>
-          <a:noFill/>
-        </p:spPr>
-        <p:txBody>
-          <a:bodyPr wrap="square" anchor="t" lIns="0" rIns="0" tIns="0" bIns="0">
-            <a:spAutoFit/>
-          </a:bodyPr>
-          <a:lstStyle/>
-          <a:p>
-            <a:pPr algn="l">
-              <a:lnSpc>
-                <a:spcPct val="115000"/>
-              </a:lnSpc>
-            </a:pPr>
-            <a:r>
-              <a:rPr sz="1300" b="0">
-                <a:solidFill>
-                  <a:srgbClr val="A6ACBA"/>
-                </a:solidFill>
-                <a:latin typeface="Helvetica Neue"/>
-              </a:rPr>
-              <a:t>485.000 ₦ en pagos elegibles esa semana → 48.500 ₦ de comisión pagados ese domingo.</a:t>
-            </a:r>
-          </a:p>
-        </p:txBody>
-      </p:sp>
-      <p:cxnSp>
-        <p:nvCxnSpPr>
-          <p:cNvPr id="23" name="Connector 22"/>
-          <p:cNvCxnSpPr/>
-          <p:nvPr/>
-        </p:nvCxnSpPr>
-        <p:spPr>
-          <a:xfrm>
-            <a:off x="685800" y="1920240"/>
-            <a:ext cx="10817352" cy="0"/>
-          </a:xfrm>
-          <a:prstGeom prst="line">
-            <a:avLst/>
-          </a:prstGeom>
-          <a:ln w="12700">
-            <a:solidFill>
-              <a:srgbClr val="2A2E3A"/>
-            </a:solidFill>
-          </a:ln>
-        </p:spPr>
-        <p:style>
-          <a:lnRef idx="2">
-            <a:schemeClr val="accent1"/>
-          </a:lnRef>
-          <a:fillRef idx="0">
-            <a:schemeClr val="accent1"/>
-          </a:fillRef>
-          <a:effectRef idx="1">
-            <a:schemeClr val="accent1"/>
-          </a:effectRef>
-          <a:fontRef idx="minor">
-            <a:schemeClr val="tx1"/>
-          </a:fontRef>
-        </p:style>
-      </p:cxnSp>
+              <a:t>Se está construyendo junto con el Portal de Proyectos; Joshua confirmará cuando esté disponible — mientras tanto, un resumen semanal por escrito sirve de puente.</a:t>
+            </a:r>
+          </a:p>
+        </p:txBody>
+      </p:sp>
       <p:pic>
         <p:nvPicPr>
-          <p:cNvPr id="24" name="Picture 23" descr="logo-head.png"/>
+          <p:cNvPr id="6" name="Picture 5" descr="logo-head.png"/>
           <p:cNvPicPr>
             <a:picLocks noChangeAspect="1"/>
           </p:cNvPicPr>
@@ -5812,7 +5832,7 @@
       </p:pic>
       <p:sp>
         <p:nvSpPr>
-          <p:cNvPr id="25" name="TextBox 24"/>
+          <p:cNvPr id="7" name="TextBox 6"/>
           <p:cNvSpPr txBox="1"/>
           <p:nvPr/>
         </p:nvSpPr>
@@ -5851,7 +5871,7 @@
       </p:sp>
       <p:sp>
         <p:nvSpPr>
-          <p:cNvPr id="26" name="TextBox 25"/>
+          <p:cNvPr id="8" name="TextBox 7"/>
           <p:cNvSpPr txBox="1"/>
           <p:nvPr/>
         </p:nvSpPr>
@@ -5890,7 +5910,7 @@
       </p:sp>
       <p:cxnSp>
         <p:nvCxnSpPr>
-          <p:cNvPr id="27" name="Connector 26"/>
+          <p:cNvPr id="9" name="Connector 8"/>
           <p:cNvCxnSpPr/>
           <p:nvPr/>
         </p:nvCxnSpPr>
@@ -5937,7 +5957,7 @@
     <p:bg>
       <p:bgPr>
         <a:solidFill>
-          <a:srgbClr val="0B0D12"/>
+          <a:srgbClr val="141720"/>
         </a:solidFill>
         <a:effectLst/>
       </p:bgPr>
@@ -5951,117 +5971,126 @@
       <p:grpSpPr/>
       <p:sp>
         <p:nvSpPr>
-          <p:cNvPr id="2" name="TextBox 1"/>
-          <p:cNvSpPr txBox="1"/>
-          <p:nvPr/>
-        </p:nvSpPr>
-        <p:spPr>
-          <a:xfrm>
-            <a:off x="685800" y="502920"/>
-            <a:ext cx="7315200" cy="365760"/>
-          </a:xfrm>
-          <a:prstGeom prst="rect">
-            <a:avLst/>
-          </a:prstGeom>
-          <a:noFill/>
-        </p:spPr>
-        <p:txBody>
-          <a:bodyPr wrap="square" anchor="t" lIns="0" rIns="0" tIns="0" bIns="0">
-            <a:spAutoFit/>
-          </a:bodyPr>
-          <a:lstStyle/>
-          <a:p>
-            <a:pPr algn="l">
-              <a:lnSpc>
-                <a:spcPct val="115000"/>
-              </a:lnSpc>
-            </a:pPr>
-            <a:r>
-              <a:rPr sz="1250" b="1">
-                <a:solidFill>
-                  <a:srgbClr val="4E9BF0"/>
-                </a:solidFill>
-                <a:latin typeface="Helvetica Neue"/>
-              </a:rPr>
-              <a:t>COMISIÓN Y PAGOS</a:t>
-            </a:r>
-          </a:p>
-        </p:txBody>
-      </p:sp>
-      <p:sp>
-        <p:nvSpPr>
-          <p:cNvPr id="3" name="TextBox 2"/>
-          <p:cNvSpPr txBox="1"/>
-          <p:nvPr/>
-        </p:nvSpPr>
-        <p:spPr>
-          <a:xfrm>
-            <a:off x="685800" y="868680"/>
-            <a:ext cx="10515600" cy="914400"/>
-          </a:xfrm>
-          <a:prstGeom prst="rect">
-            <a:avLst/>
-          </a:prstGeom>
-          <a:noFill/>
-        </p:spPr>
-        <p:txBody>
-          <a:bodyPr wrap="square" anchor="t" lIns="0" rIns="0" tIns="0" bIns="0">
-            <a:spAutoFit/>
-          </a:bodyPr>
-          <a:lstStyle/>
-          <a:p>
-            <a:pPr algn="l">
-              <a:lnSpc>
-                <a:spcPct val="105000"/>
-              </a:lnSpc>
-            </a:pPr>
-            <a:r>
-              <a:rPr sz="2700" b="1">
-                <a:solidFill>
-                  <a:srgbClr val="FFFFFF"/>
-                </a:solidFill>
-                <a:latin typeface="Helvetica Neue"/>
-              </a:rPr>
-              <a:t>Tu Panel de Colaborador</a:t>
-            </a:r>
-          </a:p>
-        </p:txBody>
-      </p:sp>
-      <p:cxnSp>
-        <p:nvCxnSpPr>
-          <p:cNvPr id="4" name="Connector 3"/>
-          <p:cNvCxnSpPr/>
-          <p:nvPr/>
-        </p:nvCxnSpPr>
-        <p:spPr>
-          <a:xfrm>
-            <a:off x="685800" y="1691640"/>
-            <a:ext cx="10817352" cy="0"/>
-          </a:xfrm>
-          <a:prstGeom prst="line">
-            <a:avLst/>
-          </a:prstGeom>
-          <a:ln w="12700">
-            <a:solidFill>
-              <a:srgbClr val="2A2E3A"/>
-            </a:solidFill>
+          <p:cNvPr id="2" name="Rectangle 1"/>
+          <p:cNvSpPr/>
+          <p:nvPr/>
+        </p:nvSpPr>
+        <p:spPr>
+          <a:xfrm>
+            <a:off x="0" y="0"/>
+            <a:ext cx="164592" cy="6858000"/>
+          </a:xfrm>
+          <a:prstGeom prst="rect">
+            <a:avLst/>
+          </a:prstGeom>
+          <a:solidFill>
+            <a:srgbClr val="1D68C0"/>
+          </a:solidFill>
+          <a:ln>
+            <a:noFill/>
           </a:ln>
+          <a:effectLst/>
         </p:spPr>
         <p:style>
-          <a:lnRef idx="2">
+          <a:lnRef idx="1">
             <a:schemeClr val="accent1"/>
           </a:lnRef>
-          <a:fillRef idx="0">
+          <a:fillRef idx="3">
             <a:schemeClr val="accent1"/>
           </a:fillRef>
-          <a:effectRef idx="1">
+          <a:effectRef idx="2">
             <a:schemeClr val="accent1"/>
           </a:effectRef>
           <a:fontRef idx="minor">
-            <a:schemeClr val="tx1"/>
+            <a:schemeClr val="lt1"/>
           </a:fontRef>
         </p:style>
-      </p:cxnSp>
+        <p:txBody>
+          <a:bodyPr rtlCol="0" anchor="ctr"/>
+          <a:lstStyle/>
+          <a:p>
+            <a:pPr algn="ctr"/>
+          </a:p>
+        </p:txBody>
+      </p:sp>
+      <p:sp>
+        <p:nvSpPr>
+          <p:cNvPr id="3" name="TextBox 2"/>
+          <p:cNvSpPr txBox="1"/>
+          <p:nvPr/>
+        </p:nvSpPr>
+        <p:spPr>
+          <a:xfrm>
+            <a:off x="868680" y="2286000"/>
+            <a:ext cx="1828800" cy="1097280"/>
+          </a:xfrm>
+          <a:prstGeom prst="rect">
+            <a:avLst/>
+          </a:prstGeom>
+          <a:noFill/>
+        </p:spPr>
+        <p:txBody>
+          <a:bodyPr wrap="square" anchor="t" lIns="0" rIns="0" tIns="0" bIns="0">
+            <a:spAutoFit/>
+          </a:bodyPr>
+          <a:lstStyle/>
+          <a:p>
+            <a:pPr algn="l">
+              <a:lnSpc>
+                <a:spcPct val="115000"/>
+              </a:lnSpc>
+            </a:pPr>
+            <a:r>
+              <a:rPr sz="6400" b="1">
+                <a:solidFill>
+                  <a:srgbClr val="4E9BF0"/>
+                </a:solidFill>
+                <a:latin typeface="Helvetica Neue"/>
+              </a:rPr>
+              <a:t>04</a:t>
+            </a:r>
+          </a:p>
+        </p:txBody>
+      </p:sp>
+      <p:sp>
+        <p:nvSpPr>
+          <p:cNvPr id="4" name="TextBox 3"/>
+          <p:cNvSpPr txBox="1"/>
+          <p:nvPr/>
+        </p:nvSpPr>
+        <p:spPr>
+          <a:xfrm>
+            <a:off x="896112" y="2103120"/>
+            <a:ext cx="7315200" cy="365760"/>
+          </a:xfrm>
+          <a:prstGeom prst="rect">
+            <a:avLst/>
+          </a:prstGeom>
+          <a:noFill/>
+        </p:spPr>
+        <p:txBody>
+          <a:bodyPr wrap="square" anchor="t" lIns="0" rIns="0" tIns="0" bIns="0">
+            <a:spAutoFit/>
+          </a:bodyPr>
+          <a:lstStyle/>
+          <a:p>
+            <a:pPr algn="l">
+              <a:lnSpc>
+                <a:spcPct val="115000"/>
+              </a:lnSpc>
+            </a:pPr>
+            <a:r>
+              <a:rPr sz="1250" b="1">
+                <a:solidFill>
+                  <a:srgbClr val="4E9BF0"/>
+                </a:solidFill>
+                <a:latin typeface="Helvetica Neue"/>
+              </a:rPr>
+              <a:t>DIRECTRICES Y CONDICIONES</a:t>
+            </a:r>
+          </a:p>
+        </p:txBody>
+      </p:sp>
       <p:sp>
         <p:nvSpPr>
           <p:cNvPr id="5" name="TextBox 4"/>
@@ -6070,108 +6099,79 @@
         </p:nvSpPr>
         <p:spPr>
           <a:xfrm>
-            <a:off x="685800" y="1965960"/>
-            <a:ext cx="10424160" cy="3931920"/>
-          </a:xfrm>
-          <a:prstGeom prst="rect">
-            <a:avLst/>
-          </a:prstGeom>
-          <a:noFill/>
-        </p:spPr>
-        <p:txBody>
-          <a:bodyPr wrap="square" lIns="0" rIns="0">
-            <a:spAutoFit/>
-          </a:bodyPr>
-          <a:lstStyle/>
-          <a:p>
-            <a:pPr>
-              <a:lnSpc>
-                <a:spcPct val="125000"/>
-              </a:lnSpc>
-              <a:spcAft>
-                <a:spcPts val="1000"/>
-              </a:spcAft>
-            </a:pPr>
-            <a:r>
-              <a:rPr sz="1550" b="1">
-                <a:solidFill>
-                  <a:srgbClr val="4E9BF0"/>
-                </a:solidFill>
-                <a:latin typeface="Helvetica Neue"/>
-              </a:rPr>
-              <a:t>—  </a:t>
-            </a:r>
-            <a:r>
-              <a:rPr sz="1550">
+            <a:off x="868680" y="3429000"/>
+            <a:ext cx="9875520" cy="1097280"/>
+          </a:xfrm>
+          <a:prstGeom prst="rect">
+            <a:avLst/>
+          </a:prstGeom>
+          <a:noFill/>
+        </p:spPr>
+        <p:txBody>
+          <a:bodyPr wrap="square" anchor="t" lIns="0" rIns="0" tIns="0" bIns="0">
+            <a:spAutoFit/>
+          </a:bodyPr>
+          <a:lstStyle/>
+          <a:p>
+            <a:pPr algn="l">
+              <a:lnSpc>
+                <a:spcPct val="115000"/>
+              </a:lnSpc>
+            </a:pPr>
+            <a:r>
+              <a:rPr sz="3400" b="1">
                 <a:solidFill>
                   <a:srgbClr val="FFFFFF"/>
                 </a:solidFill>
                 <a:latin typeface="Helvetica Neue"/>
               </a:rPr>
-              <a:t>Una vista privada de tu comisión semanal: identificadores de proyecto, importes y estado PAGADO / PENDIENTE.</a:t>
-            </a:r>
-          </a:p>
-          <a:p>
-            <a:pPr>
-              <a:lnSpc>
-                <a:spcPct val="125000"/>
-              </a:lnSpc>
-              <a:spcAft>
-                <a:spcPts val="1000"/>
-              </a:spcAft>
-            </a:pPr>
-            <a:r>
-              <a:rPr sz="1550" b="1">
-                <a:solidFill>
-                  <a:srgbClr val="4E9BF0"/>
-                </a:solidFill>
-                <a:latin typeface="Helvetica Neue"/>
-              </a:rPr>
-              <a:t>—  </a:t>
-            </a:r>
-            <a:r>
-              <a:rPr sz="1550">
-                <a:solidFill>
-                  <a:srgbClr val="FFFFFF"/>
-                </a:solidFill>
-                <a:latin typeface="Helvetica Neue"/>
-              </a:rPr>
-              <a:t>Verás lo suficiente para verificar que cada pago se calcula correctamente, sin que se te expongan los datos de contacto de los clientes de Zebraish.</a:t>
-            </a:r>
-          </a:p>
-          <a:p>
-            <a:pPr>
-              <a:lnSpc>
-                <a:spcPct val="125000"/>
-              </a:lnSpc>
-              <a:spcAft>
-                <a:spcPts val="1000"/>
-              </a:spcAft>
-            </a:pPr>
-            <a:r>
-              <a:rPr sz="1550" b="1">
-                <a:solidFill>
-                  <a:srgbClr val="4E9BF0"/>
-                </a:solidFill>
-                <a:latin typeface="Helvetica Neue"/>
-              </a:rPr>
-              <a:t>—  </a:t>
-            </a:r>
-            <a:r>
-              <a:rPr sz="1550">
-                <a:solidFill>
-                  <a:srgbClr val="FFFFFF"/>
-                </a:solidFill>
-                <a:latin typeface="Helvetica Neue"/>
-              </a:rPr>
-              <a:t>Se está construyendo junto con el Portal de Proyectos; Joshua confirmará cuando esté disponible — mientras tanto, un resumen semanal por escrito sirve de puente.</a:t>
+              <a:t>La letra pequeña, hecha legible</a:t>
+            </a:r>
+          </a:p>
+        </p:txBody>
+      </p:sp>
+      <p:sp>
+        <p:nvSpPr>
+          <p:cNvPr id="6" name="TextBox 5"/>
+          <p:cNvSpPr txBox="1"/>
+          <p:nvPr/>
+        </p:nvSpPr>
+        <p:spPr>
+          <a:xfrm>
+            <a:off x="868680" y="4251960"/>
+            <a:ext cx="8412480" cy="1097280"/>
+          </a:xfrm>
+          <a:prstGeom prst="rect">
+            <a:avLst/>
+          </a:prstGeom>
+          <a:noFill/>
+        </p:spPr>
+        <p:txBody>
+          <a:bodyPr wrap="square" anchor="t" lIns="0" rIns="0" tIns="0" bIns="0">
+            <a:spAutoFit/>
+          </a:bodyPr>
+          <a:lstStyle/>
+          <a:p>
+            <a:pPr algn="l">
+              <a:lnSpc>
+                <a:spcPct val="135000"/>
+              </a:lnSpc>
+            </a:pPr>
+            <a:r>
+              <a:rPr sz="1550" b="0">
+                <a:solidFill>
+                  <a:srgbClr val="A6ACBA"/>
+                </a:solidFill>
+                <a:latin typeface="Helvetica Neue"/>
+              </a:rPr>
+              <a:t>Directrices de marca, derechos de contenido y cómo funciona el Periodo.</a:t>
             </a:r>
           </a:p>
         </p:txBody>
       </p:sp>
       <p:pic>
         <p:nvPicPr>
-          <p:cNvPr id="6" name="Picture 5" descr="logo-head.png"/>
+          <p:cNvPr id="7" name="Picture 6" descr="logo-head.png"/>
           <p:cNvPicPr>
             <a:picLocks noChangeAspect="1"/>
           </p:cNvPicPr>
@@ -6195,7 +6195,7 @@
       </p:pic>
       <p:sp>
         <p:nvSpPr>
-          <p:cNvPr id="7" name="TextBox 6"/>
+          <p:cNvPr id="8" name="TextBox 7"/>
           <p:cNvSpPr txBox="1"/>
           <p:nvPr/>
         </p:nvSpPr>
@@ -6234,7 +6234,7 @@
       </p:sp>
       <p:sp>
         <p:nvSpPr>
-          <p:cNvPr id="8" name="TextBox 7"/>
+          <p:cNvPr id="9" name="TextBox 8"/>
           <p:cNvSpPr txBox="1"/>
           <p:nvPr/>
         </p:nvSpPr>
@@ -6266,14 +6266,14 @@
                 </a:solidFill>
                 <a:latin typeface="Helvetica Neue"/>
               </a:rPr>
-              <a:t>Comisión y pagos   ·   14 / 20</a:t>
+              <a:t>Directrices y condiciones   ·   14 / 20</a:t>
             </a:r>
           </a:p>
         </p:txBody>
       </p:sp>
       <p:cxnSp>
         <p:nvCxnSpPr>
-          <p:cNvPr id="9" name="Connector 8"/>
+          <p:cNvPr id="10" name="Connector 9"/>
           <p:cNvCxnSpPr/>
           <p:nvPr/>
         </p:nvCxnSpPr>
@@ -6320,7 +6320,7 @@
     <p:bg>
       <p:bgPr>
         <a:solidFill>
-          <a:srgbClr val="141720"/>
+          <a:srgbClr val="0B0D12"/>
         </a:solidFill>
         <a:effectLst/>
       </p:bgPr>
@@ -6334,207 +6334,283 @@
       <p:grpSpPr/>
       <p:sp>
         <p:nvSpPr>
-          <p:cNvPr id="2" name="Rectangle 1"/>
-          <p:cNvSpPr/>
-          <p:nvPr/>
-        </p:nvSpPr>
-        <p:spPr>
-          <a:xfrm>
-            <a:off x="0" y="0"/>
-            <a:ext cx="164592" cy="6858000"/>
-          </a:xfrm>
-          <a:prstGeom prst="rect">
-            <a:avLst/>
-          </a:prstGeom>
-          <a:solidFill>
-            <a:srgbClr val="1D68C0"/>
-          </a:solidFill>
-          <a:ln>
-            <a:noFill/>
+          <p:cNvPr id="2" name="TextBox 1"/>
+          <p:cNvSpPr txBox="1"/>
+          <p:nvPr/>
+        </p:nvSpPr>
+        <p:spPr>
+          <a:xfrm>
+            <a:off x="685800" y="502920"/>
+            <a:ext cx="7315200" cy="365760"/>
+          </a:xfrm>
+          <a:prstGeom prst="rect">
+            <a:avLst/>
+          </a:prstGeom>
+          <a:noFill/>
+        </p:spPr>
+        <p:txBody>
+          <a:bodyPr wrap="square" anchor="t" lIns="0" rIns="0" tIns="0" bIns="0">
+            <a:spAutoFit/>
+          </a:bodyPr>
+          <a:lstStyle/>
+          <a:p>
+            <a:pPr algn="l">
+              <a:lnSpc>
+                <a:spcPct val="115000"/>
+              </a:lnSpc>
+            </a:pPr>
+            <a:r>
+              <a:rPr sz="1250" b="1">
+                <a:solidFill>
+                  <a:srgbClr val="4E9BF0"/>
+                </a:solidFill>
+                <a:latin typeface="Helvetica Neue"/>
+              </a:rPr>
+              <a:t>DIRECTRICES Y CONDICIONES</a:t>
+            </a:r>
+          </a:p>
+        </p:txBody>
+      </p:sp>
+      <p:sp>
+        <p:nvSpPr>
+          <p:cNvPr id="3" name="TextBox 2"/>
+          <p:cNvSpPr txBox="1"/>
+          <p:nvPr/>
+        </p:nvSpPr>
+        <p:spPr>
+          <a:xfrm>
+            <a:off x="685800" y="868680"/>
+            <a:ext cx="10515600" cy="914400"/>
+          </a:xfrm>
+          <a:prstGeom prst="rect">
+            <a:avLst/>
+          </a:prstGeom>
+          <a:noFill/>
+        </p:spPr>
+        <p:txBody>
+          <a:bodyPr wrap="square" anchor="t" lIns="0" rIns="0" tIns="0" bIns="0">
+            <a:spAutoFit/>
+          </a:bodyPr>
+          <a:lstStyle/>
+          <a:p>
+            <a:pPr algn="l">
+              <a:lnSpc>
+                <a:spcPct val="105000"/>
+              </a:lnSpc>
+            </a:pPr>
+            <a:r>
+              <a:rPr sz="2700" b="1">
+                <a:solidFill>
+                  <a:srgbClr val="FFFFFF"/>
+                </a:solidFill>
+                <a:latin typeface="Helvetica Neue"/>
+              </a:rPr>
+              <a:t>Directrices de marca</a:t>
+            </a:r>
+          </a:p>
+        </p:txBody>
+      </p:sp>
+      <p:cxnSp>
+        <p:nvCxnSpPr>
+          <p:cNvPr id="4" name="Connector 3"/>
+          <p:cNvCxnSpPr/>
+          <p:nvPr/>
+        </p:nvCxnSpPr>
+        <p:spPr>
+          <a:xfrm>
+            <a:off x="685800" y="1691640"/>
+            <a:ext cx="10817352" cy="0"/>
+          </a:xfrm>
+          <a:prstGeom prst="line">
+            <a:avLst/>
+          </a:prstGeom>
+          <a:ln w="12700">
+            <a:solidFill>
+              <a:srgbClr val="2A2E3A"/>
+            </a:solidFill>
           </a:ln>
-          <a:effectLst/>
         </p:spPr>
         <p:style>
-          <a:lnRef idx="1">
+          <a:lnRef idx="2">
             <a:schemeClr val="accent1"/>
           </a:lnRef>
-          <a:fillRef idx="3">
+          <a:fillRef idx="0">
             <a:schemeClr val="accent1"/>
           </a:fillRef>
-          <a:effectRef idx="2">
+          <a:effectRef idx="1">
             <a:schemeClr val="accent1"/>
           </a:effectRef>
           <a:fontRef idx="minor">
-            <a:schemeClr val="lt1"/>
+            <a:schemeClr val="tx1"/>
           </a:fontRef>
         </p:style>
-        <p:txBody>
-          <a:bodyPr rtlCol="0" anchor="ctr"/>
-          <a:lstStyle/>
-          <a:p>
-            <a:pPr algn="ctr"/>
-          </a:p>
-        </p:txBody>
-      </p:sp>
-      <p:sp>
-        <p:nvSpPr>
-          <p:cNvPr id="3" name="TextBox 2"/>
-          <p:cNvSpPr txBox="1"/>
-          <p:nvPr/>
-        </p:nvSpPr>
-        <p:spPr>
-          <a:xfrm>
-            <a:off x="868680" y="2286000"/>
-            <a:ext cx="1828800" cy="1097280"/>
-          </a:xfrm>
-          <a:prstGeom prst="rect">
-            <a:avLst/>
-          </a:prstGeom>
-          <a:noFill/>
-        </p:spPr>
-        <p:txBody>
-          <a:bodyPr wrap="square" anchor="t" lIns="0" rIns="0" tIns="0" bIns="0">
-            <a:spAutoFit/>
-          </a:bodyPr>
-          <a:lstStyle/>
-          <a:p>
-            <a:pPr algn="l">
-              <a:lnSpc>
-                <a:spcPct val="115000"/>
-              </a:lnSpc>
-            </a:pPr>
-            <a:r>
-              <a:rPr sz="6400" b="1">
+      </p:cxnSp>
+      <p:sp>
+        <p:nvSpPr>
+          <p:cNvPr id="5" name="TextBox 4"/>
+          <p:cNvSpPr txBox="1"/>
+          <p:nvPr/>
+        </p:nvSpPr>
+        <p:spPr>
+          <a:xfrm>
+            <a:off x="685800" y="1965960"/>
+            <a:ext cx="10424160" cy="3931920"/>
+          </a:xfrm>
+          <a:prstGeom prst="rect">
+            <a:avLst/>
+          </a:prstGeom>
+          <a:noFill/>
+        </p:spPr>
+        <p:txBody>
+          <a:bodyPr wrap="square" lIns="0" rIns="0">
+            <a:spAutoFit/>
+          </a:bodyPr>
+          <a:lstStyle/>
+          <a:p>
+            <a:pPr>
+              <a:lnSpc>
+                <a:spcPct val="125000"/>
+              </a:lnSpc>
+              <a:spcAft>
+                <a:spcPts val="1000"/>
+              </a:spcAft>
+            </a:pPr>
+            <a:r>
+              <a:rPr sz="1550" b="1">
                 <a:solidFill>
                   <a:srgbClr val="4E9BF0"/>
                 </a:solidFill>
                 <a:latin typeface="Helvetica Neue"/>
               </a:rPr>
-              <a:t>04</a:t>
-            </a:r>
-          </a:p>
-        </p:txBody>
-      </p:sp>
-      <p:sp>
-        <p:nvSpPr>
-          <p:cNvPr id="4" name="TextBox 3"/>
-          <p:cNvSpPr txBox="1"/>
-          <p:nvPr/>
-        </p:nvSpPr>
-        <p:spPr>
-          <a:xfrm>
-            <a:off x="896112" y="2103120"/>
-            <a:ext cx="7315200" cy="365760"/>
-          </a:xfrm>
-          <a:prstGeom prst="rect">
-            <a:avLst/>
-          </a:prstGeom>
-          <a:noFill/>
-        </p:spPr>
-        <p:txBody>
-          <a:bodyPr wrap="square" anchor="t" lIns="0" rIns="0" tIns="0" bIns="0">
-            <a:spAutoFit/>
-          </a:bodyPr>
-          <a:lstStyle/>
-          <a:p>
-            <a:pPr algn="l">
-              <a:lnSpc>
-                <a:spcPct val="115000"/>
-              </a:lnSpc>
-            </a:pPr>
-            <a:r>
-              <a:rPr sz="1250" b="1">
+              <a:t>—  </a:t>
+            </a:r>
+            <a:r>
+              <a:rPr sz="1550">
+                <a:solidFill>
+                  <a:srgbClr val="FFFFFF"/>
+                </a:solidFill>
+                <a:latin typeface="Helvetica Neue"/>
+              </a:rPr>
+              <a:t>Representar a Zebraish de forma positiva y profesional, siempre.</a:t>
+            </a:r>
+          </a:p>
+          <a:p>
+            <a:pPr>
+              <a:lnSpc>
+                <a:spcPct val="125000"/>
+              </a:lnSpc>
+              <a:spcAft>
+                <a:spcPts val="1000"/>
+              </a:spcAft>
+            </a:pPr>
+            <a:r>
+              <a:rPr sz="1550" b="1">
                 <a:solidFill>
                   <a:srgbClr val="4E9BF0"/>
                 </a:solidFill>
                 <a:latin typeface="Helvetica Neue"/>
               </a:rPr>
-              <a:t>DIRECTRICES Y CONDICIONES</a:t>
-            </a:r>
-          </a:p>
-        </p:txBody>
-      </p:sp>
-      <p:sp>
-        <p:nvSpPr>
-          <p:cNvPr id="5" name="TextBox 4"/>
-          <p:cNvSpPr txBox="1"/>
-          <p:nvPr/>
-        </p:nvSpPr>
-        <p:spPr>
-          <a:xfrm>
-            <a:off x="868680" y="3429000"/>
-            <a:ext cx="9875520" cy="1097280"/>
-          </a:xfrm>
-          <a:prstGeom prst="rect">
-            <a:avLst/>
-          </a:prstGeom>
-          <a:noFill/>
-        </p:spPr>
-        <p:txBody>
-          <a:bodyPr wrap="square" anchor="t" lIns="0" rIns="0" tIns="0" bIns="0">
-            <a:spAutoFit/>
-          </a:bodyPr>
-          <a:lstStyle/>
-          <a:p>
-            <a:pPr algn="l">
-              <a:lnSpc>
-                <a:spcPct val="115000"/>
-              </a:lnSpc>
-            </a:pPr>
-            <a:r>
-              <a:rPr sz="3400" b="1">
+              <a:t>—  </a:t>
+            </a:r>
+            <a:r>
+              <a:rPr sz="1550">
                 <a:solidFill>
                   <a:srgbClr val="FFFFFF"/>
                 </a:solidFill>
                 <a:latin typeface="Helvetica Neue"/>
               </a:rPr>
-              <a:t>La letra pequeña, hecha legible</a:t>
-            </a:r>
-          </a:p>
-        </p:txBody>
-      </p:sp>
-      <p:sp>
-        <p:nvSpPr>
-          <p:cNvPr id="6" name="TextBox 5"/>
-          <p:cNvSpPr txBox="1"/>
-          <p:nvPr/>
-        </p:nvSpPr>
-        <p:spPr>
-          <a:xfrm>
-            <a:off x="868680" y="4251960"/>
-            <a:ext cx="8412480" cy="1097280"/>
-          </a:xfrm>
-          <a:prstGeom prst="rect">
-            <a:avLst/>
-          </a:prstGeom>
-          <a:noFill/>
-        </p:spPr>
-        <p:txBody>
-          <a:bodyPr wrap="square" anchor="t" lIns="0" rIns="0" tIns="0" bIns="0">
-            <a:spAutoFit/>
-          </a:bodyPr>
-          <a:lstStyle/>
-          <a:p>
-            <a:pPr algn="l">
-              <a:lnSpc>
-                <a:spcPct val="135000"/>
-              </a:lnSpc>
-            </a:pPr>
-            <a:r>
-              <a:rPr sz="1550" b="0">
-                <a:solidFill>
-                  <a:srgbClr val="A6ACBA"/>
-                </a:solidFill>
-                <a:latin typeface="Helvetica Neue"/>
-              </a:rPr>
-              <a:t>Directrices de marca, derechos de contenido y cómo funciona el Periodo.</a:t>
+              <a:t>Sin afirmaciones falsas o engañosas sobre Zebraish, sus productos o servicios.</a:t>
+            </a:r>
+          </a:p>
+          <a:p>
+            <a:pPr>
+              <a:lnSpc>
+                <a:spcPct val="125000"/>
+              </a:lnSpc>
+              <a:spcAft>
+                <a:spcPts val="1000"/>
+              </a:spcAft>
+            </a:pPr>
+            <a:r>
+              <a:rPr sz="1550" b="1">
+                <a:solidFill>
+                  <a:srgbClr val="4E9BF0"/>
+                </a:solidFill>
+                <a:latin typeface="Helvetica Neue"/>
+              </a:rPr>
+              <a:t>—  </a:t>
+            </a:r>
+            <a:r>
+              <a:rPr sz="1550">
+                <a:solidFill>
+                  <a:srgbClr val="FFFFFF"/>
+                </a:solidFill>
+                <a:latin typeface="Helvetica Neue"/>
+              </a:rPr>
+              <a:t>No dar a entender que eres propietario, director o directivo de Zebraish.</a:t>
+            </a:r>
+          </a:p>
+          <a:p>
+            <a:pPr>
+              <a:lnSpc>
+                <a:spcPct val="125000"/>
+              </a:lnSpc>
+              <a:spcAft>
+                <a:spcPts val="1000"/>
+              </a:spcAft>
+            </a:pPr>
+            <a:r>
+              <a:rPr sz="1550" b="1">
+                <a:solidFill>
+                  <a:srgbClr val="4E9BF0"/>
+                </a:solidFill>
+                <a:latin typeface="Helvetica Neue"/>
+              </a:rPr>
+              <a:t>—  </a:t>
+            </a:r>
+            <a:r>
+              <a:rPr sz="1550">
+                <a:solidFill>
+                  <a:srgbClr val="FFFFFF"/>
+                </a:solidFill>
+                <a:latin typeface="Helvetica Neue"/>
+              </a:rPr>
+              <a:t>Sin promesas o compromisos no autorizados en nombre de Zebraish.</a:t>
+            </a:r>
+          </a:p>
+          <a:p>
+            <a:pPr>
+              <a:lnSpc>
+                <a:spcPct val="125000"/>
+              </a:lnSpc>
+              <a:spcAft>
+                <a:spcPts val="1000"/>
+              </a:spcAft>
+            </a:pPr>
+            <a:r>
+              <a:rPr sz="1550" b="1">
+                <a:solidFill>
+                  <a:srgbClr val="4E9BF0"/>
+                </a:solidFill>
+                <a:latin typeface="Helvetica Neue"/>
+              </a:rPr>
+              <a:t>—  </a:t>
+            </a:r>
+            <a:r>
+              <a:rPr sz="1550">
+                <a:solidFill>
+                  <a:srgbClr val="FFFFFF"/>
+                </a:solidFill>
+                <a:latin typeface="Helvetica Neue"/>
+              </a:rPr>
+              <a:t>La publicidad de pago o los patrocinios necesitan la aprobación escrita de Joshua antes de comprometer ningún gasto.</a:t>
             </a:r>
           </a:p>
         </p:txBody>
       </p:sp>
       <p:pic>
         <p:nvPicPr>
-          <p:cNvPr id="7" name="Picture 6" descr="logo-head.png"/>
+          <p:cNvPr id="6" name="Picture 5" descr="logo-head.png"/>
           <p:cNvPicPr>
             <a:picLocks noChangeAspect="1"/>
           </p:cNvPicPr>
@@ -6558,7 +6634,7 @@
       </p:pic>
       <p:sp>
         <p:nvSpPr>
-          <p:cNvPr id="8" name="TextBox 7"/>
+          <p:cNvPr id="7" name="TextBox 6"/>
           <p:cNvSpPr txBox="1"/>
           <p:nvPr/>
         </p:nvSpPr>
@@ -6597,7 +6673,7 @@
       </p:sp>
       <p:sp>
         <p:nvSpPr>
-          <p:cNvPr id="9" name="TextBox 8"/>
+          <p:cNvPr id="8" name="TextBox 7"/>
           <p:cNvSpPr txBox="1"/>
           <p:nvPr/>
         </p:nvSpPr>
@@ -6636,7 +6712,7 @@
       </p:sp>
       <p:cxnSp>
         <p:nvCxnSpPr>
-          <p:cNvPr id="10" name="Connector 9"/>
+          <p:cNvPr id="9" name="Connector 8"/>
           <p:cNvCxnSpPr/>
           <p:nvPr/>
         </p:nvCxnSpPr>
@@ -6768,7 +6844,7 @@
                 </a:solidFill>
                 <a:latin typeface="Helvetica Neue"/>
               </a:rPr>
-              <a:t>Directrices de marca</a:t>
+              <a:t>Contenido y tus derechos</a:t>
             </a:r>
           </a:p>
         </p:txBody>
@@ -6854,7 +6930,7 @@
                 </a:solidFill>
                 <a:latin typeface="Helvetica Neue"/>
               </a:rPr>
-              <a:t>Representar a Zebraish de forma positiva y profesional, siempre.</a:t>
+              <a:t>Conservas la titularidad plena de tu identidad, imagen y semejanza, siempre.</a:t>
             </a:r>
           </a:p>
           <a:p>
@@ -6882,7 +6958,7 @@
                 </a:solidFill>
                 <a:latin typeface="Helvetica Neue"/>
               </a:rPr>
-              <a:t>Sin afirmaciones falsas o engañosas sobre Zebraish, sus productos o servicios.</a:t>
+              <a:t>Zebraish recibe una licencia no exclusiva para usar contenido aprobado (fotos, videos, tu nombre) con fines promocionales en Instagram, TikTok, el sitio web y publicidad.</a:t>
             </a:r>
           </a:p>
           <a:p>
@@ -6910,7 +6986,7 @@
                 </a:solidFill>
                 <a:latin typeface="Helvetica Neue"/>
               </a:rPr>
-              <a:t>No dar a entender que eres propietario, director o directivo de Zebraish.</a:t>
+              <a:t>Esa licencia dura durante el Periodo, más 6 meses tras su finalización, solo para uso de archivo y portafolio, no para nuevas campañas.</a:t>
             </a:r>
           </a:p>
           <a:p>
@@ -6938,35 +7014,7 @@
                 </a:solidFill>
                 <a:latin typeface="Helvetica Neue"/>
               </a:rPr>
-              <a:t>Sin promesas o compromisos no autorizados en nombre de Zebraish.</a:t>
-            </a:r>
-          </a:p>
-          <a:p>
-            <a:pPr>
-              <a:lnSpc>
-                <a:spcPct val="125000"/>
-              </a:lnSpc>
-              <a:spcAft>
-                <a:spcPts val="1000"/>
-              </a:spcAft>
-            </a:pPr>
-            <a:r>
-              <a:rPr sz="1550" b="1">
-                <a:solidFill>
-                  <a:srgbClr val="4E9BF0"/>
-                </a:solidFill>
-                <a:latin typeface="Helvetica Neue"/>
-              </a:rPr>
-              <a:t>—  </a:t>
-            </a:r>
-            <a:r>
-              <a:rPr sz="1550">
-                <a:solidFill>
-                  <a:srgbClr val="FFFFFF"/>
-                </a:solidFill>
-                <a:latin typeface="Helvetica Neue"/>
-              </a:rPr>
-              <a:t>La publicidad de pago o los patrocinios necesitan la aprobación escrita de Joshua antes de comprometer ningún gasto.</a:t>
+              <a:t>La información confidencial de Zebraish (productos, precios, estrategia) sigue siendo confidencial, durante y después del Periodo.</a:t>
             </a:r>
           </a:p>
         </p:txBody>
@@ -7197,7 +7245,7 @@
           <a:p>
             <a:pPr algn="l">
               <a:lnSpc>
-                <a:spcPct val="105000"/>
+                <a:spcPct val="115000"/>
               </a:lnSpc>
             </a:pPr>
             <a:r>
@@ -7207,7 +7255,7 @@
                 </a:solidFill>
                 <a:latin typeface="Helvetica Neue"/>
               </a:rPr>
-              <a:t>Contenido y tus derechos</a:t>
+              <a:t>El Periodo y cómo termina</a:t>
             </a:r>
           </a:p>
         </p:txBody>
@@ -7249,142 +7297,774 @@
       </p:cxnSp>
       <p:sp>
         <p:nvSpPr>
-          <p:cNvPr id="5" name="TextBox 4"/>
-          <p:cNvSpPr txBox="1"/>
-          <p:nvPr/>
-        </p:nvSpPr>
-        <p:spPr>
-          <a:xfrm>
-            <a:off x="685800" y="1965960"/>
-            <a:ext cx="10424160" cy="3931920"/>
-          </a:xfrm>
-          <a:prstGeom prst="rect">
-            <a:avLst/>
-          </a:prstGeom>
-          <a:noFill/>
-        </p:spPr>
-        <p:txBody>
-          <a:bodyPr wrap="square" lIns="0" rIns="0">
-            <a:spAutoFit/>
-          </a:bodyPr>
-          <a:lstStyle/>
-          <a:p>
-            <a:pPr>
-              <a:lnSpc>
-                <a:spcPct val="125000"/>
-              </a:lnSpc>
-              <a:spcAft>
-                <a:spcPts val="1000"/>
-              </a:spcAft>
-            </a:pPr>
-            <a:r>
-              <a:rPr sz="1550" b="1">
-                <a:solidFill>
-                  <a:srgbClr val="4E9BF0"/>
-                </a:solidFill>
-                <a:latin typeface="Helvetica Neue"/>
-              </a:rPr>
-              <a:t>—  </a:t>
-            </a:r>
-            <a:r>
-              <a:rPr sz="1550">
+          <p:cNvPr id="5" name="Rectangle 4"/>
+          <p:cNvSpPr/>
+          <p:nvPr/>
+        </p:nvSpPr>
+        <p:spPr>
+          <a:xfrm>
+            <a:off x="685800" y="1920240"/>
+            <a:ext cx="10817352" cy="621792"/>
+          </a:xfrm>
+          <a:prstGeom prst="rect">
+            <a:avLst/>
+          </a:prstGeom>
+          <a:solidFill>
+            <a:srgbClr val="1D68C0"/>
+          </a:solidFill>
+          <a:ln>
+            <a:noFill/>
+          </a:ln>
+          <a:effectLst/>
+        </p:spPr>
+        <p:style>
+          <a:lnRef idx="1">
+            <a:schemeClr val="accent1"/>
+          </a:lnRef>
+          <a:fillRef idx="3">
+            <a:schemeClr val="accent1"/>
+          </a:fillRef>
+          <a:effectRef idx="2">
+            <a:schemeClr val="accent1"/>
+          </a:effectRef>
+          <a:fontRef idx="minor">
+            <a:schemeClr val="lt1"/>
+          </a:fontRef>
+        </p:style>
+        <p:txBody>
+          <a:bodyPr rtlCol="0" anchor="ctr"/>
+          <a:lstStyle/>
+          <a:p>
+            <a:pPr algn="ctr"/>
+          </a:p>
+        </p:txBody>
+      </p:sp>
+      <p:sp>
+        <p:nvSpPr>
+          <p:cNvPr id="6" name="TextBox 5"/>
+          <p:cNvSpPr txBox="1"/>
+          <p:nvPr/>
+        </p:nvSpPr>
+        <p:spPr>
+          <a:xfrm>
+            <a:off x="868680" y="2029968"/>
+            <a:ext cx="4846320" cy="621792"/>
+          </a:xfrm>
+          <a:prstGeom prst="rect">
+            <a:avLst/>
+          </a:prstGeom>
+          <a:noFill/>
+        </p:spPr>
+        <p:txBody>
+          <a:bodyPr wrap="square" anchor="t" lIns="0" rIns="0" tIns="0" bIns="0">
+            <a:spAutoFit/>
+          </a:bodyPr>
+          <a:lstStyle/>
+          <a:p>
+            <a:pPr algn="l">
+              <a:lnSpc>
+                <a:spcPct val="115000"/>
+              </a:lnSpc>
+            </a:pPr>
+            <a:r>
+              <a:rPr sz="1250" b="1">
                 <a:solidFill>
                   <a:srgbClr val="FFFFFF"/>
                 </a:solidFill>
                 <a:latin typeface="Helvetica Neue"/>
               </a:rPr>
-              <a:t>Conservas la titularidad plena de tu identidad, imagen y semejanza, siempre.</a:t>
-            </a:r>
-          </a:p>
-          <a:p>
-            <a:pPr>
-              <a:lnSpc>
-                <a:spcPct val="125000"/>
-              </a:lnSpc>
-              <a:spcAft>
-                <a:spcPts val="1000"/>
-              </a:spcAft>
-            </a:pPr>
-            <a:r>
-              <a:rPr sz="1550" b="1">
-                <a:solidFill>
-                  <a:srgbClr val="4E9BF0"/>
-                </a:solidFill>
-                <a:latin typeface="Helvetica Neue"/>
-              </a:rPr>
-              <a:t>—  </a:t>
-            </a:r>
-            <a:r>
-              <a:rPr sz="1550">
+              <a:t>Elemento</a:t>
+            </a:r>
+          </a:p>
+        </p:txBody>
+      </p:sp>
+      <p:sp>
+        <p:nvSpPr>
+          <p:cNvPr id="7" name="TextBox 6"/>
+          <p:cNvSpPr txBox="1"/>
+          <p:nvPr/>
+        </p:nvSpPr>
+        <p:spPr>
+          <a:xfrm>
+            <a:off x="5989320" y="2029968"/>
+            <a:ext cx="5422392" cy="621792"/>
+          </a:xfrm>
+          <a:prstGeom prst="rect">
+            <a:avLst/>
+          </a:prstGeom>
+          <a:noFill/>
+        </p:spPr>
+        <p:txBody>
+          <a:bodyPr wrap="square" anchor="t" lIns="0" rIns="0" tIns="0" bIns="0">
+            <a:spAutoFit/>
+          </a:bodyPr>
+          <a:lstStyle/>
+          <a:p>
+            <a:pPr algn="l">
+              <a:lnSpc>
+                <a:spcPct val="115000"/>
+              </a:lnSpc>
+            </a:pPr>
+            <a:r>
+              <a:rPr sz="1250" b="1">
                 <a:solidFill>
                   <a:srgbClr val="FFFFFF"/>
                 </a:solidFill>
                 <a:latin typeface="Helvetica Neue"/>
               </a:rPr>
-              <a:t>Zebraish recibe una licencia no exclusiva para usar contenido aprobado (fotos, videos, tu nombre) con fines promocionales en Instagram, TikTok, el sitio web y publicidad.</a:t>
-            </a:r>
-          </a:p>
-          <a:p>
-            <a:pPr>
-              <a:lnSpc>
-                <a:spcPct val="125000"/>
-              </a:lnSpc>
-              <a:spcAft>
-                <a:spcPts val="1000"/>
-              </a:spcAft>
-            </a:pPr>
-            <a:r>
-              <a:rPr sz="1550" b="1">
-                <a:solidFill>
-                  <a:srgbClr val="4E9BF0"/>
-                </a:solidFill>
-                <a:latin typeface="Helvetica Neue"/>
-              </a:rPr>
-              <a:t>—  </a:t>
-            </a:r>
-            <a:r>
-              <a:rPr sz="1550">
+              <a:t>Detalle</a:t>
+            </a:r>
+          </a:p>
+        </p:txBody>
+      </p:sp>
+      <p:sp>
+        <p:nvSpPr>
+          <p:cNvPr id="8" name="Rectangle 7"/>
+          <p:cNvSpPr/>
+          <p:nvPr/>
+        </p:nvSpPr>
+        <p:spPr>
+          <a:xfrm>
+            <a:off x="685800" y="2542032"/>
+            <a:ext cx="10817352" cy="621792"/>
+          </a:xfrm>
+          <a:prstGeom prst="rect">
+            <a:avLst/>
+          </a:prstGeom>
+          <a:solidFill>
+            <a:srgbClr val="141720"/>
+          </a:solidFill>
+          <a:ln>
+            <a:noFill/>
+          </a:ln>
+          <a:effectLst/>
+        </p:spPr>
+        <p:style>
+          <a:lnRef idx="1">
+            <a:schemeClr val="accent1"/>
+          </a:lnRef>
+          <a:fillRef idx="3">
+            <a:schemeClr val="accent1"/>
+          </a:fillRef>
+          <a:effectRef idx="2">
+            <a:schemeClr val="accent1"/>
+          </a:effectRef>
+          <a:fontRef idx="minor">
+            <a:schemeClr val="lt1"/>
+          </a:fontRef>
+        </p:style>
+        <p:txBody>
+          <a:bodyPr rtlCol="0" anchor="ctr"/>
+          <a:lstStyle/>
+          <a:p>
+            <a:pPr algn="ctr"/>
+          </a:p>
+        </p:txBody>
+      </p:sp>
+      <p:sp>
+        <p:nvSpPr>
+          <p:cNvPr id="9" name="TextBox 8"/>
+          <p:cNvSpPr txBox="1"/>
+          <p:nvPr/>
+        </p:nvSpPr>
+        <p:spPr>
+          <a:xfrm>
+            <a:off x="868680" y="2633472"/>
+            <a:ext cx="4846320" cy="621792"/>
+          </a:xfrm>
+          <a:prstGeom prst="rect">
+            <a:avLst/>
+          </a:prstGeom>
+          <a:noFill/>
+        </p:spPr>
+        <p:txBody>
+          <a:bodyPr wrap="square" anchor="t" lIns="0" rIns="0" tIns="0" bIns="0">
+            <a:spAutoFit/>
+          </a:bodyPr>
+          <a:lstStyle/>
+          <a:p>
+            <a:pPr algn="l">
+              <a:lnSpc>
+                <a:spcPct val="115000"/>
+              </a:lnSpc>
+            </a:pPr>
+            <a:r>
+              <a:rPr sz="1300" b="1">
                 <a:solidFill>
                   <a:srgbClr val="FFFFFF"/>
                 </a:solidFill>
                 <a:latin typeface="Helvetica Neue"/>
               </a:rPr>
-              <a:t>Esa licencia dura durante el Periodo, más 6 meses tras su finalización, solo para uso de archivo y portafolio, no para nuevas campañas.</a:t>
-            </a:r>
-          </a:p>
-          <a:p>
-            <a:pPr>
-              <a:lnSpc>
-                <a:spcPct val="125000"/>
-              </a:lnSpc>
-              <a:spcAft>
-                <a:spcPts val="1000"/>
-              </a:spcAft>
-            </a:pPr>
-            <a:r>
-              <a:rPr sz="1550" b="1">
-                <a:solidFill>
-                  <a:srgbClr val="4E9BF0"/>
-                </a:solidFill>
-                <a:latin typeface="Helvetica Neue"/>
-              </a:rPr>
-              <a:t>—  </a:t>
-            </a:r>
-            <a:r>
-              <a:rPr sz="1550">
+              <a:t>Periodo Inicial</a:t>
+            </a:r>
+          </a:p>
+        </p:txBody>
+      </p:sp>
+      <p:sp>
+        <p:nvSpPr>
+          <p:cNvPr id="10" name="TextBox 9"/>
+          <p:cNvSpPr txBox="1"/>
+          <p:nvPr/>
+        </p:nvSpPr>
+        <p:spPr>
+          <a:xfrm>
+            <a:off x="5989320" y="2633472"/>
+            <a:ext cx="5422392" cy="621792"/>
+          </a:xfrm>
+          <a:prstGeom prst="rect">
+            <a:avLst/>
+          </a:prstGeom>
+          <a:noFill/>
+        </p:spPr>
+        <p:txBody>
+          <a:bodyPr wrap="square" anchor="t" lIns="0" rIns="0" tIns="0" bIns="0">
+            <a:spAutoFit/>
+          </a:bodyPr>
+          <a:lstStyle/>
+          <a:p>
+            <a:pPr algn="l">
+              <a:lnSpc>
+                <a:spcPct val="115000"/>
+              </a:lnSpc>
+            </a:pPr>
+            <a:r>
+              <a:rPr sz="1300" b="0">
+                <a:solidFill>
+                  <a:srgbClr val="A6ACBA"/>
+                </a:solidFill>
+                <a:latin typeface="Helvetica Neue"/>
+              </a:rPr>
+              <a:t>3 meses desde la fecha de la última firma</a:t>
+            </a:r>
+          </a:p>
+        </p:txBody>
+      </p:sp>
+      <p:sp>
+        <p:nvSpPr>
+          <p:cNvPr id="11" name="Rectangle 10"/>
+          <p:cNvSpPr/>
+          <p:nvPr/>
+        </p:nvSpPr>
+        <p:spPr>
+          <a:xfrm>
+            <a:off x="685800" y="3163824"/>
+            <a:ext cx="10817352" cy="621792"/>
+          </a:xfrm>
+          <a:prstGeom prst="rect">
+            <a:avLst/>
+          </a:prstGeom>
+          <a:solidFill>
+            <a:srgbClr val="0B0D12"/>
+          </a:solidFill>
+          <a:ln>
+            <a:noFill/>
+          </a:ln>
+          <a:effectLst/>
+        </p:spPr>
+        <p:style>
+          <a:lnRef idx="1">
+            <a:schemeClr val="accent1"/>
+          </a:lnRef>
+          <a:fillRef idx="3">
+            <a:schemeClr val="accent1"/>
+          </a:fillRef>
+          <a:effectRef idx="2">
+            <a:schemeClr val="accent1"/>
+          </a:effectRef>
+          <a:fontRef idx="minor">
+            <a:schemeClr val="lt1"/>
+          </a:fontRef>
+        </p:style>
+        <p:txBody>
+          <a:bodyPr rtlCol="0" anchor="ctr"/>
+          <a:lstStyle/>
+          <a:p>
+            <a:pPr algn="ctr"/>
+          </a:p>
+        </p:txBody>
+      </p:sp>
+      <p:sp>
+        <p:nvSpPr>
+          <p:cNvPr id="12" name="TextBox 11"/>
+          <p:cNvSpPr txBox="1"/>
+          <p:nvPr/>
+        </p:nvSpPr>
+        <p:spPr>
+          <a:xfrm>
+            <a:off x="868680" y="3255264"/>
+            <a:ext cx="4846320" cy="621792"/>
+          </a:xfrm>
+          <a:prstGeom prst="rect">
+            <a:avLst/>
+          </a:prstGeom>
+          <a:noFill/>
+        </p:spPr>
+        <p:txBody>
+          <a:bodyPr wrap="square" anchor="t" lIns="0" rIns="0" tIns="0" bIns="0">
+            <a:spAutoFit/>
+          </a:bodyPr>
+          <a:lstStyle/>
+          <a:p>
+            <a:pPr algn="l">
+              <a:lnSpc>
+                <a:spcPct val="115000"/>
+              </a:lnSpc>
+            </a:pPr>
+            <a:r>
+              <a:rPr sz="1300" b="1">
                 <a:solidFill>
                   <a:srgbClr val="FFFFFF"/>
                 </a:solidFill>
                 <a:latin typeface="Helvetica Neue"/>
               </a:rPr>
-              <a:t>La información confidencial de Zebraish (productos, precios, estrategia) sigue siendo confidencial, durante y después del Periodo.</a:t>
-            </a:r>
-          </a:p>
-        </p:txBody>
-      </p:sp>
+              <a:t>Renovación</a:t>
+            </a:r>
+          </a:p>
+        </p:txBody>
+      </p:sp>
+      <p:sp>
+        <p:nvSpPr>
+          <p:cNvPr id="13" name="TextBox 12"/>
+          <p:cNvSpPr txBox="1"/>
+          <p:nvPr/>
+        </p:nvSpPr>
+        <p:spPr>
+          <a:xfrm>
+            <a:off x="5989320" y="3255264"/>
+            <a:ext cx="5422392" cy="621792"/>
+          </a:xfrm>
+          <a:prstGeom prst="rect">
+            <a:avLst/>
+          </a:prstGeom>
+          <a:noFill/>
+        </p:spPr>
+        <p:txBody>
+          <a:bodyPr wrap="square" anchor="t" lIns="0" rIns="0" tIns="0" bIns="0">
+            <a:spAutoFit/>
+          </a:bodyPr>
+          <a:lstStyle/>
+          <a:p>
+            <a:pPr algn="l">
+              <a:lnSpc>
+                <a:spcPct val="115000"/>
+              </a:lnSpc>
+            </a:pPr>
+            <a:r>
+              <a:rPr sz="1300" b="0">
+                <a:solidFill>
+                  <a:srgbClr val="A6ACBA"/>
+                </a:solidFill>
+                <a:latin typeface="Helvetica Neue"/>
+              </a:rPr>
+              <a:t>Solo mediante acuerdo escrito mutuo; de lo contrario termina automáticamente</a:t>
+            </a:r>
+          </a:p>
+        </p:txBody>
+      </p:sp>
+      <p:sp>
+        <p:nvSpPr>
+          <p:cNvPr id="14" name="Rectangle 13"/>
+          <p:cNvSpPr/>
+          <p:nvPr/>
+        </p:nvSpPr>
+        <p:spPr>
+          <a:xfrm>
+            <a:off x="685800" y="3785616"/>
+            <a:ext cx="10817352" cy="621792"/>
+          </a:xfrm>
+          <a:prstGeom prst="rect">
+            <a:avLst/>
+          </a:prstGeom>
+          <a:solidFill>
+            <a:srgbClr val="141720"/>
+          </a:solidFill>
+          <a:ln>
+            <a:noFill/>
+          </a:ln>
+          <a:effectLst/>
+        </p:spPr>
+        <p:style>
+          <a:lnRef idx="1">
+            <a:schemeClr val="accent1"/>
+          </a:lnRef>
+          <a:fillRef idx="3">
+            <a:schemeClr val="accent1"/>
+          </a:fillRef>
+          <a:effectRef idx="2">
+            <a:schemeClr val="accent1"/>
+          </a:effectRef>
+          <a:fontRef idx="minor">
+            <a:schemeClr val="lt1"/>
+          </a:fontRef>
+        </p:style>
+        <p:txBody>
+          <a:bodyPr rtlCol="0" anchor="ctr"/>
+          <a:lstStyle/>
+          <a:p>
+            <a:pPr algn="ctr"/>
+          </a:p>
+        </p:txBody>
+      </p:sp>
+      <p:sp>
+        <p:nvSpPr>
+          <p:cNvPr id="15" name="TextBox 14"/>
+          <p:cNvSpPr txBox="1"/>
+          <p:nvPr/>
+        </p:nvSpPr>
+        <p:spPr>
+          <a:xfrm>
+            <a:off x="868680" y="3877056"/>
+            <a:ext cx="4846320" cy="621792"/>
+          </a:xfrm>
+          <a:prstGeom prst="rect">
+            <a:avLst/>
+          </a:prstGeom>
+          <a:noFill/>
+        </p:spPr>
+        <p:txBody>
+          <a:bodyPr wrap="square" anchor="t" lIns="0" rIns="0" tIns="0" bIns="0">
+            <a:spAutoFit/>
+          </a:bodyPr>
+          <a:lstStyle/>
+          <a:p>
+            <a:pPr algn="l">
+              <a:lnSpc>
+                <a:spcPct val="115000"/>
+              </a:lnSpc>
+            </a:pPr>
+            <a:r>
+              <a:rPr sz="1300" b="1">
+                <a:solidFill>
+                  <a:srgbClr val="FFFFFF"/>
+                </a:solidFill>
+                <a:latin typeface="Helvetica Neue"/>
+              </a:rPr>
+              <a:t>Terminación por conveniencia</a:t>
+            </a:r>
+          </a:p>
+        </p:txBody>
+      </p:sp>
+      <p:sp>
+        <p:nvSpPr>
+          <p:cNvPr id="16" name="TextBox 15"/>
+          <p:cNvSpPr txBox="1"/>
+          <p:nvPr/>
+        </p:nvSpPr>
+        <p:spPr>
+          <a:xfrm>
+            <a:off x="5989320" y="3877056"/>
+            <a:ext cx="5422392" cy="621792"/>
+          </a:xfrm>
+          <a:prstGeom prst="rect">
+            <a:avLst/>
+          </a:prstGeom>
+          <a:noFill/>
+        </p:spPr>
+        <p:txBody>
+          <a:bodyPr wrap="square" anchor="t" lIns="0" rIns="0" tIns="0" bIns="0">
+            <a:spAutoFit/>
+          </a:bodyPr>
+          <a:lstStyle/>
+          <a:p>
+            <a:pPr algn="l">
+              <a:lnSpc>
+                <a:spcPct val="115000"/>
+              </a:lnSpc>
+            </a:pPr>
+            <a:r>
+              <a:rPr sz="1300" b="0">
+                <a:solidFill>
+                  <a:srgbClr val="A6ACBA"/>
+                </a:solidFill>
+                <a:latin typeface="Helvetica Neue"/>
+              </a:rPr>
+              <a:t>14 días de notificación escrita, cualquiera de las partes</a:t>
+            </a:r>
+          </a:p>
+        </p:txBody>
+      </p:sp>
+      <p:sp>
+        <p:nvSpPr>
+          <p:cNvPr id="17" name="Rectangle 16"/>
+          <p:cNvSpPr/>
+          <p:nvPr/>
+        </p:nvSpPr>
+        <p:spPr>
+          <a:xfrm>
+            <a:off x="685800" y="4407408"/>
+            <a:ext cx="10817352" cy="621792"/>
+          </a:xfrm>
+          <a:prstGeom prst="rect">
+            <a:avLst/>
+          </a:prstGeom>
+          <a:solidFill>
+            <a:srgbClr val="0B0D12"/>
+          </a:solidFill>
+          <a:ln>
+            <a:noFill/>
+          </a:ln>
+          <a:effectLst/>
+        </p:spPr>
+        <p:style>
+          <a:lnRef idx="1">
+            <a:schemeClr val="accent1"/>
+          </a:lnRef>
+          <a:fillRef idx="3">
+            <a:schemeClr val="accent1"/>
+          </a:fillRef>
+          <a:effectRef idx="2">
+            <a:schemeClr val="accent1"/>
+          </a:effectRef>
+          <a:fontRef idx="minor">
+            <a:schemeClr val="lt1"/>
+          </a:fontRef>
+        </p:style>
+        <p:txBody>
+          <a:bodyPr rtlCol="0" anchor="ctr"/>
+          <a:lstStyle/>
+          <a:p>
+            <a:pPr algn="ctr"/>
+          </a:p>
+        </p:txBody>
+      </p:sp>
+      <p:sp>
+        <p:nvSpPr>
+          <p:cNvPr id="18" name="TextBox 17"/>
+          <p:cNvSpPr txBox="1"/>
+          <p:nvPr/>
+        </p:nvSpPr>
+        <p:spPr>
+          <a:xfrm>
+            <a:off x="868680" y="4498848"/>
+            <a:ext cx="4846320" cy="621792"/>
+          </a:xfrm>
+          <a:prstGeom prst="rect">
+            <a:avLst/>
+          </a:prstGeom>
+          <a:noFill/>
+        </p:spPr>
+        <p:txBody>
+          <a:bodyPr wrap="square" anchor="t" lIns="0" rIns="0" tIns="0" bIns="0">
+            <a:spAutoFit/>
+          </a:bodyPr>
+          <a:lstStyle/>
+          <a:p>
+            <a:pPr algn="l">
+              <a:lnSpc>
+                <a:spcPct val="115000"/>
+              </a:lnSpc>
+            </a:pPr>
+            <a:r>
+              <a:rPr sz="1300" b="1">
+                <a:solidFill>
+                  <a:srgbClr val="FFFFFF"/>
+                </a:solidFill>
+                <a:latin typeface="Helvetica Neue"/>
+              </a:rPr>
+              <a:t>Terminación inmediata</a:t>
+            </a:r>
+          </a:p>
+        </p:txBody>
+      </p:sp>
+      <p:sp>
+        <p:nvSpPr>
+          <p:cNvPr id="19" name="TextBox 18"/>
+          <p:cNvSpPr txBox="1"/>
+          <p:nvPr/>
+        </p:nvSpPr>
+        <p:spPr>
+          <a:xfrm>
+            <a:off x="5989320" y="4498848"/>
+            <a:ext cx="5422392" cy="621792"/>
+          </a:xfrm>
+          <a:prstGeom prst="rect">
+            <a:avLst/>
+          </a:prstGeom>
+          <a:noFill/>
+        </p:spPr>
+        <p:txBody>
+          <a:bodyPr wrap="square" anchor="t" lIns="0" rIns="0" tIns="0" bIns="0">
+            <a:spAutoFit/>
+          </a:bodyPr>
+          <a:lstStyle/>
+          <a:p>
+            <a:pPr algn="l">
+              <a:lnSpc>
+                <a:spcPct val="115000"/>
+              </a:lnSpc>
+            </a:pPr>
+            <a:r>
+              <a:rPr sz="1300" b="0">
+                <a:solidFill>
+                  <a:srgbClr val="A6ACBA"/>
+                </a:solidFill>
+                <a:latin typeface="Helvetica Neue"/>
+              </a:rPr>
+              <a:t>Por falta grave, fraude o un incumplimiento no subsanado</a:t>
+            </a:r>
+          </a:p>
+        </p:txBody>
+      </p:sp>
+      <p:sp>
+        <p:nvSpPr>
+          <p:cNvPr id="20" name="Rectangle 19"/>
+          <p:cNvSpPr/>
+          <p:nvPr/>
+        </p:nvSpPr>
+        <p:spPr>
+          <a:xfrm>
+            <a:off x="685800" y="5029200"/>
+            <a:ext cx="10817352" cy="621792"/>
+          </a:xfrm>
+          <a:prstGeom prst="rect">
+            <a:avLst/>
+          </a:prstGeom>
+          <a:solidFill>
+            <a:srgbClr val="141720"/>
+          </a:solidFill>
+          <a:ln>
+            <a:noFill/>
+          </a:ln>
+          <a:effectLst/>
+        </p:spPr>
+        <p:style>
+          <a:lnRef idx="1">
+            <a:schemeClr val="accent1"/>
+          </a:lnRef>
+          <a:fillRef idx="3">
+            <a:schemeClr val="accent1"/>
+          </a:fillRef>
+          <a:effectRef idx="2">
+            <a:schemeClr val="accent1"/>
+          </a:effectRef>
+          <a:fontRef idx="minor">
+            <a:schemeClr val="lt1"/>
+          </a:fontRef>
+        </p:style>
+        <p:txBody>
+          <a:bodyPr rtlCol="0" anchor="ctr"/>
+          <a:lstStyle/>
+          <a:p>
+            <a:pPr algn="ctr"/>
+          </a:p>
+        </p:txBody>
+      </p:sp>
+      <p:sp>
+        <p:nvSpPr>
+          <p:cNvPr id="21" name="TextBox 20"/>
+          <p:cNvSpPr txBox="1"/>
+          <p:nvPr/>
+        </p:nvSpPr>
+        <p:spPr>
+          <a:xfrm>
+            <a:off x="868680" y="5120640"/>
+            <a:ext cx="4846320" cy="621792"/>
+          </a:xfrm>
+          <a:prstGeom prst="rect">
+            <a:avLst/>
+          </a:prstGeom>
+          <a:noFill/>
+        </p:spPr>
+        <p:txBody>
+          <a:bodyPr wrap="square" anchor="t" lIns="0" rIns="0" tIns="0" bIns="0">
+            <a:spAutoFit/>
+          </a:bodyPr>
+          <a:lstStyle/>
+          <a:p>
+            <a:pPr algn="l">
+              <a:lnSpc>
+                <a:spcPct val="115000"/>
+              </a:lnSpc>
+            </a:pPr>
+            <a:r>
+              <a:rPr sz="1300" b="1">
+                <a:solidFill>
+                  <a:srgbClr val="FFFFFF"/>
+                </a:solidFill>
+                <a:latin typeface="Helvetica Neue"/>
+              </a:rPr>
+              <a:t>Tras la terminación</a:t>
+            </a:r>
+          </a:p>
+        </p:txBody>
+      </p:sp>
+      <p:sp>
+        <p:nvSpPr>
+          <p:cNvPr id="22" name="TextBox 21"/>
+          <p:cNvSpPr txBox="1"/>
+          <p:nvPr/>
+        </p:nvSpPr>
+        <p:spPr>
+          <a:xfrm>
+            <a:off x="5989320" y="5120640"/>
+            <a:ext cx="5422392" cy="621792"/>
+          </a:xfrm>
+          <a:prstGeom prst="rect">
+            <a:avLst/>
+          </a:prstGeom>
+          <a:noFill/>
+        </p:spPr>
+        <p:txBody>
+          <a:bodyPr wrap="square" anchor="t" lIns="0" rIns="0" tIns="0" bIns="0">
+            <a:spAutoFit/>
+          </a:bodyPr>
+          <a:lstStyle/>
+          <a:p>
+            <a:pPr algn="l">
+              <a:lnSpc>
+                <a:spcPct val="115000"/>
+              </a:lnSpc>
+            </a:pPr>
+            <a:r>
+              <a:rPr sz="1300" b="0">
+                <a:solidFill>
+                  <a:srgbClr val="A6ACBA"/>
+                </a:solidFill>
+                <a:latin typeface="Helvetica Neue"/>
+              </a:rPr>
+              <a:t>La comisión ya generada sobre pagos elegibles sigue siendo pagadera</a:t>
+            </a:r>
+          </a:p>
+        </p:txBody>
+      </p:sp>
+      <p:cxnSp>
+        <p:nvCxnSpPr>
+          <p:cNvPr id="23" name="Connector 22"/>
+          <p:cNvCxnSpPr/>
+          <p:nvPr/>
+        </p:nvCxnSpPr>
+        <p:spPr>
+          <a:xfrm>
+            <a:off x="685800" y="1920240"/>
+            <a:ext cx="10817352" cy="0"/>
+          </a:xfrm>
+          <a:prstGeom prst="line">
+            <a:avLst/>
+          </a:prstGeom>
+          <a:ln w="12700">
+            <a:solidFill>
+              <a:srgbClr val="2A2E3A"/>
+            </a:solidFill>
+          </a:ln>
+        </p:spPr>
+        <p:style>
+          <a:lnRef idx="2">
+            <a:schemeClr val="accent1"/>
+          </a:lnRef>
+          <a:fillRef idx="0">
+            <a:schemeClr val="accent1"/>
+          </a:fillRef>
+          <a:effectRef idx="1">
+            <a:schemeClr val="accent1"/>
+          </a:effectRef>
+          <a:fontRef idx="minor">
+            <a:schemeClr val="tx1"/>
+          </a:fontRef>
+        </p:style>
+      </p:cxnSp>
       <p:pic>
         <p:nvPicPr>
-          <p:cNvPr id="6" name="Picture 5" descr="logo-head.png"/>
+          <p:cNvPr id="24" name="Picture 23" descr="logo-head.png"/>
           <p:cNvPicPr>
             <a:picLocks noChangeAspect="1"/>
           </p:cNvPicPr>
@@ -7408,7 +8088,7 @@
       </p:pic>
       <p:sp>
         <p:nvSpPr>
-          <p:cNvPr id="7" name="TextBox 6"/>
+          <p:cNvPr id="25" name="TextBox 24"/>
           <p:cNvSpPr txBox="1"/>
           <p:nvPr/>
         </p:nvSpPr>
@@ -7447,7 +8127,7 @@
       </p:sp>
       <p:sp>
         <p:nvSpPr>
-          <p:cNvPr id="8" name="TextBox 7"/>
+          <p:cNvPr id="26" name="TextBox 25"/>
           <p:cNvSpPr txBox="1"/>
           <p:nvPr/>
         </p:nvSpPr>
@@ -7486,7 +8166,7 @@
       </p:sp>
       <p:cxnSp>
         <p:nvCxnSpPr>
-          <p:cNvPr id="9" name="Connector 8"/>
+          <p:cNvPr id="27" name="Connector 26"/>
           <p:cNvCxnSpPr/>
           <p:nvPr/>
         </p:nvCxnSpPr>
@@ -7608,7 +8288,7 @@
           <a:p>
             <a:pPr algn="l">
               <a:lnSpc>
-                <a:spcPct val="115000"/>
+                <a:spcPct val="105000"/>
               </a:lnSpc>
             </a:pPr>
             <a:r>
@@ -7618,7 +8298,7 @@
                 </a:solidFill>
                 <a:latin typeface="Helvetica Neue"/>
               </a:rPr>
-              <a:t>El Periodo y cómo termina</a:t>
+              <a:t>Publicidad de pago y seguimiento mensual</a:t>
             </a:r>
           </a:p>
         </p:txBody>
@@ -7660,774 +8340,114 @@
       </p:cxnSp>
       <p:sp>
         <p:nvSpPr>
-          <p:cNvPr id="5" name="Rectangle 4"/>
-          <p:cNvSpPr/>
-          <p:nvPr/>
-        </p:nvSpPr>
-        <p:spPr>
-          <a:xfrm>
-            <a:off x="685800" y="1920240"/>
-            <a:ext cx="10817352" cy="621792"/>
-          </a:xfrm>
-          <a:prstGeom prst="rect">
-            <a:avLst/>
-          </a:prstGeom>
-          <a:solidFill>
-            <a:srgbClr val="1D68C0"/>
-          </a:solidFill>
-          <a:ln>
-            <a:noFill/>
-          </a:ln>
-          <a:effectLst/>
-        </p:spPr>
-        <p:style>
-          <a:lnRef idx="1">
-            <a:schemeClr val="accent1"/>
-          </a:lnRef>
-          <a:fillRef idx="3">
-            <a:schemeClr val="accent1"/>
-          </a:fillRef>
-          <a:effectRef idx="2">
-            <a:schemeClr val="accent1"/>
-          </a:effectRef>
-          <a:fontRef idx="minor">
-            <a:schemeClr val="lt1"/>
-          </a:fontRef>
-        </p:style>
-        <p:txBody>
-          <a:bodyPr rtlCol="0" anchor="ctr"/>
-          <a:lstStyle/>
-          <a:p>
-            <a:pPr algn="ctr"/>
-          </a:p>
-        </p:txBody>
-      </p:sp>
-      <p:sp>
-        <p:nvSpPr>
-          <p:cNvPr id="6" name="TextBox 5"/>
-          <p:cNvSpPr txBox="1"/>
-          <p:nvPr/>
-        </p:nvSpPr>
-        <p:spPr>
-          <a:xfrm>
-            <a:off x="868680" y="2029968"/>
-            <a:ext cx="4846320" cy="621792"/>
-          </a:xfrm>
-          <a:prstGeom prst="rect">
-            <a:avLst/>
-          </a:prstGeom>
-          <a:noFill/>
-        </p:spPr>
-        <p:txBody>
-          <a:bodyPr wrap="square" anchor="t" lIns="0" rIns="0" tIns="0" bIns="0">
-            <a:spAutoFit/>
-          </a:bodyPr>
-          <a:lstStyle/>
-          <a:p>
-            <a:pPr algn="l">
-              <a:lnSpc>
-                <a:spcPct val="115000"/>
-              </a:lnSpc>
-            </a:pPr>
-            <a:r>
-              <a:rPr sz="1250" b="1">
+          <p:cNvPr id="5" name="TextBox 4"/>
+          <p:cNvSpPr txBox="1"/>
+          <p:nvPr/>
+        </p:nvSpPr>
+        <p:spPr>
+          <a:xfrm>
+            <a:off x="685800" y="1965960"/>
+            <a:ext cx="10424160" cy="3931920"/>
+          </a:xfrm>
+          <a:prstGeom prst="rect">
+            <a:avLst/>
+          </a:prstGeom>
+          <a:noFill/>
+        </p:spPr>
+        <p:txBody>
+          <a:bodyPr wrap="square" lIns="0" rIns="0">
+            <a:spAutoFit/>
+          </a:bodyPr>
+          <a:lstStyle/>
+          <a:p>
+            <a:pPr>
+              <a:lnSpc>
+                <a:spcPct val="125000"/>
+              </a:lnSpc>
+              <a:spcAft>
+                <a:spcPts val="1000"/>
+              </a:spcAft>
+            </a:pPr>
+            <a:r>
+              <a:rPr sz="1550" b="1">
+                <a:solidFill>
+                  <a:srgbClr val="4E9BF0"/>
+                </a:solidFill>
+                <a:latin typeface="Helvetica Neue"/>
+              </a:rPr>
+              <a:t>—  </a:t>
+            </a:r>
+            <a:r>
+              <a:rPr sz="1550">
                 <a:solidFill>
                   <a:srgbClr val="FFFFFF"/>
                 </a:solidFill>
                 <a:latin typeface="Helvetica Neue"/>
               </a:rPr>
-              <a:t>Elemento</a:t>
-            </a:r>
-          </a:p>
-        </p:txBody>
-      </p:sp>
-      <p:sp>
-        <p:nvSpPr>
-          <p:cNvPr id="7" name="TextBox 6"/>
-          <p:cNvSpPr txBox="1"/>
-          <p:nvPr/>
-        </p:nvSpPr>
-        <p:spPr>
-          <a:xfrm>
-            <a:off x="5989320" y="2029968"/>
-            <a:ext cx="5422392" cy="621792"/>
-          </a:xfrm>
-          <a:prstGeom prst="rect">
-            <a:avLst/>
-          </a:prstGeom>
-          <a:noFill/>
-        </p:spPr>
-        <p:txBody>
-          <a:bodyPr wrap="square" anchor="t" lIns="0" rIns="0" tIns="0" bIns="0">
-            <a:spAutoFit/>
-          </a:bodyPr>
-          <a:lstStyle/>
-          <a:p>
-            <a:pPr algn="l">
-              <a:lnSpc>
-                <a:spcPct val="115000"/>
-              </a:lnSpc>
-            </a:pPr>
-            <a:r>
-              <a:rPr sz="1250" b="1">
+              <a:t>Si tiene sentido usar anuncios de pago o publicaciones impulsadas, Joshua financia y confirma el presupuesto por escrito antes de gastar nada: nunca comprometes el dinero de Zebraish sin su aprobación.</a:t>
+            </a:r>
+          </a:p>
+          <a:p>
+            <a:pPr>
+              <a:lnSpc>
+                <a:spcPct val="125000"/>
+              </a:lnSpc>
+              <a:spcAft>
+                <a:spcPts val="1000"/>
+              </a:spcAft>
+            </a:pPr>
+            <a:r>
+              <a:rPr sz="1550" b="1">
+                <a:solidFill>
+                  <a:srgbClr val="4E9BF0"/>
+                </a:solidFill>
+                <a:latin typeface="Helvetica Neue"/>
+              </a:rPr>
+              <a:t>—  </a:t>
+            </a:r>
+            <a:r>
+              <a:rPr sz="1550">
                 <a:solidFill>
                   <a:srgbClr val="FFFFFF"/>
                 </a:solidFill>
                 <a:latin typeface="Helvetica Neue"/>
               </a:rPr>
-              <a:t>Detalle</a:t>
-            </a:r>
-          </a:p>
-        </p:txBody>
-      </p:sp>
-      <p:sp>
-        <p:nvSpPr>
-          <p:cNvPr id="8" name="Rectangle 7"/>
-          <p:cNvSpPr/>
-          <p:nvPr/>
-        </p:nvSpPr>
-        <p:spPr>
-          <a:xfrm>
-            <a:off x="685800" y="2542032"/>
-            <a:ext cx="10817352" cy="621792"/>
-          </a:xfrm>
-          <a:prstGeom prst="rect">
-            <a:avLst/>
-          </a:prstGeom>
-          <a:solidFill>
-            <a:srgbClr val="141720"/>
-          </a:solidFill>
-          <a:ln>
-            <a:noFill/>
-          </a:ln>
-          <a:effectLst/>
-        </p:spPr>
-        <p:style>
-          <a:lnRef idx="1">
-            <a:schemeClr val="accent1"/>
-          </a:lnRef>
-          <a:fillRef idx="3">
-            <a:schemeClr val="accent1"/>
-          </a:fillRef>
-          <a:effectRef idx="2">
-            <a:schemeClr val="accent1"/>
-          </a:effectRef>
-          <a:fontRef idx="minor">
-            <a:schemeClr val="lt1"/>
-          </a:fontRef>
-        </p:style>
-        <p:txBody>
-          <a:bodyPr rtlCol="0" anchor="ctr"/>
-          <a:lstStyle/>
-          <a:p>
-            <a:pPr algn="ctr"/>
-          </a:p>
-        </p:txBody>
-      </p:sp>
-      <p:sp>
-        <p:nvSpPr>
-          <p:cNvPr id="9" name="TextBox 8"/>
-          <p:cNvSpPr txBox="1"/>
-          <p:nvPr/>
-        </p:nvSpPr>
-        <p:spPr>
-          <a:xfrm>
-            <a:off x="868680" y="2633472"/>
-            <a:ext cx="4846320" cy="621792"/>
-          </a:xfrm>
-          <a:prstGeom prst="rect">
-            <a:avLst/>
-          </a:prstGeom>
-          <a:noFill/>
-        </p:spPr>
-        <p:txBody>
-          <a:bodyPr wrap="square" anchor="t" lIns="0" rIns="0" tIns="0" bIns="0">
-            <a:spAutoFit/>
-          </a:bodyPr>
-          <a:lstStyle/>
-          <a:p>
-            <a:pPr algn="l">
-              <a:lnSpc>
-                <a:spcPct val="115000"/>
-              </a:lnSpc>
-            </a:pPr>
-            <a:r>
-              <a:rPr sz="1300" b="1">
+              <a:t>Una vez al mes, una revisión rápida: contenido entregado, presentaciones de clientes, comisión, y cualquier ajuste que valga la pena.</a:t>
+            </a:r>
+          </a:p>
+          <a:p>
+            <a:pPr>
+              <a:lnSpc>
+                <a:spcPct val="125000"/>
+              </a:lnSpc>
+              <a:spcAft>
+                <a:spcPts val="1000"/>
+              </a:spcAft>
+            </a:pPr>
+            <a:r>
+              <a:rPr sz="1550" b="1">
+                <a:solidFill>
+                  <a:srgbClr val="4E9BF0"/>
+                </a:solidFill>
+                <a:latin typeface="Helvetica Neue"/>
+              </a:rPr>
+              <a:t>—  </a:t>
+            </a:r>
+            <a:r>
+              <a:rPr sz="1550">
                 <a:solidFill>
                   <a:srgbClr val="FFFFFF"/>
                 </a:solidFill>
                 <a:latin typeface="Helvetica Neue"/>
               </a:rPr>
-              <a:t>Periodo Inicial</a:t>
-            </a:r>
-          </a:p>
-        </p:txBody>
-      </p:sp>
-      <p:sp>
-        <p:nvSpPr>
-          <p:cNvPr id="10" name="TextBox 9"/>
-          <p:cNvSpPr txBox="1"/>
-          <p:nvPr/>
-        </p:nvSpPr>
-        <p:spPr>
-          <a:xfrm>
-            <a:off x="5989320" y="2633472"/>
-            <a:ext cx="5422392" cy="621792"/>
-          </a:xfrm>
-          <a:prstGeom prst="rect">
-            <a:avLst/>
-          </a:prstGeom>
-          <a:noFill/>
-        </p:spPr>
-        <p:txBody>
-          <a:bodyPr wrap="square" anchor="t" lIns="0" rIns="0" tIns="0" bIns="0">
-            <a:spAutoFit/>
-          </a:bodyPr>
-          <a:lstStyle/>
-          <a:p>
-            <a:pPr algn="l">
-              <a:lnSpc>
-                <a:spcPct val="115000"/>
-              </a:lnSpc>
-            </a:pPr>
-            <a:r>
-              <a:rPr sz="1300" b="0">
-                <a:solidFill>
-                  <a:srgbClr val="A6ACBA"/>
-                </a:solidFill>
-                <a:latin typeface="Helvetica Neue"/>
-              </a:rPr>
-              <a:t>3 meses desde la fecha de la última firma</a:t>
-            </a:r>
-          </a:p>
-        </p:txBody>
-      </p:sp>
-      <p:sp>
-        <p:nvSpPr>
-          <p:cNvPr id="11" name="Rectangle 10"/>
-          <p:cNvSpPr/>
-          <p:nvPr/>
-        </p:nvSpPr>
-        <p:spPr>
-          <a:xfrm>
-            <a:off x="685800" y="3163824"/>
-            <a:ext cx="10817352" cy="621792"/>
-          </a:xfrm>
-          <a:prstGeom prst="rect">
-            <a:avLst/>
-          </a:prstGeom>
-          <a:solidFill>
-            <a:srgbClr val="0B0D12"/>
-          </a:solidFill>
-          <a:ln>
-            <a:noFill/>
-          </a:ln>
-          <a:effectLst/>
-        </p:spPr>
-        <p:style>
-          <a:lnRef idx="1">
-            <a:schemeClr val="accent1"/>
-          </a:lnRef>
-          <a:fillRef idx="3">
-            <a:schemeClr val="accent1"/>
-          </a:fillRef>
-          <a:effectRef idx="2">
-            <a:schemeClr val="accent1"/>
-          </a:effectRef>
-          <a:fontRef idx="minor">
-            <a:schemeClr val="lt1"/>
-          </a:fontRef>
-        </p:style>
-        <p:txBody>
-          <a:bodyPr rtlCol="0" anchor="ctr"/>
-          <a:lstStyle/>
-          <a:p>
-            <a:pPr algn="ctr"/>
-          </a:p>
-        </p:txBody>
-      </p:sp>
-      <p:sp>
-        <p:nvSpPr>
-          <p:cNvPr id="12" name="TextBox 11"/>
-          <p:cNvSpPr txBox="1"/>
-          <p:nvPr/>
-        </p:nvSpPr>
-        <p:spPr>
-          <a:xfrm>
-            <a:off x="868680" y="3255264"/>
-            <a:ext cx="4846320" cy="621792"/>
-          </a:xfrm>
-          <a:prstGeom prst="rect">
-            <a:avLst/>
-          </a:prstGeom>
-          <a:noFill/>
-        </p:spPr>
-        <p:txBody>
-          <a:bodyPr wrap="square" anchor="t" lIns="0" rIns="0" tIns="0" bIns="0">
-            <a:spAutoFit/>
-          </a:bodyPr>
-          <a:lstStyle/>
-          <a:p>
-            <a:pPr algn="l">
-              <a:lnSpc>
-                <a:spcPct val="115000"/>
-              </a:lnSpc>
-            </a:pPr>
-            <a:r>
-              <a:rPr sz="1300" b="1">
-                <a:solidFill>
-                  <a:srgbClr val="FFFFFF"/>
-                </a:solidFill>
-                <a:latin typeface="Helvetica Neue"/>
-              </a:rPr>
-              <a:t>Renovación</a:t>
-            </a:r>
-          </a:p>
-        </p:txBody>
-      </p:sp>
-      <p:sp>
-        <p:nvSpPr>
-          <p:cNvPr id="13" name="TextBox 12"/>
-          <p:cNvSpPr txBox="1"/>
-          <p:nvPr/>
-        </p:nvSpPr>
-        <p:spPr>
-          <a:xfrm>
-            <a:off x="5989320" y="3255264"/>
-            <a:ext cx="5422392" cy="621792"/>
-          </a:xfrm>
-          <a:prstGeom prst="rect">
-            <a:avLst/>
-          </a:prstGeom>
-          <a:noFill/>
-        </p:spPr>
-        <p:txBody>
-          <a:bodyPr wrap="square" anchor="t" lIns="0" rIns="0" tIns="0" bIns="0">
-            <a:spAutoFit/>
-          </a:bodyPr>
-          <a:lstStyle/>
-          <a:p>
-            <a:pPr algn="l">
-              <a:lnSpc>
-                <a:spcPct val="115000"/>
-              </a:lnSpc>
-            </a:pPr>
-            <a:r>
-              <a:rPr sz="1300" b="0">
-                <a:solidFill>
-                  <a:srgbClr val="A6ACBA"/>
-                </a:solidFill>
-                <a:latin typeface="Helvetica Neue"/>
-              </a:rPr>
-              <a:t>Solo mediante acuerdo escrito mutuo; de lo contrario termina automáticamente</a:t>
-            </a:r>
-          </a:p>
-        </p:txBody>
-      </p:sp>
-      <p:sp>
-        <p:nvSpPr>
-          <p:cNvPr id="14" name="Rectangle 13"/>
-          <p:cNvSpPr/>
-          <p:nvPr/>
-        </p:nvSpPr>
-        <p:spPr>
-          <a:xfrm>
-            <a:off x="685800" y="3785616"/>
-            <a:ext cx="10817352" cy="621792"/>
-          </a:xfrm>
-          <a:prstGeom prst="rect">
-            <a:avLst/>
-          </a:prstGeom>
-          <a:solidFill>
-            <a:srgbClr val="141720"/>
-          </a:solidFill>
-          <a:ln>
-            <a:noFill/>
-          </a:ln>
-          <a:effectLst/>
-        </p:spPr>
-        <p:style>
-          <a:lnRef idx="1">
-            <a:schemeClr val="accent1"/>
-          </a:lnRef>
-          <a:fillRef idx="3">
-            <a:schemeClr val="accent1"/>
-          </a:fillRef>
-          <a:effectRef idx="2">
-            <a:schemeClr val="accent1"/>
-          </a:effectRef>
-          <a:fontRef idx="minor">
-            <a:schemeClr val="lt1"/>
-          </a:fontRef>
-        </p:style>
-        <p:txBody>
-          <a:bodyPr rtlCol="0" anchor="ctr"/>
-          <a:lstStyle/>
-          <a:p>
-            <a:pPr algn="ctr"/>
-          </a:p>
-        </p:txBody>
-      </p:sp>
-      <p:sp>
-        <p:nvSpPr>
-          <p:cNvPr id="15" name="TextBox 14"/>
-          <p:cNvSpPr txBox="1"/>
-          <p:nvPr/>
-        </p:nvSpPr>
-        <p:spPr>
-          <a:xfrm>
-            <a:off x="868680" y="3877056"/>
-            <a:ext cx="4846320" cy="621792"/>
-          </a:xfrm>
-          <a:prstGeom prst="rect">
-            <a:avLst/>
-          </a:prstGeom>
-          <a:noFill/>
-        </p:spPr>
-        <p:txBody>
-          <a:bodyPr wrap="square" anchor="t" lIns="0" rIns="0" tIns="0" bIns="0">
-            <a:spAutoFit/>
-          </a:bodyPr>
-          <a:lstStyle/>
-          <a:p>
-            <a:pPr algn="l">
-              <a:lnSpc>
-                <a:spcPct val="115000"/>
-              </a:lnSpc>
-            </a:pPr>
-            <a:r>
-              <a:rPr sz="1300" b="1">
-                <a:solidFill>
-                  <a:srgbClr val="FFFFFF"/>
-                </a:solidFill>
-                <a:latin typeface="Helvetica Neue"/>
-              </a:rPr>
-              <a:t>Terminación por conveniencia</a:t>
-            </a:r>
-          </a:p>
-        </p:txBody>
-      </p:sp>
-      <p:sp>
-        <p:nvSpPr>
-          <p:cNvPr id="16" name="TextBox 15"/>
-          <p:cNvSpPr txBox="1"/>
-          <p:nvPr/>
-        </p:nvSpPr>
-        <p:spPr>
-          <a:xfrm>
-            <a:off x="5989320" y="3877056"/>
-            <a:ext cx="5422392" cy="621792"/>
-          </a:xfrm>
-          <a:prstGeom prst="rect">
-            <a:avLst/>
-          </a:prstGeom>
-          <a:noFill/>
-        </p:spPr>
-        <p:txBody>
-          <a:bodyPr wrap="square" anchor="t" lIns="0" rIns="0" tIns="0" bIns="0">
-            <a:spAutoFit/>
-          </a:bodyPr>
-          <a:lstStyle/>
-          <a:p>
-            <a:pPr algn="l">
-              <a:lnSpc>
-                <a:spcPct val="115000"/>
-              </a:lnSpc>
-            </a:pPr>
-            <a:r>
-              <a:rPr sz="1300" b="0">
-                <a:solidFill>
-                  <a:srgbClr val="A6ACBA"/>
-                </a:solidFill>
-                <a:latin typeface="Helvetica Neue"/>
-              </a:rPr>
-              <a:t>14 días de notificación escrita, cualquiera de las partes</a:t>
-            </a:r>
-          </a:p>
-        </p:txBody>
-      </p:sp>
-      <p:sp>
-        <p:nvSpPr>
-          <p:cNvPr id="17" name="Rectangle 16"/>
-          <p:cNvSpPr/>
-          <p:nvPr/>
-        </p:nvSpPr>
-        <p:spPr>
-          <a:xfrm>
-            <a:off x="685800" y="4407408"/>
-            <a:ext cx="10817352" cy="621792"/>
-          </a:xfrm>
-          <a:prstGeom prst="rect">
-            <a:avLst/>
-          </a:prstGeom>
-          <a:solidFill>
-            <a:srgbClr val="0B0D12"/>
-          </a:solidFill>
-          <a:ln>
-            <a:noFill/>
-          </a:ln>
-          <a:effectLst/>
-        </p:spPr>
-        <p:style>
-          <a:lnRef idx="1">
-            <a:schemeClr val="accent1"/>
-          </a:lnRef>
-          <a:fillRef idx="3">
-            <a:schemeClr val="accent1"/>
-          </a:fillRef>
-          <a:effectRef idx="2">
-            <a:schemeClr val="accent1"/>
-          </a:effectRef>
-          <a:fontRef idx="minor">
-            <a:schemeClr val="lt1"/>
-          </a:fontRef>
-        </p:style>
-        <p:txBody>
-          <a:bodyPr rtlCol="0" anchor="ctr"/>
-          <a:lstStyle/>
-          <a:p>
-            <a:pPr algn="ctr"/>
-          </a:p>
-        </p:txBody>
-      </p:sp>
-      <p:sp>
-        <p:nvSpPr>
-          <p:cNvPr id="18" name="TextBox 17"/>
-          <p:cNvSpPr txBox="1"/>
-          <p:nvPr/>
-        </p:nvSpPr>
-        <p:spPr>
-          <a:xfrm>
-            <a:off x="868680" y="4498848"/>
-            <a:ext cx="4846320" cy="621792"/>
-          </a:xfrm>
-          <a:prstGeom prst="rect">
-            <a:avLst/>
-          </a:prstGeom>
-          <a:noFill/>
-        </p:spPr>
-        <p:txBody>
-          <a:bodyPr wrap="square" anchor="t" lIns="0" rIns="0" tIns="0" bIns="0">
-            <a:spAutoFit/>
-          </a:bodyPr>
-          <a:lstStyle/>
-          <a:p>
-            <a:pPr algn="l">
-              <a:lnSpc>
-                <a:spcPct val="115000"/>
-              </a:lnSpc>
-            </a:pPr>
-            <a:r>
-              <a:rPr sz="1300" b="1">
-                <a:solidFill>
-                  <a:srgbClr val="FFFFFF"/>
-                </a:solidFill>
-                <a:latin typeface="Helvetica Neue"/>
-              </a:rPr>
-              <a:t>Terminación inmediata</a:t>
-            </a:r>
-          </a:p>
-        </p:txBody>
-      </p:sp>
-      <p:sp>
-        <p:nvSpPr>
-          <p:cNvPr id="19" name="TextBox 18"/>
-          <p:cNvSpPr txBox="1"/>
-          <p:nvPr/>
-        </p:nvSpPr>
-        <p:spPr>
-          <a:xfrm>
-            <a:off x="5989320" y="4498848"/>
-            <a:ext cx="5422392" cy="621792"/>
-          </a:xfrm>
-          <a:prstGeom prst="rect">
-            <a:avLst/>
-          </a:prstGeom>
-          <a:noFill/>
-        </p:spPr>
-        <p:txBody>
-          <a:bodyPr wrap="square" anchor="t" lIns="0" rIns="0" tIns="0" bIns="0">
-            <a:spAutoFit/>
-          </a:bodyPr>
-          <a:lstStyle/>
-          <a:p>
-            <a:pPr algn="l">
-              <a:lnSpc>
-                <a:spcPct val="115000"/>
-              </a:lnSpc>
-            </a:pPr>
-            <a:r>
-              <a:rPr sz="1300" b="0">
-                <a:solidFill>
-                  <a:srgbClr val="A6ACBA"/>
-                </a:solidFill>
-                <a:latin typeface="Helvetica Neue"/>
-              </a:rPr>
-              <a:t>Por falta grave, fraude o un incumplimiento no subsanado</a:t>
-            </a:r>
-          </a:p>
-        </p:txBody>
-      </p:sp>
-      <p:sp>
-        <p:nvSpPr>
-          <p:cNvPr id="20" name="Rectangle 19"/>
-          <p:cNvSpPr/>
-          <p:nvPr/>
-        </p:nvSpPr>
-        <p:spPr>
-          <a:xfrm>
-            <a:off x="685800" y="5029200"/>
-            <a:ext cx="10817352" cy="621792"/>
-          </a:xfrm>
-          <a:prstGeom prst="rect">
-            <a:avLst/>
-          </a:prstGeom>
-          <a:solidFill>
-            <a:srgbClr val="141720"/>
-          </a:solidFill>
-          <a:ln>
-            <a:noFill/>
-          </a:ln>
-          <a:effectLst/>
-        </p:spPr>
-        <p:style>
-          <a:lnRef idx="1">
-            <a:schemeClr val="accent1"/>
-          </a:lnRef>
-          <a:fillRef idx="3">
-            <a:schemeClr val="accent1"/>
-          </a:fillRef>
-          <a:effectRef idx="2">
-            <a:schemeClr val="accent1"/>
-          </a:effectRef>
-          <a:fontRef idx="minor">
-            <a:schemeClr val="lt1"/>
-          </a:fontRef>
-        </p:style>
-        <p:txBody>
-          <a:bodyPr rtlCol="0" anchor="ctr"/>
-          <a:lstStyle/>
-          <a:p>
-            <a:pPr algn="ctr"/>
-          </a:p>
-        </p:txBody>
-      </p:sp>
-      <p:sp>
-        <p:nvSpPr>
-          <p:cNvPr id="21" name="TextBox 20"/>
-          <p:cNvSpPr txBox="1"/>
-          <p:nvPr/>
-        </p:nvSpPr>
-        <p:spPr>
-          <a:xfrm>
-            <a:off x="868680" y="5120640"/>
-            <a:ext cx="4846320" cy="621792"/>
-          </a:xfrm>
-          <a:prstGeom prst="rect">
-            <a:avLst/>
-          </a:prstGeom>
-          <a:noFill/>
-        </p:spPr>
-        <p:txBody>
-          <a:bodyPr wrap="square" anchor="t" lIns="0" rIns="0" tIns="0" bIns="0">
-            <a:spAutoFit/>
-          </a:bodyPr>
-          <a:lstStyle/>
-          <a:p>
-            <a:pPr algn="l">
-              <a:lnSpc>
-                <a:spcPct val="115000"/>
-              </a:lnSpc>
-            </a:pPr>
-            <a:r>
-              <a:rPr sz="1300" b="1">
-                <a:solidFill>
-                  <a:srgbClr val="FFFFFF"/>
-                </a:solidFill>
-                <a:latin typeface="Helvetica Neue"/>
-              </a:rPr>
-              <a:t>Tras la terminación</a:t>
-            </a:r>
-          </a:p>
-        </p:txBody>
-      </p:sp>
-      <p:sp>
-        <p:nvSpPr>
-          <p:cNvPr id="22" name="TextBox 21"/>
-          <p:cNvSpPr txBox="1"/>
-          <p:nvPr/>
-        </p:nvSpPr>
-        <p:spPr>
-          <a:xfrm>
-            <a:off x="5989320" y="5120640"/>
-            <a:ext cx="5422392" cy="621792"/>
-          </a:xfrm>
-          <a:prstGeom prst="rect">
-            <a:avLst/>
-          </a:prstGeom>
-          <a:noFill/>
-        </p:spPr>
-        <p:txBody>
-          <a:bodyPr wrap="square" anchor="t" lIns="0" rIns="0" tIns="0" bIns="0">
-            <a:spAutoFit/>
-          </a:bodyPr>
-          <a:lstStyle/>
-          <a:p>
-            <a:pPr algn="l">
-              <a:lnSpc>
-                <a:spcPct val="115000"/>
-              </a:lnSpc>
-            </a:pPr>
-            <a:r>
-              <a:rPr sz="1300" b="0">
-                <a:solidFill>
-                  <a:srgbClr val="A6ACBA"/>
-                </a:solidFill>
-                <a:latin typeface="Helvetica Neue"/>
-              </a:rPr>
-              <a:t>La comisión ya generada sobre pagos elegibles sigue siendo pagadera</a:t>
-            </a:r>
-          </a:p>
-        </p:txBody>
-      </p:sp>
-      <p:cxnSp>
-        <p:nvCxnSpPr>
-          <p:cNvPr id="23" name="Connector 22"/>
-          <p:cNvCxnSpPr/>
-          <p:nvPr/>
-        </p:nvCxnSpPr>
-        <p:spPr>
-          <a:xfrm>
-            <a:off x="685800" y="1920240"/>
-            <a:ext cx="10817352" cy="0"/>
-          </a:xfrm>
-          <a:prstGeom prst="line">
-            <a:avLst/>
-          </a:prstGeom>
-          <a:ln w="12700">
-            <a:solidFill>
-              <a:srgbClr val="2A2E3A"/>
-            </a:solidFill>
-          </a:ln>
-        </p:spPr>
-        <p:style>
-          <a:lnRef idx="2">
-            <a:schemeClr val="accent1"/>
-          </a:lnRef>
-          <a:fillRef idx="0">
-            <a:schemeClr val="accent1"/>
-          </a:fillRef>
-          <a:effectRef idx="1">
-            <a:schemeClr val="accent1"/>
-          </a:effectRef>
-          <a:fontRef idx="minor">
-            <a:schemeClr val="tx1"/>
-          </a:fontRef>
-        </p:style>
-      </p:cxnSp>
+              <a:t>Informal, sin fricción: una llamada o un mensaje bastan. Mantiene a ambas partes alineadas sin necesidad de tocar el Acuerdo en sí.</a:t>
+            </a:r>
+          </a:p>
+        </p:txBody>
+      </p:sp>
       <p:pic>
         <p:nvPicPr>
-          <p:cNvPr id="24" name="Picture 23" descr="logo-head.png"/>
+          <p:cNvPr id="6" name="Picture 5" descr="logo-head.png"/>
           <p:cNvPicPr>
             <a:picLocks noChangeAspect="1"/>
           </p:cNvPicPr>
@@ -8451,7 +8471,7 @@
       </p:pic>
       <p:sp>
         <p:nvSpPr>
-          <p:cNvPr id="25" name="TextBox 24"/>
+          <p:cNvPr id="7" name="TextBox 6"/>
           <p:cNvSpPr txBox="1"/>
           <p:nvPr/>
         </p:nvSpPr>
@@ -8490,7 +8510,7 @@
       </p:sp>
       <p:sp>
         <p:nvSpPr>
-          <p:cNvPr id="26" name="TextBox 25"/>
+          <p:cNvPr id="8" name="TextBox 7"/>
           <p:cNvSpPr txBox="1"/>
           <p:nvPr/>
         </p:nvSpPr>
@@ -8529,7 +8549,7 @@
       </p:sp>
       <p:cxnSp>
         <p:nvCxnSpPr>
-          <p:cNvPr id="27" name="Connector 26"/>
+          <p:cNvPr id="9" name="Connector 8"/>
           <p:cNvCxnSpPr/>
           <p:nvPr/>
         </p:nvCxnSpPr>
@@ -8636,7 +8656,7 @@
         <p:spPr>
           <a:xfrm>
             <a:off x="685800" y="868680"/>
-            <a:ext cx="10515600" cy="914400"/>
+            <a:ext cx="10515600" cy="640080"/>
           </a:xfrm>
           <a:prstGeom prst="rect">
             <a:avLst/>
@@ -8651,7 +8671,7 @@
           <a:p>
             <a:pPr algn="l">
               <a:lnSpc>
-                <a:spcPct val="105000"/>
+                <a:spcPct val="115000"/>
               </a:lnSpc>
             </a:pPr>
             <a:r>
@@ -8661,156 +8681,14 @@
                 </a:solidFill>
                 <a:latin typeface="Helvetica Neue"/>
               </a:rPr>
-              <a:t>Publicidad de pago y seguimiento mensual</a:t>
-            </a:r>
-          </a:p>
-        </p:txBody>
-      </p:sp>
-      <p:cxnSp>
-        <p:nvCxnSpPr>
-          <p:cNvPr id="4" name="Connector 3"/>
-          <p:cNvCxnSpPr/>
-          <p:nvPr/>
-        </p:nvCxnSpPr>
-        <p:spPr>
-          <a:xfrm>
-            <a:off x="685800" y="1691640"/>
-            <a:ext cx="10817352" cy="0"/>
-          </a:xfrm>
-          <a:prstGeom prst="line">
-            <a:avLst/>
-          </a:prstGeom>
-          <a:ln w="12700">
-            <a:solidFill>
-              <a:srgbClr val="2A2E3A"/>
-            </a:solidFill>
-          </a:ln>
-        </p:spPr>
-        <p:style>
-          <a:lnRef idx="2">
-            <a:schemeClr val="accent1"/>
-          </a:lnRef>
-          <a:fillRef idx="0">
-            <a:schemeClr val="accent1"/>
-          </a:fillRef>
-          <a:effectRef idx="1">
-            <a:schemeClr val="accent1"/>
-          </a:effectRef>
-          <a:fontRef idx="minor">
-            <a:schemeClr val="tx1"/>
-          </a:fontRef>
-        </p:style>
-      </p:cxnSp>
-      <p:sp>
-        <p:nvSpPr>
-          <p:cNvPr id="5" name="TextBox 4"/>
-          <p:cNvSpPr txBox="1"/>
-          <p:nvPr/>
-        </p:nvSpPr>
-        <p:spPr>
-          <a:xfrm>
-            <a:off x="685800" y="1965960"/>
-            <a:ext cx="10424160" cy="3931920"/>
-          </a:xfrm>
-          <a:prstGeom prst="rect">
-            <a:avLst/>
-          </a:prstGeom>
-          <a:noFill/>
-        </p:spPr>
-        <p:txBody>
-          <a:bodyPr wrap="square" lIns="0" rIns="0">
-            <a:spAutoFit/>
-          </a:bodyPr>
-          <a:lstStyle/>
-          <a:p>
-            <a:pPr>
-              <a:lnSpc>
-                <a:spcPct val="125000"/>
-              </a:lnSpc>
-              <a:spcAft>
-                <a:spcPts val="1000"/>
-              </a:spcAft>
-            </a:pPr>
-            <a:r>
-              <a:rPr sz="1550" b="1">
-                <a:solidFill>
-                  <a:srgbClr val="4E9BF0"/>
-                </a:solidFill>
-                <a:latin typeface="Helvetica Neue"/>
-              </a:rPr>
-              <a:t>—  </a:t>
-            </a:r>
-            <a:r>
-              <a:rPr sz="1550">
-                <a:solidFill>
-                  <a:srgbClr val="FFFFFF"/>
-                </a:solidFill>
-                <a:latin typeface="Helvetica Neue"/>
-              </a:rPr>
-              <a:t>Si tiene sentido usar anuncios de pago o publicaciones impulsadas, Joshua financia y confirma el presupuesto por escrito antes de gastar nada: nunca comprometes el dinero de Zebraish sin su aprobación.</a:t>
-            </a:r>
-          </a:p>
-          <a:p>
-            <a:pPr>
-              <a:lnSpc>
-                <a:spcPct val="125000"/>
-              </a:lnSpc>
-              <a:spcAft>
-                <a:spcPts val="1000"/>
-              </a:spcAft>
-            </a:pPr>
-            <a:r>
-              <a:rPr sz="1550" b="1">
-                <a:solidFill>
-                  <a:srgbClr val="4E9BF0"/>
-                </a:solidFill>
-                <a:latin typeface="Helvetica Neue"/>
-              </a:rPr>
-              <a:t>—  </a:t>
-            </a:r>
-            <a:r>
-              <a:rPr sz="1550">
-                <a:solidFill>
-                  <a:srgbClr val="FFFFFF"/>
-                </a:solidFill>
-                <a:latin typeface="Helvetica Neue"/>
-              </a:rPr>
-              <a:t>Una vez al mes, una revisión rápida: contenido entregado, presentaciones de clientes, comisión, y cualquier ajuste que valga la pena.</a:t>
-            </a:r>
-          </a:p>
-          <a:p>
-            <a:pPr>
-              <a:lnSpc>
-                <a:spcPct val="125000"/>
-              </a:lnSpc>
-              <a:spcAft>
-                <a:spcPts val="1000"/>
-              </a:spcAft>
-            </a:pPr>
-            <a:r>
-              <a:rPr sz="1550" b="1">
-                <a:solidFill>
-                  <a:srgbClr val="4E9BF0"/>
-                </a:solidFill>
-                <a:latin typeface="Helvetica Neue"/>
-              </a:rPr>
-              <a:t>—  </a:t>
-            </a:r>
-            <a:r>
-              <a:rPr sz="1550">
-                <a:solidFill>
-                  <a:srgbClr val="FFFFFF"/>
-                </a:solidFill>
-                <a:latin typeface="Helvetica Neue"/>
-              </a:rPr>
-              <a:t>Informal, sin fricción: una llamada o un mensaje bastan. Mantiene a ambas partes alineadas sin necesidad de tocar el Acuerdo en sí.</a:t>
+              <a:t>Lo que llega: Fashion</a:t>
             </a:r>
           </a:p>
         </p:txBody>
       </p:sp>
       <p:pic>
         <p:nvPicPr>
-          <p:cNvPr id="6" name="Picture 5" descr="logo-head.png"/>
+          <p:cNvPr id="4" name="Picture 3" descr="fash1.jpg"/>
           <p:cNvPicPr>
             <a:picLocks noChangeAspect="1"/>
           </p:cNvPicPr>
@@ -8824,6 +8702,117 @@
         </p:blipFill>
         <p:spPr>
           <a:xfrm>
+            <a:off x="685800" y="1691640"/>
+            <a:ext cx="3496056" cy="3794760"/>
+          </a:xfrm>
+          <a:prstGeom prst="rect">
+            <a:avLst/>
+          </a:prstGeom>
+        </p:spPr>
+      </p:pic>
+      <p:pic>
+        <p:nvPicPr>
+          <p:cNvPr id="5" name="Picture 4" descr="fash2.jpg"/>
+          <p:cNvPicPr>
+            <a:picLocks noChangeAspect="1"/>
+          </p:cNvPicPr>
+          <p:nvPr/>
+        </p:nvPicPr>
+        <p:blipFill>
+          <a:blip r:embed="rId3"/>
+          <a:stretch>
+            <a:fillRect/>
+          </a:stretch>
+        </p:blipFill>
+        <p:spPr>
+          <a:xfrm>
+            <a:off x="4346448" y="1691640"/>
+            <a:ext cx="3496056" cy="3794760"/>
+          </a:xfrm>
+          <a:prstGeom prst="rect">
+            <a:avLst/>
+          </a:prstGeom>
+        </p:spPr>
+      </p:pic>
+      <p:pic>
+        <p:nvPicPr>
+          <p:cNvPr id="6" name="Picture 5" descr="fash3.jpg"/>
+          <p:cNvPicPr>
+            <a:picLocks noChangeAspect="1"/>
+          </p:cNvPicPr>
+          <p:nvPr/>
+        </p:nvPicPr>
+        <p:blipFill>
+          <a:blip r:embed="rId4"/>
+          <a:stretch>
+            <a:fillRect/>
+          </a:stretch>
+        </p:blipFill>
+        <p:spPr>
+          <a:xfrm>
+            <a:off x="8007096" y="1691640"/>
+            <a:ext cx="3496056" cy="3794760"/>
+          </a:xfrm>
+          <a:prstGeom prst="rect">
+            <a:avLst/>
+          </a:prstGeom>
+        </p:spPr>
+      </p:pic>
+      <p:sp>
+        <p:nvSpPr>
+          <p:cNvPr id="7" name="TextBox 6"/>
+          <p:cNvSpPr txBox="1"/>
+          <p:nvPr/>
+        </p:nvSpPr>
+        <p:spPr>
+          <a:xfrm>
+            <a:off x="685800" y="5623560"/>
+            <a:ext cx="10424160" cy="548640"/>
+          </a:xfrm>
+          <a:prstGeom prst="rect">
+            <a:avLst/>
+          </a:prstGeom>
+          <a:noFill/>
+        </p:spPr>
+        <p:txBody>
+          <a:bodyPr wrap="square" anchor="t" lIns="0" rIns="0" tIns="0" bIns="0">
+            <a:spAutoFit/>
+          </a:bodyPr>
+          <a:lstStyle/>
+          <a:p>
+            <a:pPr algn="l">
+              <a:lnSpc>
+                <a:spcPct val="130000"/>
+              </a:lnSpc>
+            </a:pPr>
+            <a:r>
+              <a:rPr sz="1250" b="0">
+                <a:solidFill>
+                  <a:srgbClr val="A6ACBA"/>
+                </a:solidFill>
+                <a:latin typeface="Helvetica Neue"/>
+              </a:rPr>
+              <a:t>Un adelanto, no el trabajo actual — referencias de estilismo para la línea de Fashion, que se lanza pronto. Patrones y texturas inspirados en animales, reinterpretados para una gama premium. Tu rol se amplía para incluir esto en cuanto esté disponible; por ahora, el foco es Zebraish Studio.</a:t>
+            </a:r>
+          </a:p>
+        </p:txBody>
+      </p:sp>
+      <p:pic>
+        <p:nvPicPr>
+          <p:cNvPr id="8" name="Picture 7" descr="logo-head.png"/>
+          <p:cNvPicPr>
+            <a:picLocks noChangeAspect="1"/>
+          </p:cNvPicPr>
+          <p:nvPr/>
+        </p:nvPicPr>
+        <p:blipFill>
+          <a:blip r:embed="rId5"/>
+          <a:stretch>
+            <a:fillRect/>
+          </a:stretch>
+        </p:blipFill>
+        <p:spPr>
+          <a:xfrm>
             <a:off x="685800" y="6382512"/>
             <a:ext cx="170028" cy="219456"/>
           </a:xfrm>
@@ -8834,7 +8823,7 @@
       </p:pic>
       <p:sp>
         <p:nvSpPr>
-          <p:cNvPr id="7" name="TextBox 6"/>
+          <p:cNvPr id="9" name="TextBox 8"/>
           <p:cNvSpPr txBox="1"/>
           <p:nvPr/>
         </p:nvSpPr>
@@ -8873,7 +8862,7 @@
       </p:sp>
       <p:sp>
         <p:nvSpPr>
-          <p:cNvPr id="8" name="TextBox 7"/>
+          <p:cNvPr id="10" name="TextBox 9"/>
           <p:cNvSpPr txBox="1"/>
           <p:nvPr/>
         </p:nvSpPr>
@@ -8912,7 +8901,7 @@
       </p:sp>
       <p:cxnSp>
         <p:nvCxnSpPr>
-          <p:cNvPr id="9" name="Connector 8"/>
+          <p:cNvPr id="11" name="Connector 10"/>
           <p:cNvCxnSpPr/>
           <p:nvPr/>
         </p:nvCxnSpPr>
@@ -10059,7 +10048,7 @@
                 </a:solidFill>
                 <a:latin typeface="Helvetica Neue"/>
               </a:rPr>
-              <a:t>Studio y The Board son donde ocurre el trabajo tecnológico y de producto: construir, prototipar y lanzar ideas.</a:t>
+              <a:t>Studio y The Board son donde ocurre el trabajo tecnológico y de producto: construir, prototipar y lanzar ideas. Esto es lo que está activo ahora mismo, y es con lo que Zebraish está arrancando.</a:t>
             </a:r>
           </a:p>
           <a:p>
@@ -10087,7 +10076,7 @@
                 </a:solidFill>
                 <a:latin typeface="Helvetica Neue"/>
               </a:rPr>
-              <a:t>Fashion es la expresión creativa de la misma marca: prendas y estilo construidos alrededor de una estética distintiva inspirada en el mundo animal.</a:t>
+              <a:t>Fashion es la expresión creativa de la misma marca: prendas y estilo construidos alrededor de una estética distintiva inspirada en el mundo animal. Llega pronto, pero la línea de producto todavía no es pública.</a:t>
             </a:r>
           </a:p>
           <a:p>
@@ -10356,7 +10345,7 @@
                 </a:solidFill>
                 <a:latin typeface="Helvetica Neue"/>
               </a:rPr>
-              <a:t>Dónde encajas: la vertical de Fashion</a:t>
+              <a:t>Por dónde empiezas: Zebraish Studio</a:t>
             </a:r>
           </a:p>
         </p:txBody>
@@ -10442,7 +10431,7 @@
                 </a:solidFill>
                 <a:latin typeface="Helvetica Neue"/>
               </a:rPr>
-              <a:t>Te incorporas como Colaborador Oficial de Zebraish en el lado de Fashion: la cara y la voz de esa vertical.</a:t>
+              <a:t>Te incorporas como Colaborador Oficial de Zebraish — y ahora mismo, tu trabajo es Studio: representarlo, generar reconocimiento para él y traer activamente clientes para él, porque eso es con lo que Zebraish está arrancando.</a:t>
             </a:r>
           </a:p>
           <a:p>
@@ -10470,7 +10459,7 @@
                 </a:solidFill>
                 <a:latin typeface="Helvetica Neue"/>
               </a:rPr>
-              <a:t>La dirección creativa parte del mundo animal: pieles, patrones y texturas, reinterpretados en una línea premium y utilizable.</a:t>
+              <a:t>No necesitas ser una persona de tecnología para hacerlo bien. Tu audiencia confía en ti — ese es el activo. Dirige a la gente hacia Zebraish Studio, explica qué hace en términos simples, y haz la presentación.</a:t>
             </a:r>
           </a:p>
           <a:p>
@@ -10498,7 +10487,7 @@
                 </a:solidFill>
                 <a:latin typeface="Helvetica Neue"/>
               </a:rPr>
-              <a:t>Tu rol combina modelo, influencer y socio de marca: representas la estética públicamente y ayudas a traer a las personas que realmente van a comprarla.</a:t>
+              <a:t>Fashion se suma a tu rol en cuanto la línea de ropa se lance, algo que llega pronto. Cuando eso ocurra, probablemente encaje aún más contigo — pero el trabajo empieza con Studio.</a:t>
             </a:r>
           </a:p>
         </p:txBody>
@@ -10654,7 +10643,7 @@
     <p:bg>
       <p:bgPr>
         <a:solidFill>
-          <a:srgbClr val="0B0D12"/>
+          <a:srgbClr val="141720"/>
         </a:solidFill>
         <a:effectLst/>
       </p:bgPr>
@@ -10668,13 +10657,96 @@
       <p:grpSpPr/>
       <p:sp>
         <p:nvSpPr>
-          <p:cNvPr id="2" name="TextBox 1"/>
-          <p:cNvSpPr txBox="1"/>
-          <p:nvPr/>
-        </p:nvSpPr>
-        <p:spPr>
-          <a:xfrm>
-            <a:off x="685800" y="502920"/>
+          <p:cNvPr id="2" name="Rectangle 1"/>
+          <p:cNvSpPr/>
+          <p:nvPr/>
+        </p:nvSpPr>
+        <p:spPr>
+          <a:xfrm>
+            <a:off x="0" y="0"/>
+            <a:ext cx="164592" cy="6858000"/>
+          </a:xfrm>
+          <a:prstGeom prst="rect">
+            <a:avLst/>
+          </a:prstGeom>
+          <a:solidFill>
+            <a:srgbClr val="1D68C0"/>
+          </a:solidFill>
+          <a:ln>
+            <a:noFill/>
+          </a:ln>
+          <a:effectLst/>
+        </p:spPr>
+        <p:style>
+          <a:lnRef idx="1">
+            <a:schemeClr val="accent1"/>
+          </a:lnRef>
+          <a:fillRef idx="3">
+            <a:schemeClr val="accent1"/>
+          </a:fillRef>
+          <a:effectRef idx="2">
+            <a:schemeClr val="accent1"/>
+          </a:effectRef>
+          <a:fontRef idx="minor">
+            <a:schemeClr val="lt1"/>
+          </a:fontRef>
+        </p:style>
+        <p:txBody>
+          <a:bodyPr rtlCol="0" anchor="ctr"/>
+          <a:lstStyle/>
+          <a:p>
+            <a:pPr algn="ctr"/>
+          </a:p>
+        </p:txBody>
+      </p:sp>
+      <p:sp>
+        <p:nvSpPr>
+          <p:cNvPr id="3" name="TextBox 2"/>
+          <p:cNvSpPr txBox="1"/>
+          <p:nvPr/>
+        </p:nvSpPr>
+        <p:spPr>
+          <a:xfrm>
+            <a:off x="868680" y="2286000"/>
+            <a:ext cx="1828800" cy="1097280"/>
+          </a:xfrm>
+          <a:prstGeom prst="rect">
+            <a:avLst/>
+          </a:prstGeom>
+          <a:noFill/>
+        </p:spPr>
+        <p:txBody>
+          <a:bodyPr wrap="square" anchor="t" lIns="0" rIns="0" tIns="0" bIns="0">
+            <a:spAutoFit/>
+          </a:bodyPr>
+          <a:lstStyle/>
+          <a:p>
+            <a:pPr algn="l">
+              <a:lnSpc>
+                <a:spcPct val="115000"/>
+              </a:lnSpc>
+            </a:pPr>
+            <a:r>
+              <a:rPr sz="6400" b="1">
+                <a:solidFill>
+                  <a:srgbClr val="4E9BF0"/>
+                </a:solidFill>
+                <a:latin typeface="Helvetica Neue"/>
+              </a:rPr>
+              <a:t>02</a:t>
+            </a:r>
+          </a:p>
+        </p:txBody>
+      </p:sp>
+      <p:sp>
+        <p:nvSpPr>
+          <p:cNvPr id="4" name="TextBox 3"/>
+          <p:cNvSpPr txBox="1"/>
+          <p:nvPr/>
+        </p:nvSpPr>
+        <p:spPr>
+          <a:xfrm>
+            <a:off x="896112" y="2103120"/>
             <a:ext cx="7315200" cy="365760"/>
           </a:xfrm>
           <a:prstGeom prst="rect">
@@ -10700,21 +10772,21 @@
                 </a:solidFill>
                 <a:latin typeface="Helvetica Neue"/>
               </a:rPr>
-              <a:t>BIENVENIDA</a:t>
-            </a:r>
-          </a:p>
-        </p:txBody>
-      </p:sp>
-      <p:sp>
-        <p:nvSpPr>
-          <p:cNvPr id="3" name="TextBox 2"/>
-          <p:cNvSpPr txBox="1"/>
-          <p:nvPr/>
-        </p:nvSpPr>
-        <p:spPr>
-          <a:xfrm>
-            <a:off x="685800" y="868680"/>
-            <a:ext cx="10515600" cy="640080"/>
+              <a:t>TU ROL</a:t>
+            </a:r>
+          </a:p>
+        </p:txBody>
+      </p:sp>
+      <p:sp>
+        <p:nvSpPr>
+          <p:cNvPr id="5" name="TextBox 4"/>
+          <p:cNvSpPr txBox="1"/>
+          <p:nvPr/>
+        </p:nvSpPr>
+        <p:spPr>
+          <a:xfrm>
+            <a:off x="868680" y="3429000"/>
+            <a:ext cx="9875520" cy="1097280"/>
           </a:xfrm>
           <a:prstGeom prst="rect">
             <a:avLst/>
@@ -10733,20 +10805,59 @@
               </a:lnSpc>
             </a:pPr>
             <a:r>
-              <a:rPr sz="2700" b="1">
+              <a:rPr sz="3400" b="1">
                 <a:solidFill>
                   <a:srgbClr val="FFFFFF"/>
                 </a:solidFill>
                 <a:latin typeface="Helvetica Neue"/>
               </a:rPr>
-              <a:t>La dirección creativa</a:t>
+              <a:t>A qué te comprometes</a:t>
+            </a:r>
+          </a:p>
+        </p:txBody>
+      </p:sp>
+      <p:sp>
+        <p:nvSpPr>
+          <p:cNvPr id="6" name="TextBox 5"/>
+          <p:cNvSpPr txBox="1"/>
+          <p:nvPr/>
+        </p:nvSpPr>
+        <p:spPr>
+          <a:xfrm>
+            <a:off x="868680" y="4251960"/>
+            <a:ext cx="8412480" cy="1097280"/>
+          </a:xfrm>
+          <a:prstGeom prst="rect">
+            <a:avLst/>
+          </a:prstGeom>
+          <a:noFill/>
+        </p:spPr>
+        <p:txBody>
+          <a:bodyPr wrap="square" anchor="t" lIns="0" rIns="0" tIns="0" bIns="0">
+            <a:spAutoFit/>
+          </a:bodyPr>
+          <a:lstStyle/>
+          <a:p>
+            <a:pPr algn="l">
+              <a:lnSpc>
+                <a:spcPct val="135000"/>
+              </a:lnSpc>
+            </a:pPr>
+            <a:r>
+              <a:rPr sz="1550" b="0">
+                <a:solidFill>
+                  <a:srgbClr val="A6ACBA"/>
+                </a:solidFill>
+                <a:latin typeface="Helvetica Neue"/>
+              </a:rPr>
+              <a:t>Puesto, responsabilidades y cómo se ve hacerlo bien.</a:t>
             </a:r>
           </a:p>
         </p:txBody>
       </p:sp>
       <p:pic>
         <p:nvPicPr>
-          <p:cNvPr id="4" name="Picture 3" descr="fash1.jpg"/>
+          <p:cNvPr id="7" name="Picture 6" descr="logo-head.png"/>
           <p:cNvPicPr>
             <a:picLocks noChangeAspect="1"/>
           </p:cNvPicPr>
@@ -10760,117 +10871,6 @@
         </p:blipFill>
         <p:spPr>
           <a:xfrm>
-            <a:off x="685800" y="1691640"/>
-            <a:ext cx="3496056" cy="3794760"/>
-          </a:xfrm>
-          <a:prstGeom prst="rect">
-            <a:avLst/>
-          </a:prstGeom>
-        </p:spPr>
-      </p:pic>
-      <p:pic>
-        <p:nvPicPr>
-          <p:cNvPr id="5" name="Picture 4" descr="fash2.jpg"/>
-          <p:cNvPicPr>
-            <a:picLocks noChangeAspect="1"/>
-          </p:cNvPicPr>
-          <p:nvPr/>
-        </p:nvPicPr>
-        <p:blipFill>
-          <a:blip r:embed="rId3"/>
-          <a:stretch>
-            <a:fillRect/>
-          </a:stretch>
-        </p:blipFill>
-        <p:spPr>
-          <a:xfrm>
-            <a:off x="4346448" y="1691640"/>
-            <a:ext cx="3496056" cy="3794760"/>
-          </a:xfrm>
-          <a:prstGeom prst="rect">
-            <a:avLst/>
-          </a:prstGeom>
-        </p:spPr>
-      </p:pic>
-      <p:pic>
-        <p:nvPicPr>
-          <p:cNvPr id="6" name="Picture 5" descr="fash3.jpg"/>
-          <p:cNvPicPr>
-            <a:picLocks noChangeAspect="1"/>
-          </p:cNvPicPr>
-          <p:nvPr/>
-        </p:nvPicPr>
-        <p:blipFill>
-          <a:blip r:embed="rId4"/>
-          <a:stretch>
-            <a:fillRect/>
-          </a:stretch>
-        </p:blipFill>
-        <p:spPr>
-          <a:xfrm>
-            <a:off x="8007096" y="1691640"/>
-            <a:ext cx="3496056" cy="3794760"/>
-          </a:xfrm>
-          <a:prstGeom prst="rect">
-            <a:avLst/>
-          </a:prstGeom>
-        </p:spPr>
-      </p:pic>
-      <p:sp>
-        <p:nvSpPr>
-          <p:cNvPr id="7" name="TextBox 6"/>
-          <p:cNvSpPr txBox="1"/>
-          <p:nvPr/>
-        </p:nvSpPr>
-        <p:spPr>
-          <a:xfrm>
-            <a:off x="685800" y="5623560"/>
-            <a:ext cx="10424160" cy="548640"/>
-          </a:xfrm>
-          <a:prstGeom prst="rect">
-            <a:avLst/>
-          </a:prstGeom>
-          <a:noFill/>
-        </p:spPr>
-        <p:txBody>
-          <a:bodyPr wrap="square" anchor="t" lIns="0" rIns="0" tIns="0" bIns="0">
-            <a:spAutoFit/>
-          </a:bodyPr>
-          <a:lstStyle/>
-          <a:p>
-            <a:pPr algn="l">
-              <a:lnSpc>
-                <a:spcPct val="130000"/>
-              </a:lnSpc>
-            </a:pPr>
-            <a:r>
-              <a:rPr sz="1250" b="0">
-                <a:solidFill>
-                  <a:srgbClr val="A6ACBA"/>
-                </a:solidFill>
-                <a:latin typeface="Helvetica Neue"/>
-              </a:rPr>
-              <a:t>Referencias de estilismo para la vertical de Fashion: patrones y texturas inspirados en animales, reinterpretados para una línea premium. El mood board completo llegará conforme avance el desarrollo de producto.</a:t>
-            </a:r>
-          </a:p>
-        </p:txBody>
-      </p:sp>
-      <p:pic>
-        <p:nvPicPr>
-          <p:cNvPr id="8" name="Picture 7" descr="logo-head.png"/>
-          <p:cNvPicPr>
-            <a:picLocks noChangeAspect="1"/>
-          </p:cNvPicPr>
-          <p:nvPr/>
-        </p:nvPicPr>
-        <p:blipFill>
-          <a:blip r:embed="rId5"/>
-          <a:stretch>
-            <a:fillRect/>
-          </a:stretch>
-        </p:blipFill>
-        <p:spPr>
-          <a:xfrm>
             <a:off x="685800" y="6382512"/>
             <a:ext cx="170028" cy="219456"/>
           </a:xfrm>
@@ -10881,7 +10881,7 @@
       </p:pic>
       <p:sp>
         <p:nvSpPr>
-          <p:cNvPr id="9" name="TextBox 8"/>
+          <p:cNvPr id="8" name="TextBox 7"/>
           <p:cNvSpPr txBox="1"/>
           <p:nvPr/>
         </p:nvSpPr>
@@ -10920,7 +10920,7 @@
       </p:sp>
       <p:sp>
         <p:nvSpPr>
-          <p:cNvPr id="10" name="TextBox 9"/>
+          <p:cNvPr id="9" name="TextBox 8"/>
           <p:cNvSpPr txBox="1"/>
           <p:nvPr/>
         </p:nvSpPr>
@@ -10952,14 +10952,14 @@
                 </a:solidFill>
                 <a:latin typeface="Helvetica Neue"/>
               </a:rPr>
-              <a:t>Bienvenida   ·   05 / 20</a:t>
+              <a:t>Tu rol   ·   05 / 20</a:t>
             </a:r>
           </a:p>
         </p:txBody>
       </p:sp>
       <p:cxnSp>
         <p:nvCxnSpPr>
-          <p:cNvPr id="11" name="Connector 10"/>
+          <p:cNvPr id="10" name="Connector 9"/>
           <p:cNvCxnSpPr/>
           <p:nvPr/>
         </p:nvCxnSpPr>
@@ -11006,7 +11006,7 @@
     <p:bg>
       <p:bgPr>
         <a:solidFill>
-          <a:srgbClr val="141720"/>
+          <a:srgbClr val="0B0D12"/>
         </a:solidFill>
         <a:effectLst/>
       </p:bgPr>
@@ -11020,207 +11020,283 @@
       <p:grpSpPr/>
       <p:sp>
         <p:nvSpPr>
-          <p:cNvPr id="2" name="Rectangle 1"/>
-          <p:cNvSpPr/>
-          <p:nvPr/>
-        </p:nvSpPr>
-        <p:spPr>
-          <a:xfrm>
-            <a:off x="0" y="0"/>
-            <a:ext cx="164592" cy="6858000"/>
-          </a:xfrm>
-          <a:prstGeom prst="rect">
-            <a:avLst/>
-          </a:prstGeom>
-          <a:solidFill>
-            <a:srgbClr val="1D68C0"/>
-          </a:solidFill>
-          <a:ln>
-            <a:noFill/>
+          <p:cNvPr id="2" name="TextBox 1"/>
+          <p:cNvSpPr txBox="1"/>
+          <p:nvPr/>
+        </p:nvSpPr>
+        <p:spPr>
+          <a:xfrm>
+            <a:off x="685800" y="502920"/>
+            <a:ext cx="7315200" cy="365760"/>
+          </a:xfrm>
+          <a:prstGeom prst="rect">
+            <a:avLst/>
+          </a:prstGeom>
+          <a:noFill/>
+        </p:spPr>
+        <p:txBody>
+          <a:bodyPr wrap="square" anchor="t" lIns="0" rIns="0" tIns="0" bIns="0">
+            <a:spAutoFit/>
+          </a:bodyPr>
+          <a:lstStyle/>
+          <a:p>
+            <a:pPr algn="l">
+              <a:lnSpc>
+                <a:spcPct val="115000"/>
+              </a:lnSpc>
+            </a:pPr>
+            <a:r>
+              <a:rPr sz="1250" b="1">
+                <a:solidFill>
+                  <a:srgbClr val="4E9BF0"/>
+                </a:solidFill>
+                <a:latin typeface="Helvetica Neue"/>
+              </a:rPr>
+              <a:t>TU ROL</a:t>
+            </a:r>
+          </a:p>
+        </p:txBody>
+      </p:sp>
+      <p:sp>
+        <p:nvSpPr>
+          <p:cNvPr id="3" name="TextBox 2"/>
+          <p:cNvSpPr txBox="1"/>
+          <p:nvPr/>
+        </p:nvSpPr>
+        <p:spPr>
+          <a:xfrm>
+            <a:off x="685800" y="868680"/>
+            <a:ext cx="10515600" cy="914400"/>
+          </a:xfrm>
+          <a:prstGeom prst="rect">
+            <a:avLst/>
+          </a:prstGeom>
+          <a:noFill/>
+        </p:spPr>
+        <p:txBody>
+          <a:bodyPr wrap="square" anchor="t" lIns="0" rIns="0" tIns="0" bIns="0">
+            <a:spAutoFit/>
+          </a:bodyPr>
+          <a:lstStyle/>
+          <a:p>
+            <a:pPr algn="l">
+              <a:lnSpc>
+                <a:spcPct val="105000"/>
+              </a:lnSpc>
+            </a:pPr>
+            <a:r>
+              <a:rPr sz="2700" b="1">
+                <a:solidFill>
+                  <a:srgbClr val="FFFFFF"/>
+                </a:solidFill>
+                <a:latin typeface="Helvetica Neue"/>
+              </a:rPr>
+              <a:t>Tu puesto</a:t>
+            </a:r>
+          </a:p>
+        </p:txBody>
+      </p:sp>
+      <p:cxnSp>
+        <p:nvCxnSpPr>
+          <p:cNvPr id="4" name="Connector 3"/>
+          <p:cNvCxnSpPr/>
+          <p:nvPr/>
+        </p:nvCxnSpPr>
+        <p:spPr>
+          <a:xfrm>
+            <a:off x="685800" y="1691640"/>
+            <a:ext cx="10817352" cy="0"/>
+          </a:xfrm>
+          <a:prstGeom prst="line">
+            <a:avLst/>
+          </a:prstGeom>
+          <a:ln w="12700">
+            <a:solidFill>
+              <a:srgbClr val="2A2E3A"/>
+            </a:solidFill>
           </a:ln>
-          <a:effectLst/>
         </p:spPr>
         <p:style>
-          <a:lnRef idx="1">
+          <a:lnRef idx="2">
             <a:schemeClr val="accent1"/>
           </a:lnRef>
-          <a:fillRef idx="3">
+          <a:fillRef idx="0">
             <a:schemeClr val="accent1"/>
           </a:fillRef>
-          <a:effectRef idx="2">
+          <a:effectRef idx="1">
             <a:schemeClr val="accent1"/>
           </a:effectRef>
           <a:fontRef idx="minor">
-            <a:schemeClr val="lt1"/>
+            <a:schemeClr val="tx1"/>
           </a:fontRef>
         </p:style>
-        <p:txBody>
-          <a:bodyPr rtlCol="0" anchor="ctr"/>
-          <a:lstStyle/>
-          <a:p>
-            <a:pPr algn="ctr"/>
-          </a:p>
-        </p:txBody>
-      </p:sp>
-      <p:sp>
-        <p:nvSpPr>
-          <p:cNvPr id="3" name="TextBox 2"/>
-          <p:cNvSpPr txBox="1"/>
-          <p:nvPr/>
-        </p:nvSpPr>
-        <p:spPr>
-          <a:xfrm>
-            <a:off x="868680" y="2286000"/>
-            <a:ext cx="1828800" cy="1097280"/>
-          </a:xfrm>
-          <a:prstGeom prst="rect">
-            <a:avLst/>
-          </a:prstGeom>
-          <a:noFill/>
-        </p:spPr>
-        <p:txBody>
-          <a:bodyPr wrap="square" anchor="t" lIns="0" rIns="0" tIns="0" bIns="0">
-            <a:spAutoFit/>
-          </a:bodyPr>
-          <a:lstStyle/>
-          <a:p>
-            <a:pPr algn="l">
-              <a:lnSpc>
-                <a:spcPct val="115000"/>
-              </a:lnSpc>
-            </a:pPr>
-            <a:r>
-              <a:rPr sz="6400" b="1">
+      </p:cxnSp>
+      <p:sp>
+        <p:nvSpPr>
+          <p:cNvPr id="5" name="TextBox 4"/>
+          <p:cNvSpPr txBox="1"/>
+          <p:nvPr/>
+        </p:nvSpPr>
+        <p:spPr>
+          <a:xfrm>
+            <a:off x="685800" y="1965960"/>
+            <a:ext cx="10424160" cy="3931920"/>
+          </a:xfrm>
+          <a:prstGeom prst="rect">
+            <a:avLst/>
+          </a:prstGeom>
+          <a:noFill/>
+        </p:spPr>
+        <p:txBody>
+          <a:bodyPr wrap="square" lIns="0" rIns="0">
+            <a:spAutoFit/>
+          </a:bodyPr>
+          <a:lstStyle/>
+          <a:p>
+            <a:pPr>
+              <a:lnSpc>
+                <a:spcPct val="125000"/>
+              </a:lnSpc>
+              <a:spcAft>
+                <a:spcPts val="1000"/>
+              </a:spcAft>
+            </a:pPr>
+            <a:r>
+              <a:rPr sz="1550" b="1">
                 <a:solidFill>
                   <a:srgbClr val="4E9BF0"/>
                 </a:solidFill>
                 <a:latin typeface="Helvetica Neue"/>
               </a:rPr>
-              <a:t>02</a:t>
-            </a:r>
-          </a:p>
-        </p:txBody>
-      </p:sp>
-      <p:sp>
-        <p:nvSpPr>
-          <p:cNvPr id="4" name="TextBox 3"/>
-          <p:cNvSpPr txBox="1"/>
-          <p:nvPr/>
-        </p:nvSpPr>
-        <p:spPr>
-          <a:xfrm>
-            <a:off x="896112" y="2103120"/>
-            <a:ext cx="7315200" cy="365760"/>
-          </a:xfrm>
-          <a:prstGeom prst="rect">
-            <a:avLst/>
-          </a:prstGeom>
-          <a:noFill/>
-        </p:spPr>
-        <p:txBody>
-          <a:bodyPr wrap="square" anchor="t" lIns="0" rIns="0" tIns="0" bIns="0">
-            <a:spAutoFit/>
-          </a:bodyPr>
-          <a:lstStyle/>
-          <a:p>
-            <a:pPr algn="l">
-              <a:lnSpc>
-                <a:spcPct val="115000"/>
-              </a:lnSpc>
-            </a:pPr>
-            <a:r>
-              <a:rPr sz="1250" b="1">
+              <a:t>—  </a:t>
+            </a:r>
+            <a:r>
+              <a:rPr sz="1550">
+                <a:solidFill>
+                  <a:srgbClr val="FFFFFF"/>
+                </a:solidFill>
+                <a:latin typeface="Helvetica Neue"/>
+              </a:rPr>
+              <a:t>Puesto: Colaborador Oficial de Zebraish.</a:t>
+            </a:r>
+          </a:p>
+          <a:p>
+            <a:pPr>
+              <a:lnSpc>
+                <a:spcPct val="125000"/>
+              </a:lnSpc>
+              <a:spcAft>
+                <a:spcPts val="1000"/>
+              </a:spcAft>
+            </a:pPr>
+            <a:r>
+              <a:rPr sz="1550" b="1">
                 <a:solidFill>
                   <a:srgbClr val="4E9BF0"/>
                 </a:solidFill>
                 <a:latin typeface="Helvetica Neue"/>
               </a:rPr>
-              <a:t>TU ROL</a:t>
-            </a:r>
-          </a:p>
-        </p:txBody>
-      </p:sp>
-      <p:sp>
-        <p:nvSpPr>
-          <p:cNvPr id="5" name="TextBox 4"/>
-          <p:cNvSpPr txBox="1"/>
-          <p:nvPr/>
-        </p:nvSpPr>
-        <p:spPr>
-          <a:xfrm>
-            <a:off x="868680" y="3429000"/>
-            <a:ext cx="9875520" cy="1097280"/>
-          </a:xfrm>
-          <a:prstGeom prst="rect">
-            <a:avLst/>
-          </a:prstGeom>
-          <a:noFill/>
-        </p:spPr>
-        <p:txBody>
-          <a:bodyPr wrap="square" anchor="t" lIns="0" rIns="0" tIns="0" bIns="0">
-            <a:spAutoFit/>
-          </a:bodyPr>
-          <a:lstStyle/>
-          <a:p>
-            <a:pPr algn="l">
-              <a:lnSpc>
-                <a:spcPct val="115000"/>
-              </a:lnSpc>
-            </a:pPr>
-            <a:r>
-              <a:rPr sz="3400" b="1">
+              <a:t>—  </a:t>
+            </a:r>
+            <a:r>
+              <a:rPr sz="1550">
                 <a:solidFill>
                   <a:srgbClr val="FFFFFF"/>
                 </a:solidFill>
                 <a:latin typeface="Helvetica Neue"/>
               </a:rPr>
-              <a:t>A qué te comprometes</a:t>
-            </a:r>
-          </a:p>
-        </p:txBody>
-      </p:sp>
-      <p:sp>
-        <p:nvSpPr>
-          <p:cNvPr id="6" name="TextBox 5"/>
-          <p:cNvSpPr txBox="1"/>
-          <p:nvPr/>
-        </p:nvSpPr>
-        <p:spPr>
-          <a:xfrm>
-            <a:off x="868680" y="4251960"/>
-            <a:ext cx="8412480" cy="1097280"/>
-          </a:xfrm>
-          <a:prstGeom prst="rect">
-            <a:avLst/>
-          </a:prstGeom>
-          <a:noFill/>
-        </p:spPr>
-        <p:txBody>
-          <a:bodyPr wrap="square" anchor="t" lIns="0" rIns="0" tIns="0" bIns="0">
-            <a:spAutoFit/>
-          </a:bodyPr>
-          <a:lstStyle/>
-          <a:p>
-            <a:pPr algn="l">
-              <a:lnSpc>
-                <a:spcPct val="135000"/>
-              </a:lnSpc>
-            </a:pPr>
-            <a:r>
-              <a:rPr sz="1550" b="0">
-                <a:solidFill>
-                  <a:srgbClr val="A6ACBA"/>
-                </a:solidFill>
-                <a:latin typeface="Helvetica Neue"/>
-              </a:rPr>
-              <a:t>Puesto, responsabilidades y cómo se ve hacerlo bien.</a:t>
+              <a:t>Foco actual: promocionar Zebraish Studio y traer clientes para él — esa es la prioridad durante este Periodo.</a:t>
+            </a:r>
+          </a:p>
+          <a:p>
+            <a:pPr>
+              <a:lnSpc>
+                <a:spcPct val="125000"/>
+              </a:lnSpc>
+              <a:spcAft>
+                <a:spcPts val="1000"/>
+              </a:spcAft>
+            </a:pPr>
+            <a:r>
+              <a:rPr sz="1550" b="1">
+                <a:solidFill>
+                  <a:srgbClr val="4E9BF0"/>
+                </a:solidFill>
+                <a:latin typeface="Helvetica Neue"/>
+              </a:rPr>
+              <a:t>—  </a:t>
+            </a:r>
+            <a:r>
+              <a:rPr sz="1550">
+                <a:solidFill>
+                  <a:srgbClr val="FFFFFF"/>
+                </a:solidFill>
+                <a:latin typeface="Helvetica Neue"/>
+              </a:rPr>
+              <a:t>No exclusivo: eres libre de trabajar con, promocionar o representar otras marcas durante el Periodo, siempre que no entre en conflicto con tus obligaciones con Zebraish.</a:t>
+            </a:r>
+          </a:p>
+          <a:p>
+            <a:pPr>
+              <a:lnSpc>
+                <a:spcPct val="125000"/>
+              </a:lnSpc>
+              <a:spcAft>
+                <a:spcPts val="1000"/>
+              </a:spcAft>
+            </a:pPr>
+            <a:r>
+              <a:rPr sz="1550" b="1">
+                <a:solidFill>
+                  <a:srgbClr val="4E9BF0"/>
+                </a:solidFill>
+                <a:latin typeface="Helvetica Neue"/>
+              </a:rPr>
+              <a:t>—  </a:t>
+            </a:r>
+            <a:r>
+              <a:rPr sz="1550">
+                <a:solidFill>
+                  <a:srgbClr val="FFFFFF"/>
+                </a:solidFill>
+                <a:latin typeface="Helvetica Neue"/>
+              </a:rPr>
+              <a:t>Periodo Inicial: 3 meses desde la fecha en que ambos firmen, renovable por acuerdo escrito mutuo.</a:t>
+            </a:r>
+          </a:p>
+          <a:p>
+            <a:pPr>
+              <a:lnSpc>
+                <a:spcPct val="125000"/>
+              </a:lnSpc>
+              <a:spcAft>
+                <a:spcPts val="1000"/>
+              </a:spcAft>
+            </a:pPr>
+            <a:r>
+              <a:rPr sz="1550" b="1">
+                <a:solidFill>
+                  <a:srgbClr val="4E9BF0"/>
+                </a:solidFill>
+                <a:latin typeface="Helvetica Neue"/>
+              </a:rPr>
+              <a:t>—  </a:t>
+            </a:r>
+            <a:r>
+              <a:rPr sz="1550">
+                <a:solidFill>
+                  <a:srgbClr val="FFFFFF"/>
+                </a:solidFill>
+                <a:latin typeface="Helvetica Neue"/>
+              </a:rPr>
+              <a:t>Representas a Zebraish, generas reconocimiento de marca, creas contenido y presentas potenciales clientes — todo detallado en el propio Acuerdo.</a:t>
             </a:r>
           </a:p>
         </p:txBody>
       </p:sp>
       <p:pic>
         <p:nvPicPr>
-          <p:cNvPr id="7" name="Picture 6" descr="logo-head.png"/>
+          <p:cNvPr id="6" name="Picture 5" descr="logo-head.png"/>
           <p:cNvPicPr>
             <a:picLocks noChangeAspect="1"/>
           </p:cNvPicPr>
@@ -11244,7 +11320,7 @@
       </p:pic>
       <p:sp>
         <p:nvSpPr>
-          <p:cNvPr id="8" name="TextBox 7"/>
+          <p:cNvPr id="7" name="TextBox 6"/>
           <p:cNvSpPr txBox="1"/>
           <p:nvPr/>
         </p:nvSpPr>
@@ -11283,7 +11359,7 @@
       </p:sp>
       <p:sp>
         <p:nvSpPr>
-          <p:cNvPr id="9" name="TextBox 8"/>
+          <p:cNvPr id="8" name="TextBox 7"/>
           <p:cNvSpPr txBox="1"/>
           <p:nvPr/>
         </p:nvSpPr>
@@ -11322,7 +11398,7 @@
       </p:sp>
       <p:cxnSp>
         <p:nvCxnSpPr>
-          <p:cNvPr id="10" name="Connector 9"/>
+          <p:cNvPr id="9" name="Connector 8"/>
           <p:cNvCxnSpPr/>
           <p:nvPr/>
         </p:nvCxnSpPr>
@@ -11454,7 +11530,7 @@
                 </a:solidFill>
                 <a:latin typeface="Helvetica Neue"/>
               </a:rPr>
-              <a:t>Tu puesto</a:t>
+              <a:t>Responsabilidades de captación</a:t>
             </a:r>
           </a:p>
         </p:txBody>
@@ -11540,7 +11616,7 @@
                 </a:solidFill>
                 <a:latin typeface="Helvetica Neue"/>
               </a:rPr>
-              <a:t>Puesto: Colaborador Oficial de Zebraish.</a:t>
+              <a:t>Identificar y contactar de forma proactiva a potenciales clientes de Zebraish Studio dentro de tu propia red y audiencia — cualquiera que pueda usar lo que Studio construye — mediante mensajes directos, presentaciones en persona, participación en redes sociales, lo que mejor funcione.</a:t>
             </a:r>
           </a:p>
           <a:p>
@@ -11568,7 +11644,7 @@
                 </a:solidFill>
                 <a:latin typeface="Helvetica Neue"/>
               </a:rPr>
-              <a:t>No exclusivo: eres libre de trabajar con, promocionar o representar otras marcas durante el Periodo, siempre que no entre en conflicto con tus obligaciones con Zebraish.</a:t>
+              <a:t>Presentar la oferta de Zebraish de forma precisa al hacerlo.</a:t>
             </a:r>
           </a:p>
           <a:p>
@@ -11596,7 +11672,7 @@
                 </a:solidFill>
                 <a:latin typeface="Helvetica Neue"/>
               </a:rPr>
-              <a:t>Periodo Inicial: 3 meses desde la fecha en que ambos firmen, renovable por acuerdo escrito mutuo.</a:t>
+              <a:t>Dirigir a cualquier interesado directamente a Joshua, o al Portal de Proyectos y Pagos de Zebraish una vez esté disponible, para que el proyecto se abra correctamente.</a:t>
             </a:r>
           </a:p>
           <a:p>
@@ -11624,7 +11700,7 @@
                 </a:solidFill>
                 <a:latin typeface="Helvetica Neue"/>
               </a:rPr>
-              <a:t>Representas a Zebraish, generas reconocimiento de marca, creas contenido y presentas potenciales clientes — todo detallado en el propio Acuerdo.</a:t>
+              <a:t>Esto es el núcleo de cómo se genera la comisión: la captación es parte del trabajo, no un extra opcional.</a:t>
             </a:r>
           </a:p>
         </p:txBody>
@@ -11855,7 +11931,7 @@
           <a:p>
             <a:pPr algn="l">
               <a:lnSpc>
-                <a:spcPct val="105000"/>
+                <a:spcPct val="115000"/>
               </a:lnSpc>
             </a:pPr>
             <a:r>
@@ -11865,7 +11941,7 @@
                 </a:solidFill>
                 <a:latin typeface="Helvetica Neue"/>
               </a:rPr>
-              <a:t>Responsabilidades de captación</a:t>
+              <a:t>Mínimos de redes sociales</a:t>
             </a:r>
           </a:p>
         </p:txBody>
@@ -11913,136 +11989,807 @@
         </p:nvSpPr>
         <p:spPr>
           <a:xfrm>
-            <a:off x="685800" y="1965960"/>
-            <a:ext cx="10424160" cy="3931920"/>
-          </a:xfrm>
-          <a:prstGeom prst="rect">
-            <a:avLst/>
-          </a:prstGeom>
-          <a:noFill/>
-        </p:spPr>
-        <p:txBody>
-          <a:bodyPr wrap="square" lIns="0" rIns="0">
-            <a:spAutoFit/>
-          </a:bodyPr>
-          <a:lstStyle/>
-          <a:p>
-            <a:pPr>
-              <a:lnSpc>
-                <a:spcPct val="125000"/>
-              </a:lnSpc>
-              <a:spcAft>
-                <a:spcPts val="1000"/>
-              </a:spcAft>
-            </a:pPr>
-            <a:r>
-              <a:rPr sz="1550" b="1">
-                <a:solidFill>
-                  <a:srgbClr val="4E9BF0"/>
-                </a:solidFill>
-                <a:latin typeface="Helvetica Neue"/>
-              </a:rPr>
-              <a:t>—  </a:t>
-            </a:r>
-            <a:r>
-              <a:rPr sz="1550">
+            <a:off x="685800" y="1783080"/>
+            <a:ext cx="10332720" cy="320040"/>
+          </a:xfrm>
+          <a:prstGeom prst="rect">
+            <a:avLst/>
+          </a:prstGeom>
+          <a:noFill/>
+        </p:spPr>
+        <p:txBody>
+          <a:bodyPr wrap="square" anchor="t" lIns="0" rIns="0" tIns="0" bIns="0">
+            <a:spAutoFit/>
+          </a:bodyPr>
+          <a:lstStyle/>
+          <a:p>
+            <a:pPr algn="l">
+              <a:lnSpc>
+                <a:spcPct val="115000"/>
+              </a:lnSpc>
+            </a:pPr>
+            <a:r>
+              <a:rPr sz="1250" b="0">
+                <a:solidFill>
+                  <a:srgbClr val="A6ACBA"/>
+                </a:solidFill>
+                <a:latin typeface="Helvetica Neue"/>
+              </a:rPr>
+              <a:t>El foco de contenido es Zebraish Studio por ahora — el contenido de Fashion se suma en cuanto se lance la línea.</a:t>
+            </a:r>
+          </a:p>
+        </p:txBody>
+      </p:sp>
+      <p:sp>
+        <p:nvSpPr>
+          <p:cNvPr id="6" name="Rectangle 5"/>
+          <p:cNvSpPr/>
+          <p:nvPr/>
+        </p:nvSpPr>
+        <p:spPr>
+          <a:xfrm>
+            <a:off x="685800" y="2212848"/>
+            <a:ext cx="10817352" cy="621792"/>
+          </a:xfrm>
+          <a:prstGeom prst="rect">
+            <a:avLst/>
+          </a:prstGeom>
+          <a:solidFill>
+            <a:srgbClr val="1D68C0"/>
+          </a:solidFill>
+          <a:ln>
+            <a:noFill/>
+          </a:ln>
+          <a:effectLst/>
+        </p:spPr>
+        <p:style>
+          <a:lnRef idx="1">
+            <a:schemeClr val="accent1"/>
+          </a:lnRef>
+          <a:fillRef idx="3">
+            <a:schemeClr val="accent1"/>
+          </a:fillRef>
+          <a:effectRef idx="2">
+            <a:schemeClr val="accent1"/>
+          </a:effectRef>
+          <a:fontRef idx="minor">
+            <a:schemeClr val="lt1"/>
+          </a:fontRef>
+        </p:style>
+        <p:txBody>
+          <a:bodyPr rtlCol="0" anchor="ctr"/>
+          <a:lstStyle/>
+          <a:p>
+            <a:pPr algn="ctr"/>
+          </a:p>
+        </p:txBody>
+      </p:sp>
+      <p:sp>
+        <p:nvSpPr>
+          <p:cNvPr id="7" name="TextBox 6"/>
+          <p:cNvSpPr txBox="1"/>
+          <p:nvPr/>
+        </p:nvSpPr>
+        <p:spPr>
+          <a:xfrm>
+            <a:off x="868680" y="2322576"/>
+            <a:ext cx="4846320" cy="621792"/>
+          </a:xfrm>
+          <a:prstGeom prst="rect">
+            <a:avLst/>
+          </a:prstGeom>
+          <a:noFill/>
+        </p:spPr>
+        <p:txBody>
+          <a:bodyPr wrap="square" anchor="t" lIns="0" rIns="0" tIns="0" bIns="0">
+            <a:spAutoFit/>
+          </a:bodyPr>
+          <a:lstStyle/>
+          <a:p>
+            <a:pPr algn="l">
+              <a:lnSpc>
+                <a:spcPct val="115000"/>
+              </a:lnSpc>
+            </a:pPr>
+            <a:r>
+              <a:rPr sz="1250" b="1">
                 <a:solidFill>
                   <a:srgbClr val="FFFFFF"/>
                 </a:solidFill>
                 <a:latin typeface="Helvetica Neue"/>
               </a:rPr>
-              <a:t>Identificar y contactar de forma proactiva a potenciales clientes dentro de tu propia red y audiencia: mensajes directos, presentaciones en persona, participación en redes sociales, lo que mejor funcione.</a:t>
-            </a:r>
-          </a:p>
-          <a:p>
-            <a:pPr>
-              <a:lnSpc>
-                <a:spcPct val="125000"/>
-              </a:lnSpc>
-              <a:spcAft>
-                <a:spcPts val="1000"/>
-              </a:spcAft>
-            </a:pPr>
-            <a:r>
-              <a:rPr sz="1550" b="1">
-                <a:solidFill>
-                  <a:srgbClr val="4E9BF0"/>
-                </a:solidFill>
-                <a:latin typeface="Helvetica Neue"/>
-              </a:rPr>
-              <a:t>—  </a:t>
-            </a:r>
-            <a:r>
-              <a:rPr sz="1550">
+              <a:t>Entregable</a:t>
+            </a:r>
+          </a:p>
+        </p:txBody>
+      </p:sp>
+      <p:sp>
+        <p:nvSpPr>
+          <p:cNvPr id="8" name="TextBox 7"/>
+          <p:cNvSpPr txBox="1"/>
+          <p:nvPr/>
+        </p:nvSpPr>
+        <p:spPr>
+          <a:xfrm>
+            <a:off x="5989320" y="2322576"/>
+            <a:ext cx="5422392" cy="621792"/>
+          </a:xfrm>
+          <a:prstGeom prst="rect">
+            <a:avLst/>
+          </a:prstGeom>
+          <a:noFill/>
+        </p:spPr>
+        <p:txBody>
+          <a:bodyPr wrap="square" anchor="t" lIns="0" rIns="0" tIns="0" bIns="0">
+            <a:spAutoFit/>
+          </a:bodyPr>
+          <a:lstStyle/>
+          <a:p>
+            <a:pPr algn="l">
+              <a:lnSpc>
+                <a:spcPct val="115000"/>
+              </a:lnSpc>
+            </a:pPr>
+            <a:r>
+              <a:rPr sz="1250" b="1">
                 <a:solidFill>
                   <a:srgbClr val="FFFFFF"/>
                 </a:solidFill>
                 <a:latin typeface="Helvetica Neue"/>
               </a:rPr>
-              <a:t>Presentar la oferta de Zebraish de forma precisa al hacerlo.</a:t>
-            </a:r>
-          </a:p>
-          <a:p>
-            <a:pPr>
-              <a:lnSpc>
-                <a:spcPct val="125000"/>
-              </a:lnSpc>
-              <a:spcAft>
-                <a:spcPts val="1000"/>
-              </a:spcAft>
-            </a:pPr>
-            <a:r>
-              <a:rPr sz="1550" b="1">
-                <a:solidFill>
-                  <a:srgbClr val="4E9BF0"/>
-                </a:solidFill>
-                <a:latin typeface="Helvetica Neue"/>
-              </a:rPr>
-              <a:t>—  </a:t>
-            </a:r>
-            <a:r>
-              <a:rPr sz="1550">
+              <a:t>Requisito</a:t>
+            </a:r>
+          </a:p>
+        </p:txBody>
+      </p:sp>
+      <p:sp>
+        <p:nvSpPr>
+          <p:cNvPr id="9" name="Rectangle 8"/>
+          <p:cNvSpPr/>
+          <p:nvPr/>
+        </p:nvSpPr>
+        <p:spPr>
+          <a:xfrm>
+            <a:off x="685800" y="2834640"/>
+            <a:ext cx="10817352" cy="621792"/>
+          </a:xfrm>
+          <a:prstGeom prst="rect">
+            <a:avLst/>
+          </a:prstGeom>
+          <a:solidFill>
+            <a:srgbClr val="141720"/>
+          </a:solidFill>
+          <a:ln>
+            <a:noFill/>
+          </a:ln>
+          <a:effectLst/>
+        </p:spPr>
+        <p:style>
+          <a:lnRef idx="1">
+            <a:schemeClr val="accent1"/>
+          </a:lnRef>
+          <a:fillRef idx="3">
+            <a:schemeClr val="accent1"/>
+          </a:fillRef>
+          <a:effectRef idx="2">
+            <a:schemeClr val="accent1"/>
+          </a:effectRef>
+          <a:fontRef idx="minor">
+            <a:schemeClr val="lt1"/>
+          </a:fontRef>
+        </p:style>
+        <p:txBody>
+          <a:bodyPr rtlCol="0" anchor="ctr"/>
+          <a:lstStyle/>
+          <a:p>
+            <a:pPr algn="ctr"/>
+          </a:p>
+        </p:txBody>
+      </p:sp>
+      <p:sp>
+        <p:nvSpPr>
+          <p:cNvPr id="10" name="TextBox 9"/>
+          <p:cNvSpPr txBox="1"/>
+          <p:nvPr/>
+        </p:nvSpPr>
+        <p:spPr>
+          <a:xfrm>
+            <a:off x="868680" y="2926080"/>
+            <a:ext cx="4846320" cy="621792"/>
+          </a:xfrm>
+          <a:prstGeom prst="rect">
+            <a:avLst/>
+          </a:prstGeom>
+          <a:noFill/>
+        </p:spPr>
+        <p:txBody>
+          <a:bodyPr wrap="square" anchor="t" lIns="0" rIns="0" tIns="0" bIns="0">
+            <a:spAutoFit/>
+          </a:bodyPr>
+          <a:lstStyle/>
+          <a:p>
+            <a:pPr algn="l">
+              <a:lnSpc>
+                <a:spcPct val="115000"/>
+              </a:lnSpc>
+            </a:pPr>
+            <a:r>
+              <a:rPr sz="1300" b="1">
                 <a:solidFill>
                   <a:srgbClr val="FFFFFF"/>
                 </a:solidFill>
                 <a:latin typeface="Helvetica Neue"/>
               </a:rPr>
-              <a:t>Dirigir a cualquier interesado directamente a Joshua, o al Portal de Proyectos y Pagos de Zebraish una vez esté disponible, para que el proyecto se abra correctamente.</a:t>
-            </a:r>
-          </a:p>
-          <a:p>
-            <a:pPr>
-              <a:lnSpc>
-                <a:spcPct val="125000"/>
-              </a:lnSpc>
-              <a:spcAft>
-                <a:spcPts val="1000"/>
-              </a:spcAft>
-            </a:pPr>
-            <a:r>
-              <a:rPr sz="1550" b="1">
-                <a:solidFill>
-                  <a:srgbClr val="4E9BF0"/>
-                </a:solidFill>
-                <a:latin typeface="Helvetica Neue"/>
-              </a:rPr>
-              <a:t>—  </a:t>
-            </a:r>
-            <a:r>
-              <a:rPr sz="1550">
+              <a:t>Publicaciones / Reels de Instagram</a:t>
+            </a:r>
+          </a:p>
+        </p:txBody>
+      </p:sp>
+      <p:sp>
+        <p:nvSpPr>
+          <p:cNvPr id="11" name="TextBox 10"/>
+          <p:cNvSpPr txBox="1"/>
+          <p:nvPr/>
+        </p:nvSpPr>
+        <p:spPr>
+          <a:xfrm>
+            <a:off x="5989320" y="2926080"/>
+            <a:ext cx="5422392" cy="621792"/>
+          </a:xfrm>
+          <a:prstGeom prst="rect">
+            <a:avLst/>
+          </a:prstGeom>
+          <a:noFill/>
+        </p:spPr>
+        <p:txBody>
+          <a:bodyPr wrap="square" anchor="t" lIns="0" rIns="0" tIns="0" bIns="0">
+            <a:spAutoFit/>
+          </a:bodyPr>
+          <a:lstStyle/>
+          <a:p>
+            <a:pPr algn="l">
+              <a:lnSpc>
+                <a:spcPct val="115000"/>
+              </a:lnSpc>
+            </a:pPr>
+            <a:r>
+              <a:rPr sz="1300" b="0">
+                <a:solidFill>
+                  <a:srgbClr val="A6ACBA"/>
+                </a:solidFill>
+                <a:latin typeface="Helvetica Neue"/>
+              </a:rPr>
+              <a:t>2 por semana</a:t>
+            </a:r>
+          </a:p>
+        </p:txBody>
+      </p:sp>
+      <p:sp>
+        <p:nvSpPr>
+          <p:cNvPr id="12" name="Rectangle 11"/>
+          <p:cNvSpPr/>
+          <p:nvPr/>
+        </p:nvSpPr>
+        <p:spPr>
+          <a:xfrm>
+            <a:off x="685800" y="3456432"/>
+            <a:ext cx="10817352" cy="621792"/>
+          </a:xfrm>
+          <a:prstGeom prst="rect">
+            <a:avLst/>
+          </a:prstGeom>
+          <a:solidFill>
+            <a:srgbClr val="0B0D12"/>
+          </a:solidFill>
+          <a:ln>
+            <a:noFill/>
+          </a:ln>
+          <a:effectLst/>
+        </p:spPr>
+        <p:style>
+          <a:lnRef idx="1">
+            <a:schemeClr val="accent1"/>
+          </a:lnRef>
+          <a:fillRef idx="3">
+            <a:schemeClr val="accent1"/>
+          </a:fillRef>
+          <a:effectRef idx="2">
+            <a:schemeClr val="accent1"/>
+          </a:effectRef>
+          <a:fontRef idx="minor">
+            <a:schemeClr val="lt1"/>
+          </a:fontRef>
+        </p:style>
+        <p:txBody>
+          <a:bodyPr rtlCol="0" anchor="ctr"/>
+          <a:lstStyle/>
+          <a:p>
+            <a:pPr algn="ctr"/>
+          </a:p>
+        </p:txBody>
+      </p:sp>
+      <p:sp>
+        <p:nvSpPr>
+          <p:cNvPr id="13" name="TextBox 12"/>
+          <p:cNvSpPr txBox="1"/>
+          <p:nvPr/>
+        </p:nvSpPr>
+        <p:spPr>
+          <a:xfrm>
+            <a:off x="868680" y="3547872"/>
+            <a:ext cx="4846320" cy="621792"/>
+          </a:xfrm>
+          <a:prstGeom prst="rect">
+            <a:avLst/>
+          </a:prstGeom>
+          <a:noFill/>
+        </p:spPr>
+        <p:txBody>
+          <a:bodyPr wrap="square" anchor="t" lIns="0" rIns="0" tIns="0" bIns="0">
+            <a:spAutoFit/>
+          </a:bodyPr>
+          <a:lstStyle/>
+          <a:p>
+            <a:pPr algn="l">
+              <a:lnSpc>
+                <a:spcPct val="115000"/>
+              </a:lnSpc>
+            </a:pPr>
+            <a:r>
+              <a:rPr sz="1300" b="1">
                 <a:solidFill>
                   <a:srgbClr val="FFFFFF"/>
                 </a:solidFill>
                 <a:latin typeface="Helvetica Neue"/>
               </a:rPr>
-              <a:t>Esto es el núcleo de cómo se genera la comisión: la captación es parte del trabajo, no un extra opcional.</a:t>
-            </a:r>
-          </a:p>
-        </p:txBody>
-      </p:sp>
+              <a:t>Historias de Instagram</a:t>
+            </a:r>
+          </a:p>
+        </p:txBody>
+      </p:sp>
+      <p:sp>
+        <p:nvSpPr>
+          <p:cNvPr id="14" name="TextBox 13"/>
+          <p:cNvSpPr txBox="1"/>
+          <p:nvPr/>
+        </p:nvSpPr>
+        <p:spPr>
+          <a:xfrm>
+            <a:off x="5989320" y="3547872"/>
+            <a:ext cx="5422392" cy="621792"/>
+          </a:xfrm>
+          <a:prstGeom prst="rect">
+            <a:avLst/>
+          </a:prstGeom>
+          <a:noFill/>
+        </p:spPr>
+        <p:txBody>
+          <a:bodyPr wrap="square" anchor="t" lIns="0" rIns="0" tIns="0" bIns="0">
+            <a:spAutoFit/>
+          </a:bodyPr>
+          <a:lstStyle/>
+          <a:p>
+            <a:pPr algn="l">
+              <a:lnSpc>
+                <a:spcPct val="115000"/>
+              </a:lnSpc>
+            </a:pPr>
+            <a:r>
+              <a:rPr sz="1300" b="0">
+                <a:solidFill>
+                  <a:srgbClr val="A6ACBA"/>
+                </a:solidFill>
+                <a:latin typeface="Helvetica Neue"/>
+              </a:rPr>
+              <a:t>3 por semana</a:t>
+            </a:r>
+          </a:p>
+        </p:txBody>
+      </p:sp>
+      <p:sp>
+        <p:nvSpPr>
+          <p:cNvPr id="15" name="Rectangle 14"/>
+          <p:cNvSpPr/>
+          <p:nvPr/>
+        </p:nvSpPr>
+        <p:spPr>
+          <a:xfrm>
+            <a:off x="685800" y="4078224"/>
+            <a:ext cx="10817352" cy="621792"/>
+          </a:xfrm>
+          <a:prstGeom prst="rect">
+            <a:avLst/>
+          </a:prstGeom>
+          <a:solidFill>
+            <a:srgbClr val="141720"/>
+          </a:solidFill>
+          <a:ln>
+            <a:noFill/>
+          </a:ln>
+          <a:effectLst/>
+        </p:spPr>
+        <p:style>
+          <a:lnRef idx="1">
+            <a:schemeClr val="accent1"/>
+          </a:lnRef>
+          <a:fillRef idx="3">
+            <a:schemeClr val="accent1"/>
+          </a:fillRef>
+          <a:effectRef idx="2">
+            <a:schemeClr val="accent1"/>
+          </a:effectRef>
+          <a:fontRef idx="minor">
+            <a:schemeClr val="lt1"/>
+          </a:fontRef>
+        </p:style>
+        <p:txBody>
+          <a:bodyPr rtlCol="0" anchor="ctr"/>
+          <a:lstStyle/>
+          <a:p>
+            <a:pPr algn="ctr"/>
+          </a:p>
+        </p:txBody>
+      </p:sp>
+      <p:sp>
+        <p:nvSpPr>
+          <p:cNvPr id="16" name="TextBox 15"/>
+          <p:cNvSpPr txBox="1"/>
+          <p:nvPr/>
+        </p:nvSpPr>
+        <p:spPr>
+          <a:xfrm>
+            <a:off x="868680" y="4169664"/>
+            <a:ext cx="4846320" cy="621792"/>
+          </a:xfrm>
+          <a:prstGeom prst="rect">
+            <a:avLst/>
+          </a:prstGeom>
+          <a:noFill/>
+        </p:spPr>
+        <p:txBody>
+          <a:bodyPr wrap="square" anchor="t" lIns="0" rIns="0" tIns="0" bIns="0">
+            <a:spAutoFit/>
+          </a:bodyPr>
+          <a:lstStyle/>
+          <a:p>
+            <a:pPr algn="l">
+              <a:lnSpc>
+                <a:spcPct val="115000"/>
+              </a:lnSpc>
+            </a:pPr>
+            <a:r>
+              <a:rPr sz="1300" b="1">
+                <a:solidFill>
+                  <a:srgbClr val="FFFFFF"/>
+                </a:solidFill>
+                <a:latin typeface="Helvetica Neue"/>
+              </a:rPr>
+              <a:t>Videos de TikTok</a:t>
+            </a:r>
+          </a:p>
+        </p:txBody>
+      </p:sp>
+      <p:sp>
+        <p:nvSpPr>
+          <p:cNvPr id="17" name="TextBox 16"/>
+          <p:cNvSpPr txBox="1"/>
+          <p:nvPr/>
+        </p:nvSpPr>
+        <p:spPr>
+          <a:xfrm>
+            <a:off x="5989320" y="4169664"/>
+            <a:ext cx="5422392" cy="621792"/>
+          </a:xfrm>
+          <a:prstGeom prst="rect">
+            <a:avLst/>
+          </a:prstGeom>
+          <a:noFill/>
+        </p:spPr>
+        <p:txBody>
+          <a:bodyPr wrap="square" anchor="t" lIns="0" rIns="0" tIns="0" bIns="0">
+            <a:spAutoFit/>
+          </a:bodyPr>
+          <a:lstStyle/>
+          <a:p>
+            <a:pPr algn="l">
+              <a:lnSpc>
+                <a:spcPct val="115000"/>
+              </a:lnSpc>
+            </a:pPr>
+            <a:r>
+              <a:rPr sz="1300" b="0">
+                <a:solidFill>
+                  <a:srgbClr val="A6ACBA"/>
+                </a:solidFill>
+                <a:latin typeface="Helvetica Neue"/>
+              </a:rPr>
+              <a:t>1 por semana</a:t>
+            </a:r>
+          </a:p>
+        </p:txBody>
+      </p:sp>
+      <p:sp>
+        <p:nvSpPr>
+          <p:cNvPr id="18" name="Rectangle 17"/>
+          <p:cNvSpPr/>
+          <p:nvPr/>
+        </p:nvSpPr>
+        <p:spPr>
+          <a:xfrm>
+            <a:off x="685800" y="4700016"/>
+            <a:ext cx="10817352" cy="621792"/>
+          </a:xfrm>
+          <a:prstGeom prst="rect">
+            <a:avLst/>
+          </a:prstGeom>
+          <a:solidFill>
+            <a:srgbClr val="0B0D12"/>
+          </a:solidFill>
+          <a:ln>
+            <a:noFill/>
+          </a:ln>
+          <a:effectLst/>
+        </p:spPr>
+        <p:style>
+          <a:lnRef idx="1">
+            <a:schemeClr val="accent1"/>
+          </a:lnRef>
+          <a:fillRef idx="3">
+            <a:schemeClr val="accent1"/>
+          </a:fillRef>
+          <a:effectRef idx="2">
+            <a:schemeClr val="accent1"/>
+          </a:effectRef>
+          <a:fontRef idx="minor">
+            <a:schemeClr val="lt1"/>
+          </a:fontRef>
+        </p:style>
+        <p:txBody>
+          <a:bodyPr rtlCol="0" anchor="ctr"/>
+          <a:lstStyle/>
+          <a:p>
+            <a:pPr algn="ctr"/>
+          </a:p>
+        </p:txBody>
+      </p:sp>
+      <p:sp>
+        <p:nvSpPr>
+          <p:cNvPr id="19" name="TextBox 18"/>
+          <p:cNvSpPr txBox="1"/>
+          <p:nvPr/>
+        </p:nvSpPr>
+        <p:spPr>
+          <a:xfrm>
+            <a:off x="868680" y="4791456"/>
+            <a:ext cx="4846320" cy="621792"/>
+          </a:xfrm>
+          <a:prstGeom prst="rect">
+            <a:avLst/>
+          </a:prstGeom>
+          <a:noFill/>
+        </p:spPr>
+        <p:txBody>
+          <a:bodyPr wrap="square" anchor="t" lIns="0" rIns="0" tIns="0" bIns="0">
+            <a:spAutoFit/>
+          </a:bodyPr>
+          <a:lstStyle/>
+          <a:p>
+            <a:pPr algn="l">
+              <a:lnSpc>
+                <a:spcPct val="115000"/>
+              </a:lnSpc>
+            </a:pPr>
+            <a:r>
+              <a:rPr sz="1300" b="1">
+                <a:solidFill>
+                  <a:srgbClr val="FFFFFF"/>
+                </a:solidFill>
+                <a:latin typeface="Helvetica Neue"/>
+              </a:rPr>
+              <a:t>Participación en campañas</a:t>
+            </a:r>
+          </a:p>
+        </p:txBody>
+      </p:sp>
+      <p:sp>
+        <p:nvSpPr>
+          <p:cNvPr id="20" name="TextBox 19"/>
+          <p:cNvSpPr txBox="1"/>
+          <p:nvPr/>
+        </p:nvSpPr>
+        <p:spPr>
+          <a:xfrm>
+            <a:off x="5989320" y="4791456"/>
+            <a:ext cx="5422392" cy="621792"/>
+          </a:xfrm>
+          <a:prstGeom prst="rect">
+            <a:avLst/>
+          </a:prstGeom>
+          <a:noFill/>
+        </p:spPr>
+        <p:txBody>
+          <a:bodyPr wrap="square" anchor="t" lIns="0" rIns="0" tIns="0" bIns="0">
+            <a:spAutoFit/>
+          </a:bodyPr>
+          <a:lstStyle/>
+          <a:p>
+            <a:pPr algn="l">
+              <a:lnSpc>
+                <a:spcPct val="115000"/>
+              </a:lnSpc>
+            </a:pPr>
+            <a:r>
+              <a:rPr sz="1300" b="0">
+                <a:solidFill>
+                  <a:srgbClr val="A6ACBA"/>
+                </a:solidFill>
+                <a:latin typeface="Helvetica Neue"/>
+              </a:rPr>
+              <a:t>Cuando se solicite razonablemente</a:t>
+            </a:r>
+          </a:p>
+        </p:txBody>
+      </p:sp>
+      <p:sp>
+        <p:nvSpPr>
+          <p:cNvPr id="21" name="Rectangle 20"/>
+          <p:cNvSpPr/>
+          <p:nvPr/>
+        </p:nvSpPr>
+        <p:spPr>
+          <a:xfrm>
+            <a:off x="685800" y="5321808"/>
+            <a:ext cx="10817352" cy="621792"/>
+          </a:xfrm>
+          <a:prstGeom prst="rect">
+            <a:avLst/>
+          </a:prstGeom>
+          <a:solidFill>
+            <a:srgbClr val="141720"/>
+          </a:solidFill>
+          <a:ln>
+            <a:noFill/>
+          </a:ln>
+          <a:effectLst/>
+        </p:spPr>
+        <p:style>
+          <a:lnRef idx="1">
+            <a:schemeClr val="accent1"/>
+          </a:lnRef>
+          <a:fillRef idx="3">
+            <a:schemeClr val="accent1"/>
+          </a:fillRef>
+          <a:effectRef idx="2">
+            <a:schemeClr val="accent1"/>
+          </a:effectRef>
+          <a:fontRef idx="minor">
+            <a:schemeClr val="lt1"/>
+          </a:fontRef>
+        </p:style>
+        <p:txBody>
+          <a:bodyPr rtlCol="0" anchor="ctr"/>
+          <a:lstStyle/>
+          <a:p>
+            <a:pPr algn="ctr"/>
+          </a:p>
+        </p:txBody>
+      </p:sp>
+      <p:sp>
+        <p:nvSpPr>
+          <p:cNvPr id="22" name="TextBox 21"/>
+          <p:cNvSpPr txBox="1"/>
+          <p:nvPr/>
+        </p:nvSpPr>
+        <p:spPr>
+          <a:xfrm>
+            <a:off x="868680" y="5413248"/>
+            <a:ext cx="4846320" cy="621792"/>
+          </a:xfrm>
+          <a:prstGeom prst="rect">
+            <a:avLst/>
+          </a:prstGeom>
+          <a:noFill/>
+        </p:spPr>
+        <p:txBody>
+          <a:bodyPr wrap="square" anchor="t" lIns="0" rIns="0" tIns="0" bIns="0">
+            <a:spAutoFit/>
+          </a:bodyPr>
+          <a:lstStyle/>
+          <a:p>
+            <a:pPr algn="l">
+              <a:lnSpc>
+                <a:spcPct val="115000"/>
+              </a:lnSpc>
+            </a:pPr>
+            <a:r>
+              <a:rPr sz="1300" b="1">
+                <a:solidFill>
+                  <a:srgbClr val="FFFFFF"/>
+                </a:solidFill>
+                <a:latin typeface="Helvetica Neue"/>
+              </a:rPr>
+              <a:t>Aprobación de contenido</a:t>
+            </a:r>
+          </a:p>
+        </p:txBody>
+      </p:sp>
+      <p:sp>
+        <p:nvSpPr>
+          <p:cNvPr id="23" name="TextBox 22"/>
+          <p:cNvSpPr txBox="1"/>
+          <p:nvPr/>
+        </p:nvSpPr>
+        <p:spPr>
+          <a:xfrm>
+            <a:off x="5989320" y="5413248"/>
+            <a:ext cx="5422392" cy="621792"/>
+          </a:xfrm>
+          <a:prstGeom prst="rect">
+            <a:avLst/>
+          </a:prstGeom>
+          <a:noFill/>
+        </p:spPr>
+        <p:txBody>
+          <a:bodyPr wrap="square" anchor="t" lIns="0" rIns="0" tIns="0" bIns="0">
+            <a:spAutoFit/>
+          </a:bodyPr>
+          <a:lstStyle/>
+          <a:p>
+            <a:pPr algn="l">
+              <a:lnSpc>
+                <a:spcPct val="115000"/>
+              </a:lnSpc>
+            </a:pPr>
+            <a:r>
+              <a:rPr sz="1300" b="0">
+                <a:solidFill>
+                  <a:srgbClr val="A6ACBA"/>
+                </a:solidFill>
+                <a:latin typeface="Helvetica Neue"/>
+              </a:rPr>
+              <a:t>Solo necesaria por adelantado para campañas concretas señaladas</a:t>
+            </a:r>
+          </a:p>
+        </p:txBody>
+      </p:sp>
+      <p:cxnSp>
+        <p:nvCxnSpPr>
+          <p:cNvPr id="24" name="Connector 23"/>
+          <p:cNvCxnSpPr/>
+          <p:nvPr/>
+        </p:nvCxnSpPr>
+        <p:spPr>
+          <a:xfrm>
+            <a:off x="685800" y="2212848"/>
+            <a:ext cx="10817352" cy="0"/>
+          </a:xfrm>
+          <a:prstGeom prst="line">
+            <a:avLst/>
+          </a:prstGeom>
+          <a:ln w="12700">
+            <a:solidFill>
+              <a:srgbClr val="2A2E3A"/>
+            </a:solidFill>
+          </a:ln>
+        </p:spPr>
+        <p:style>
+          <a:lnRef idx="2">
+            <a:schemeClr val="accent1"/>
+          </a:lnRef>
+          <a:fillRef idx="0">
+            <a:schemeClr val="accent1"/>
+          </a:fillRef>
+          <a:effectRef idx="1">
+            <a:schemeClr val="accent1"/>
+          </a:effectRef>
+          <a:fontRef idx="minor">
+            <a:schemeClr val="tx1"/>
+          </a:fontRef>
+        </p:style>
+      </p:cxnSp>
       <p:pic>
         <p:nvPicPr>
-          <p:cNvPr id="6" name="Picture 5" descr="logo-head.png"/>
+          <p:cNvPr id="25" name="Picture 24" descr="logo-head.png"/>
           <p:cNvPicPr>
             <a:picLocks noChangeAspect="1"/>
           </p:cNvPicPr>
@@ -12066,7 +12813,7 @@
       </p:pic>
       <p:sp>
         <p:nvSpPr>
-          <p:cNvPr id="7" name="TextBox 6"/>
+          <p:cNvPr id="26" name="TextBox 25"/>
           <p:cNvSpPr txBox="1"/>
           <p:nvPr/>
         </p:nvSpPr>
@@ -12105,7 +12852,7 @@
       </p:sp>
       <p:sp>
         <p:nvSpPr>
-          <p:cNvPr id="8" name="TextBox 7"/>
+          <p:cNvPr id="27" name="TextBox 26"/>
           <p:cNvSpPr txBox="1"/>
           <p:nvPr/>
         </p:nvSpPr>
@@ -12144,7 +12891,7 @@
       </p:sp>
       <p:cxnSp>
         <p:nvCxnSpPr>
-          <p:cNvPr id="9" name="Connector 8"/>
+          <p:cNvPr id="28" name="Connector 27"/>
           <p:cNvCxnSpPr/>
           <p:nvPr/>
         </p:nvCxnSpPr>
@@ -12191,7 +12938,7 @@
     <p:bg>
       <p:bgPr>
         <a:solidFill>
-          <a:srgbClr val="0B0D12"/>
+          <a:srgbClr val="141720"/>
         </a:solidFill>
         <a:effectLst/>
       </p:bgPr>
@@ -12205,127 +12952,14 @@
       <p:grpSpPr/>
       <p:sp>
         <p:nvSpPr>
-          <p:cNvPr id="2" name="TextBox 1"/>
-          <p:cNvSpPr txBox="1"/>
-          <p:nvPr/>
-        </p:nvSpPr>
-        <p:spPr>
-          <a:xfrm>
-            <a:off x="685800" y="502920"/>
-            <a:ext cx="7315200" cy="365760"/>
-          </a:xfrm>
-          <a:prstGeom prst="rect">
-            <a:avLst/>
-          </a:prstGeom>
-          <a:noFill/>
-        </p:spPr>
-        <p:txBody>
-          <a:bodyPr wrap="square" anchor="t" lIns="0" rIns="0" tIns="0" bIns="0">
-            <a:spAutoFit/>
-          </a:bodyPr>
-          <a:lstStyle/>
-          <a:p>
-            <a:pPr algn="l">
-              <a:lnSpc>
-                <a:spcPct val="115000"/>
-              </a:lnSpc>
-            </a:pPr>
-            <a:r>
-              <a:rPr sz="1250" b="1">
-                <a:solidFill>
-                  <a:srgbClr val="4E9BF0"/>
-                </a:solidFill>
-                <a:latin typeface="Helvetica Neue"/>
-              </a:rPr>
-              <a:t>TU ROL</a:t>
-            </a:r>
-          </a:p>
-        </p:txBody>
-      </p:sp>
-      <p:sp>
-        <p:nvSpPr>
-          <p:cNvPr id="3" name="TextBox 2"/>
-          <p:cNvSpPr txBox="1"/>
-          <p:nvPr/>
-        </p:nvSpPr>
-        <p:spPr>
-          <a:xfrm>
-            <a:off x="685800" y="868680"/>
-            <a:ext cx="10515600" cy="914400"/>
-          </a:xfrm>
-          <a:prstGeom prst="rect">
-            <a:avLst/>
-          </a:prstGeom>
-          <a:noFill/>
-        </p:spPr>
-        <p:txBody>
-          <a:bodyPr wrap="square" anchor="t" lIns="0" rIns="0" tIns="0" bIns="0">
-            <a:spAutoFit/>
-          </a:bodyPr>
-          <a:lstStyle/>
-          <a:p>
-            <a:pPr algn="l">
-              <a:lnSpc>
-                <a:spcPct val="115000"/>
-              </a:lnSpc>
-            </a:pPr>
-            <a:r>
-              <a:rPr sz="2700" b="1">
-                <a:solidFill>
-                  <a:srgbClr val="FFFFFF"/>
-                </a:solidFill>
-                <a:latin typeface="Helvetica Neue"/>
-              </a:rPr>
-              <a:t>Mínimos de redes sociales</a:t>
-            </a:r>
-          </a:p>
-        </p:txBody>
-      </p:sp>
-      <p:cxnSp>
-        <p:nvCxnSpPr>
-          <p:cNvPr id="4" name="Connector 3"/>
-          <p:cNvCxnSpPr/>
-          <p:nvPr/>
-        </p:nvCxnSpPr>
-        <p:spPr>
-          <a:xfrm>
-            <a:off x="685800" y="1691640"/>
-            <a:ext cx="10817352" cy="0"/>
-          </a:xfrm>
-          <a:prstGeom prst="line">
-            <a:avLst/>
-          </a:prstGeom>
-          <a:ln w="12700">
-            <a:solidFill>
-              <a:srgbClr val="2A2E3A"/>
-            </a:solidFill>
-          </a:ln>
-        </p:spPr>
-        <p:style>
-          <a:lnRef idx="2">
-            <a:schemeClr val="accent1"/>
-          </a:lnRef>
-          <a:fillRef idx="0">
-            <a:schemeClr val="accent1"/>
-          </a:fillRef>
-          <a:effectRef idx="1">
-            <a:schemeClr val="accent1"/>
-          </a:effectRef>
-          <a:fontRef idx="minor">
-            <a:schemeClr val="tx1"/>
-          </a:fontRef>
-        </p:style>
-      </p:cxnSp>
-      <p:sp>
-        <p:nvSpPr>
-          <p:cNvPr id="5" name="Rectangle 4"/>
+          <p:cNvPr id="2" name="Rectangle 1"/>
           <p:cNvSpPr/>
           <p:nvPr/>
         </p:nvSpPr>
         <p:spPr>
           <a:xfrm>
-            <a:off x="685800" y="1920240"/>
-            <a:ext cx="10817352" cy="621792"/>
+            <a:off x="0" y="0"/>
+            <a:ext cx="164592" cy="6858000"/>
           </a:xfrm>
           <a:prstGeom prst="rect">
             <a:avLst/>
@@ -12362,14 +12996,131 @@
       </p:sp>
       <p:sp>
         <p:nvSpPr>
+          <p:cNvPr id="3" name="TextBox 2"/>
+          <p:cNvSpPr txBox="1"/>
+          <p:nvPr/>
+        </p:nvSpPr>
+        <p:spPr>
+          <a:xfrm>
+            <a:off x="868680" y="2286000"/>
+            <a:ext cx="1828800" cy="1097280"/>
+          </a:xfrm>
+          <a:prstGeom prst="rect">
+            <a:avLst/>
+          </a:prstGeom>
+          <a:noFill/>
+        </p:spPr>
+        <p:txBody>
+          <a:bodyPr wrap="square" anchor="t" lIns="0" rIns="0" tIns="0" bIns="0">
+            <a:spAutoFit/>
+          </a:bodyPr>
+          <a:lstStyle/>
+          <a:p>
+            <a:pPr algn="l">
+              <a:lnSpc>
+                <a:spcPct val="115000"/>
+              </a:lnSpc>
+            </a:pPr>
+            <a:r>
+              <a:rPr sz="6400" b="1">
+                <a:solidFill>
+                  <a:srgbClr val="4E9BF0"/>
+                </a:solidFill>
+                <a:latin typeface="Helvetica Neue"/>
+              </a:rPr>
+              <a:t>03</a:t>
+            </a:r>
+          </a:p>
+        </p:txBody>
+      </p:sp>
+      <p:sp>
+        <p:nvSpPr>
+          <p:cNvPr id="4" name="TextBox 3"/>
+          <p:cNvSpPr txBox="1"/>
+          <p:nvPr/>
+        </p:nvSpPr>
+        <p:spPr>
+          <a:xfrm>
+            <a:off x="896112" y="2103120"/>
+            <a:ext cx="7315200" cy="365760"/>
+          </a:xfrm>
+          <a:prstGeom prst="rect">
+            <a:avLst/>
+          </a:prstGeom>
+          <a:noFill/>
+        </p:spPr>
+        <p:txBody>
+          <a:bodyPr wrap="square" anchor="t" lIns="0" rIns="0" tIns="0" bIns="0">
+            <a:spAutoFit/>
+          </a:bodyPr>
+          <a:lstStyle/>
+          <a:p>
+            <a:pPr algn="l">
+              <a:lnSpc>
+                <a:spcPct val="115000"/>
+              </a:lnSpc>
+            </a:pPr>
+            <a:r>
+              <a:rPr sz="1250" b="1">
+                <a:solidFill>
+                  <a:srgbClr val="4E9BF0"/>
+                </a:solidFill>
+                <a:latin typeface="Helvetica Neue"/>
+              </a:rPr>
+              <a:t>COMISIÓN Y PAGOS</a:t>
+            </a:r>
+          </a:p>
+        </p:txBody>
+      </p:sp>
+      <p:sp>
+        <p:nvSpPr>
+          <p:cNvPr id="5" name="TextBox 4"/>
+          <p:cNvSpPr txBox="1"/>
+          <p:nvPr/>
+        </p:nvSpPr>
+        <p:spPr>
+          <a:xfrm>
+            <a:off x="868680" y="3429000"/>
+            <a:ext cx="9875520" cy="1097280"/>
+          </a:xfrm>
+          <a:prstGeom prst="rect">
+            <a:avLst/>
+          </a:prstGeom>
+          <a:noFill/>
+        </p:spPr>
+        <p:txBody>
+          <a:bodyPr wrap="square" anchor="t" lIns="0" rIns="0" tIns="0" bIns="0">
+            <a:spAutoFit/>
+          </a:bodyPr>
+          <a:lstStyle/>
+          <a:p>
+            <a:pPr algn="l">
+              <a:lnSpc>
+                <a:spcPct val="115000"/>
+              </a:lnSpc>
+            </a:pPr>
+            <a:r>
+              <a:rPr sz="3400" b="1">
+                <a:solidFill>
+                  <a:srgbClr val="FFFFFF"/>
+                </a:solidFill>
+                <a:latin typeface="Helvetica Neue"/>
+              </a:rPr>
+              <a:t>Cómo se mueve el dinero</a:t>
+            </a:r>
+          </a:p>
+        </p:txBody>
+      </p:sp>
+      <p:sp>
+        <p:nvSpPr>
           <p:cNvPr id="6" name="TextBox 5"/>
           <p:cNvSpPr txBox="1"/>
           <p:nvPr/>
         </p:nvSpPr>
         <p:spPr>
           <a:xfrm>
-            <a:off x="868680" y="2029968"/>
-            <a:ext cx="4846320" cy="621792"/>
+            <a:off x="868680" y="4251960"/>
+            <a:ext cx="8412480" cy="1097280"/>
           </a:xfrm>
           <a:prstGeom prst="rect">
             <a:avLst/>
@@ -12384,708 +13135,24 @@
           <a:p>
             <a:pPr algn="l">
               <a:lnSpc>
-                <a:spcPct val="115000"/>
-              </a:lnSpc>
-            </a:pPr>
-            <a:r>
-              <a:rPr sz="1250" b="1">
-                <a:solidFill>
-                  <a:srgbClr val="FFFFFF"/>
-                </a:solidFill>
-                <a:latin typeface="Helvetica Neue"/>
-              </a:rPr>
-              <a:t>Entregable</a:t>
-            </a:r>
-          </a:p>
-        </p:txBody>
-      </p:sp>
-      <p:sp>
-        <p:nvSpPr>
-          <p:cNvPr id="7" name="TextBox 6"/>
-          <p:cNvSpPr txBox="1"/>
-          <p:nvPr/>
-        </p:nvSpPr>
-        <p:spPr>
-          <a:xfrm>
-            <a:off x="5989320" y="2029968"/>
-            <a:ext cx="5422392" cy="621792"/>
-          </a:xfrm>
-          <a:prstGeom prst="rect">
-            <a:avLst/>
-          </a:prstGeom>
-          <a:noFill/>
-        </p:spPr>
-        <p:txBody>
-          <a:bodyPr wrap="square" anchor="t" lIns="0" rIns="0" tIns="0" bIns="0">
-            <a:spAutoFit/>
-          </a:bodyPr>
-          <a:lstStyle/>
-          <a:p>
-            <a:pPr algn="l">
-              <a:lnSpc>
-                <a:spcPct val="115000"/>
-              </a:lnSpc>
-            </a:pPr>
-            <a:r>
-              <a:rPr sz="1250" b="1">
-                <a:solidFill>
-                  <a:srgbClr val="FFFFFF"/>
-                </a:solidFill>
-                <a:latin typeface="Helvetica Neue"/>
-              </a:rPr>
-              <a:t>Requisito</a:t>
-            </a:r>
-          </a:p>
-        </p:txBody>
-      </p:sp>
-      <p:sp>
-        <p:nvSpPr>
-          <p:cNvPr id="8" name="Rectangle 7"/>
-          <p:cNvSpPr/>
-          <p:nvPr/>
-        </p:nvSpPr>
-        <p:spPr>
-          <a:xfrm>
-            <a:off x="685800" y="2542032"/>
-            <a:ext cx="10817352" cy="621792"/>
-          </a:xfrm>
-          <a:prstGeom prst="rect">
-            <a:avLst/>
-          </a:prstGeom>
-          <a:solidFill>
-            <a:srgbClr val="141720"/>
-          </a:solidFill>
-          <a:ln>
-            <a:noFill/>
-          </a:ln>
-          <a:effectLst/>
-        </p:spPr>
-        <p:style>
-          <a:lnRef idx="1">
-            <a:schemeClr val="accent1"/>
-          </a:lnRef>
-          <a:fillRef idx="3">
-            <a:schemeClr val="accent1"/>
-          </a:fillRef>
-          <a:effectRef idx="2">
-            <a:schemeClr val="accent1"/>
-          </a:effectRef>
-          <a:fontRef idx="minor">
-            <a:schemeClr val="lt1"/>
-          </a:fontRef>
-        </p:style>
-        <p:txBody>
-          <a:bodyPr rtlCol="0" anchor="ctr"/>
-          <a:lstStyle/>
-          <a:p>
-            <a:pPr algn="ctr"/>
-          </a:p>
-        </p:txBody>
-      </p:sp>
-      <p:sp>
-        <p:nvSpPr>
-          <p:cNvPr id="9" name="TextBox 8"/>
-          <p:cNvSpPr txBox="1"/>
-          <p:nvPr/>
-        </p:nvSpPr>
-        <p:spPr>
-          <a:xfrm>
-            <a:off x="868680" y="2633472"/>
-            <a:ext cx="4846320" cy="621792"/>
-          </a:xfrm>
-          <a:prstGeom prst="rect">
-            <a:avLst/>
-          </a:prstGeom>
-          <a:noFill/>
-        </p:spPr>
-        <p:txBody>
-          <a:bodyPr wrap="square" anchor="t" lIns="0" rIns="0" tIns="0" bIns="0">
-            <a:spAutoFit/>
-          </a:bodyPr>
-          <a:lstStyle/>
-          <a:p>
-            <a:pPr algn="l">
-              <a:lnSpc>
-                <a:spcPct val="115000"/>
-              </a:lnSpc>
-            </a:pPr>
-            <a:r>
-              <a:rPr sz="1300" b="1">
-                <a:solidFill>
-                  <a:srgbClr val="FFFFFF"/>
-                </a:solidFill>
-                <a:latin typeface="Helvetica Neue"/>
-              </a:rPr>
-              <a:t>Publicaciones / Reels de Instagram</a:t>
-            </a:r>
-          </a:p>
-        </p:txBody>
-      </p:sp>
-      <p:sp>
-        <p:nvSpPr>
-          <p:cNvPr id="10" name="TextBox 9"/>
-          <p:cNvSpPr txBox="1"/>
-          <p:nvPr/>
-        </p:nvSpPr>
-        <p:spPr>
-          <a:xfrm>
-            <a:off x="5989320" y="2633472"/>
-            <a:ext cx="5422392" cy="621792"/>
-          </a:xfrm>
-          <a:prstGeom prst="rect">
-            <a:avLst/>
-          </a:prstGeom>
-          <a:noFill/>
-        </p:spPr>
-        <p:txBody>
-          <a:bodyPr wrap="square" anchor="t" lIns="0" rIns="0" tIns="0" bIns="0">
-            <a:spAutoFit/>
-          </a:bodyPr>
-          <a:lstStyle/>
-          <a:p>
-            <a:pPr algn="l">
-              <a:lnSpc>
-                <a:spcPct val="115000"/>
-              </a:lnSpc>
-            </a:pPr>
-            <a:r>
-              <a:rPr sz="1300" b="0">
+                <a:spcPct val="135000"/>
+              </a:lnSpc>
+            </a:pPr>
+            <a:r>
+              <a:rPr sz="1550" b="0">
                 <a:solidFill>
                   <a:srgbClr val="A6ACBA"/>
                 </a:solidFill>
                 <a:latin typeface="Helvetica Neue"/>
               </a:rPr>
-              <a:t>2 por semana</a:t>
-            </a:r>
-          </a:p>
-        </p:txBody>
-      </p:sp>
-      <p:sp>
-        <p:nvSpPr>
-          <p:cNvPr id="11" name="Rectangle 10"/>
-          <p:cNvSpPr/>
-          <p:nvPr/>
-        </p:nvSpPr>
-        <p:spPr>
-          <a:xfrm>
-            <a:off x="685800" y="3163824"/>
-            <a:ext cx="10817352" cy="621792"/>
-          </a:xfrm>
-          <a:prstGeom prst="rect">
-            <a:avLst/>
-          </a:prstGeom>
-          <a:solidFill>
-            <a:srgbClr val="0B0D12"/>
-          </a:solidFill>
-          <a:ln>
-            <a:noFill/>
-          </a:ln>
-          <a:effectLst/>
-        </p:spPr>
-        <p:style>
-          <a:lnRef idx="1">
-            <a:schemeClr val="accent1"/>
-          </a:lnRef>
-          <a:fillRef idx="3">
-            <a:schemeClr val="accent1"/>
-          </a:fillRef>
-          <a:effectRef idx="2">
-            <a:schemeClr val="accent1"/>
-          </a:effectRef>
-          <a:fontRef idx="minor">
-            <a:schemeClr val="lt1"/>
-          </a:fontRef>
-        </p:style>
-        <p:txBody>
-          <a:bodyPr rtlCol="0" anchor="ctr"/>
-          <a:lstStyle/>
-          <a:p>
-            <a:pPr algn="ctr"/>
-          </a:p>
-        </p:txBody>
-      </p:sp>
-      <p:sp>
-        <p:nvSpPr>
-          <p:cNvPr id="12" name="TextBox 11"/>
-          <p:cNvSpPr txBox="1"/>
-          <p:nvPr/>
-        </p:nvSpPr>
-        <p:spPr>
-          <a:xfrm>
-            <a:off x="868680" y="3255264"/>
-            <a:ext cx="4846320" cy="621792"/>
-          </a:xfrm>
-          <a:prstGeom prst="rect">
-            <a:avLst/>
-          </a:prstGeom>
-          <a:noFill/>
-        </p:spPr>
-        <p:txBody>
-          <a:bodyPr wrap="square" anchor="t" lIns="0" rIns="0" tIns="0" bIns="0">
-            <a:spAutoFit/>
-          </a:bodyPr>
-          <a:lstStyle/>
-          <a:p>
-            <a:pPr algn="l">
-              <a:lnSpc>
-                <a:spcPct val="115000"/>
-              </a:lnSpc>
-            </a:pPr>
-            <a:r>
-              <a:rPr sz="1300" b="1">
-                <a:solidFill>
-                  <a:srgbClr val="FFFFFF"/>
-                </a:solidFill>
-                <a:latin typeface="Helvetica Neue"/>
-              </a:rPr>
-              <a:t>Historias de Instagram</a:t>
-            </a:r>
-          </a:p>
-        </p:txBody>
-      </p:sp>
-      <p:sp>
-        <p:nvSpPr>
-          <p:cNvPr id="13" name="TextBox 12"/>
-          <p:cNvSpPr txBox="1"/>
-          <p:nvPr/>
-        </p:nvSpPr>
-        <p:spPr>
-          <a:xfrm>
-            <a:off x="5989320" y="3255264"/>
-            <a:ext cx="5422392" cy="621792"/>
-          </a:xfrm>
-          <a:prstGeom prst="rect">
-            <a:avLst/>
-          </a:prstGeom>
-          <a:noFill/>
-        </p:spPr>
-        <p:txBody>
-          <a:bodyPr wrap="square" anchor="t" lIns="0" rIns="0" tIns="0" bIns="0">
-            <a:spAutoFit/>
-          </a:bodyPr>
-          <a:lstStyle/>
-          <a:p>
-            <a:pPr algn="l">
-              <a:lnSpc>
-                <a:spcPct val="115000"/>
-              </a:lnSpc>
-            </a:pPr>
-            <a:r>
-              <a:rPr sz="1300" b="0">
-                <a:solidFill>
-                  <a:srgbClr val="A6ACBA"/>
-                </a:solidFill>
-                <a:latin typeface="Helvetica Neue"/>
-              </a:rPr>
-              <a:t>3 por semana</a:t>
-            </a:r>
-          </a:p>
-        </p:txBody>
-      </p:sp>
-      <p:sp>
-        <p:nvSpPr>
-          <p:cNvPr id="14" name="Rectangle 13"/>
-          <p:cNvSpPr/>
-          <p:nvPr/>
-        </p:nvSpPr>
-        <p:spPr>
-          <a:xfrm>
-            <a:off x="685800" y="3785616"/>
-            <a:ext cx="10817352" cy="621792"/>
-          </a:xfrm>
-          <a:prstGeom prst="rect">
-            <a:avLst/>
-          </a:prstGeom>
-          <a:solidFill>
-            <a:srgbClr val="141720"/>
-          </a:solidFill>
-          <a:ln>
-            <a:noFill/>
-          </a:ln>
-          <a:effectLst/>
-        </p:spPr>
-        <p:style>
-          <a:lnRef idx="1">
-            <a:schemeClr val="accent1"/>
-          </a:lnRef>
-          <a:fillRef idx="3">
-            <a:schemeClr val="accent1"/>
-          </a:fillRef>
-          <a:effectRef idx="2">
-            <a:schemeClr val="accent1"/>
-          </a:effectRef>
-          <a:fontRef idx="minor">
-            <a:schemeClr val="lt1"/>
-          </a:fontRef>
-        </p:style>
-        <p:txBody>
-          <a:bodyPr rtlCol="0" anchor="ctr"/>
-          <a:lstStyle/>
-          <a:p>
-            <a:pPr algn="ctr"/>
-          </a:p>
-        </p:txBody>
-      </p:sp>
-      <p:sp>
-        <p:nvSpPr>
-          <p:cNvPr id="15" name="TextBox 14"/>
-          <p:cNvSpPr txBox="1"/>
-          <p:nvPr/>
-        </p:nvSpPr>
-        <p:spPr>
-          <a:xfrm>
-            <a:off x="868680" y="3877056"/>
-            <a:ext cx="4846320" cy="621792"/>
-          </a:xfrm>
-          <a:prstGeom prst="rect">
-            <a:avLst/>
-          </a:prstGeom>
-          <a:noFill/>
-        </p:spPr>
-        <p:txBody>
-          <a:bodyPr wrap="square" anchor="t" lIns="0" rIns="0" tIns="0" bIns="0">
-            <a:spAutoFit/>
-          </a:bodyPr>
-          <a:lstStyle/>
-          <a:p>
-            <a:pPr algn="l">
-              <a:lnSpc>
-                <a:spcPct val="115000"/>
-              </a:lnSpc>
-            </a:pPr>
-            <a:r>
-              <a:rPr sz="1300" b="1">
-                <a:solidFill>
-                  <a:srgbClr val="FFFFFF"/>
-                </a:solidFill>
-                <a:latin typeface="Helvetica Neue"/>
-              </a:rPr>
-              <a:t>Videos de TikTok</a:t>
-            </a:r>
-          </a:p>
-        </p:txBody>
-      </p:sp>
-      <p:sp>
-        <p:nvSpPr>
-          <p:cNvPr id="16" name="TextBox 15"/>
-          <p:cNvSpPr txBox="1"/>
-          <p:nvPr/>
-        </p:nvSpPr>
-        <p:spPr>
-          <a:xfrm>
-            <a:off x="5989320" y="3877056"/>
-            <a:ext cx="5422392" cy="621792"/>
-          </a:xfrm>
-          <a:prstGeom prst="rect">
-            <a:avLst/>
-          </a:prstGeom>
-          <a:noFill/>
-        </p:spPr>
-        <p:txBody>
-          <a:bodyPr wrap="square" anchor="t" lIns="0" rIns="0" tIns="0" bIns="0">
-            <a:spAutoFit/>
-          </a:bodyPr>
-          <a:lstStyle/>
-          <a:p>
-            <a:pPr algn="l">
-              <a:lnSpc>
-                <a:spcPct val="115000"/>
-              </a:lnSpc>
-            </a:pPr>
-            <a:r>
-              <a:rPr sz="1300" b="0">
-                <a:solidFill>
-                  <a:srgbClr val="A6ACBA"/>
-                </a:solidFill>
-                <a:latin typeface="Helvetica Neue"/>
-              </a:rPr>
-              <a:t>1 por semana</a:t>
-            </a:r>
-          </a:p>
-        </p:txBody>
-      </p:sp>
-      <p:sp>
-        <p:nvSpPr>
-          <p:cNvPr id="17" name="Rectangle 16"/>
-          <p:cNvSpPr/>
-          <p:nvPr/>
-        </p:nvSpPr>
-        <p:spPr>
-          <a:xfrm>
-            <a:off x="685800" y="4407408"/>
-            <a:ext cx="10817352" cy="621792"/>
-          </a:xfrm>
-          <a:prstGeom prst="rect">
-            <a:avLst/>
-          </a:prstGeom>
-          <a:solidFill>
-            <a:srgbClr val="0B0D12"/>
-          </a:solidFill>
-          <a:ln>
-            <a:noFill/>
-          </a:ln>
-          <a:effectLst/>
-        </p:spPr>
-        <p:style>
-          <a:lnRef idx="1">
-            <a:schemeClr val="accent1"/>
-          </a:lnRef>
-          <a:fillRef idx="3">
-            <a:schemeClr val="accent1"/>
-          </a:fillRef>
-          <a:effectRef idx="2">
-            <a:schemeClr val="accent1"/>
-          </a:effectRef>
-          <a:fontRef idx="minor">
-            <a:schemeClr val="lt1"/>
-          </a:fontRef>
-        </p:style>
-        <p:txBody>
-          <a:bodyPr rtlCol="0" anchor="ctr"/>
-          <a:lstStyle/>
-          <a:p>
-            <a:pPr algn="ctr"/>
-          </a:p>
-        </p:txBody>
-      </p:sp>
-      <p:sp>
-        <p:nvSpPr>
-          <p:cNvPr id="18" name="TextBox 17"/>
-          <p:cNvSpPr txBox="1"/>
-          <p:nvPr/>
-        </p:nvSpPr>
-        <p:spPr>
-          <a:xfrm>
-            <a:off x="868680" y="4498848"/>
-            <a:ext cx="4846320" cy="621792"/>
-          </a:xfrm>
-          <a:prstGeom prst="rect">
-            <a:avLst/>
-          </a:prstGeom>
-          <a:noFill/>
-        </p:spPr>
-        <p:txBody>
-          <a:bodyPr wrap="square" anchor="t" lIns="0" rIns="0" tIns="0" bIns="0">
-            <a:spAutoFit/>
-          </a:bodyPr>
-          <a:lstStyle/>
-          <a:p>
-            <a:pPr algn="l">
-              <a:lnSpc>
-                <a:spcPct val="115000"/>
-              </a:lnSpc>
-            </a:pPr>
-            <a:r>
-              <a:rPr sz="1300" b="1">
-                <a:solidFill>
-                  <a:srgbClr val="FFFFFF"/>
-                </a:solidFill>
-                <a:latin typeface="Helvetica Neue"/>
-              </a:rPr>
-              <a:t>Participación en campañas</a:t>
-            </a:r>
-          </a:p>
-        </p:txBody>
-      </p:sp>
-      <p:sp>
-        <p:nvSpPr>
-          <p:cNvPr id="19" name="TextBox 18"/>
-          <p:cNvSpPr txBox="1"/>
-          <p:nvPr/>
-        </p:nvSpPr>
-        <p:spPr>
-          <a:xfrm>
-            <a:off x="5989320" y="4498848"/>
-            <a:ext cx="5422392" cy="621792"/>
-          </a:xfrm>
-          <a:prstGeom prst="rect">
-            <a:avLst/>
-          </a:prstGeom>
-          <a:noFill/>
-        </p:spPr>
-        <p:txBody>
-          <a:bodyPr wrap="square" anchor="t" lIns="0" rIns="0" tIns="0" bIns="0">
-            <a:spAutoFit/>
-          </a:bodyPr>
-          <a:lstStyle/>
-          <a:p>
-            <a:pPr algn="l">
-              <a:lnSpc>
-                <a:spcPct val="115000"/>
-              </a:lnSpc>
-            </a:pPr>
-            <a:r>
-              <a:rPr sz="1300" b="0">
-                <a:solidFill>
-                  <a:srgbClr val="A6ACBA"/>
-                </a:solidFill>
-                <a:latin typeface="Helvetica Neue"/>
-              </a:rPr>
-              <a:t>Cuando se solicite razonablemente</a:t>
-            </a:r>
-          </a:p>
-        </p:txBody>
-      </p:sp>
-      <p:sp>
-        <p:nvSpPr>
-          <p:cNvPr id="20" name="Rectangle 19"/>
-          <p:cNvSpPr/>
-          <p:nvPr/>
-        </p:nvSpPr>
-        <p:spPr>
-          <a:xfrm>
-            <a:off x="685800" y="5029200"/>
-            <a:ext cx="10817352" cy="621792"/>
-          </a:xfrm>
-          <a:prstGeom prst="rect">
-            <a:avLst/>
-          </a:prstGeom>
-          <a:solidFill>
-            <a:srgbClr val="141720"/>
-          </a:solidFill>
-          <a:ln>
-            <a:noFill/>
-          </a:ln>
-          <a:effectLst/>
-        </p:spPr>
-        <p:style>
-          <a:lnRef idx="1">
-            <a:schemeClr val="accent1"/>
-          </a:lnRef>
-          <a:fillRef idx="3">
-            <a:schemeClr val="accent1"/>
-          </a:fillRef>
-          <a:effectRef idx="2">
-            <a:schemeClr val="accent1"/>
-          </a:effectRef>
-          <a:fontRef idx="minor">
-            <a:schemeClr val="lt1"/>
-          </a:fontRef>
-        </p:style>
-        <p:txBody>
-          <a:bodyPr rtlCol="0" anchor="ctr"/>
-          <a:lstStyle/>
-          <a:p>
-            <a:pPr algn="ctr"/>
-          </a:p>
-        </p:txBody>
-      </p:sp>
-      <p:sp>
-        <p:nvSpPr>
-          <p:cNvPr id="21" name="TextBox 20"/>
-          <p:cNvSpPr txBox="1"/>
-          <p:nvPr/>
-        </p:nvSpPr>
-        <p:spPr>
-          <a:xfrm>
-            <a:off x="868680" y="5120640"/>
-            <a:ext cx="4846320" cy="621792"/>
-          </a:xfrm>
-          <a:prstGeom prst="rect">
-            <a:avLst/>
-          </a:prstGeom>
-          <a:noFill/>
-        </p:spPr>
-        <p:txBody>
-          <a:bodyPr wrap="square" anchor="t" lIns="0" rIns="0" tIns="0" bIns="0">
-            <a:spAutoFit/>
-          </a:bodyPr>
-          <a:lstStyle/>
-          <a:p>
-            <a:pPr algn="l">
-              <a:lnSpc>
-                <a:spcPct val="115000"/>
-              </a:lnSpc>
-            </a:pPr>
-            <a:r>
-              <a:rPr sz="1300" b="1">
-                <a:solidFill>
-                  <a:srgbClr val="FFFFFF"/>
-                </a:solidFill>
-                <a:latin typeface="Helvetica Neue"/>
-              </a:rPr>
-              <a:t>Aprobación de contenido</a:t>
-            </a:r>
-          </a:p>
-        </p:txBody>
-      </p:sp>
-      <p:sp>
-        <p:nvSpPr>
-          <p:cNvPr id="22" name="TextBox 21"/>
-          <p:cNvSpPr txBox="1"/>
-          <p:nvPr/>
-        </p:nvSpPr>
-        <p:spPr>
-          <a:xfrm>
-            <a:off x="5989320" y="5120640"/>
-            <a:ext cx="5422392" cy="621792"/>
-          </a:xfrm>
-          <a:prstGeom prst="rect">
-            <a:avLst/>
-          </a:prstGeom>
-          <a:noFill/>
-        </p:spPr>
-        <p:txBody>
-          <a:bodyPr wrap="square" anchor="t" lIns="0" rIns="0" tIns="0" bIns="0">
-            <a:spAutoFit/>
-          </a:bodyPr>
-          <a:lstStyle/>
-          <a:p>
-            <a:pPr algn="l">
-              <a:lnSpc>
-                <a:spcPct val="115000"/>
-              </a:lnSpc>
-            </a:pPr>
-            <a:r>
-              <a:rPr sz="1300" b="0">
-                <a:solidFill>
-                  <a:srgbClr val="A6ACBA"/>
-                </a:solidFill>
-                <a:latin typeface="Helvetica Neue"/>
-              </a:rPr>
-              <a:t>Solo necesaria por adelantado para campañas concretas señaladas</a:t>
-            </a:r>
-          </a:p>
-        </p:txBody>
-      </p:sp>
-      <p:cxnSp>
-        <p:nvCxnSpPr>
-          <p:cNvPr id="23" name="Connector 22"/>
-          <p:cNvCxnSpPr/>
-          <p:nvPr/>
-        </p:nvCxnSpPr>
-        <p:spPr>
-          <a:xfrm>
-            <a:off x="685800" y="1920240"/>
-            <a:ext cx="10817352" cy="0"/>
-          </a:xfrm>
-          <a:prstGeom prst="line">
-            <a:avLst/>
-          </a:prstGeom>
-          <a:ln w="12700">
-            <a:solidFill>
-              <a:srgbClr val="2A2E3A"/>
-            </a:solidFill>
-          </a:ln>
-        </p:spPr>
-        <p:style>
-          <a:lnRef idx="2">
-            <a:schemeClr val="accent1"/>
-          </a:lnRef>
-          <a:fillRef idx="0">
-            <a:schemeClr val="accent1"/>
-          </a:fillRef>
-          <a:effectRef idx="1">
-            <a:schemeClr val="accent1"/>
-          </a:effectRef>
-          <a:fontRef idx="minor">
-            <a:schemeClr val="tx1"/>
-          </a:fontRef>
-        </p:style>
-      </p:cxnSp>
+              <a:t>Presentación de clientes, comisión y el pago semanal, en términos claros.</a:t>
+            </a:r>
+          </a:p>
+        </p:txBody>
+      </p:sp>
       <p:pic>
         <p:nvPicPr>
-          <p:cNvPr id="24" name="Picture 23" descr="logo-head.png"/>
+          <p:cNvPr id="7" name="Picture 6" descr="logo-head.png"/>
           <p:cNvPicPr>
             <a:picLocks noChangeAspect="1"/>
           </p:cNvPicPr>
@@ -13109,7 +13176,7 @@
       </p:pic>
       <p:sp>
         <p:nvSpPr>
-          <p:cNvPr id="25" name="TextBox 24"/>
+          <p:cNvPr id="8" name="TextBox 7"/>
           <p:cNvSpPr txBox="1"/>
           <p:nvPr/>
         </p:nvSpPr>
@@ -13148,7 +13215,7 @@
       </p:sp>
       <p:sp>
         <p:nvSpPr>
-          <p:cNvPr id="26" name="TextBox 25"/>
+          <p:cNvPr id="9" name="TextBox 8"/>
           <p:cNvSpPr txBox="1"/>
           <p:nvPr/>
         </p:nvSpPr>
@@ -13180,14 +13247,14 @@
                 </a:solidFill>
                 <a:latin typeface="Helvetica Neue"/>
               </a:rPr>
-              <a:t>Tu rol   ·   09 / 20</a:t>
+              <a:t>Comisión y pagos   ·   09 / 20</a:t>
             </a:r>
           </a:p>
         </p:txBody>
       </p:sp>
       <p:cxnSp>
         <p:nvCxnSpPr>
-          <p:cNvPr id="27" name="Connector 26"/>
+          <p:cNvPr id="10" name="Connector 9"/>
           <p:cNvCxnSpPr/>
           <p:nvPr/>
         </p:nvCxnSpPr>

--- a/zebraish-christian-onboarding-es.pptx
+++ b/zebraish-christian-onboarding-es.pptx
@@ -3536,7 +3536,7 @@
                 </a:solidFill>
                 <a:latin typeface="Helvetica Neue"/>
               </a:rPr>
-              <a:t>Presentación de incorporación — complementaria al Acuerdo de Colaboración Oficial</a:t>
+              <a:t>Presentación de incorporación, complementaria al Acuerdo de Colaboración Oficial</a:t>
             </a:r>
           </a:p>
         </p:txBody>
@@ -3640,7 +3640,7 @@
                 </a:solidFill>
                 <a:latin typeface="Helvetica Neue"/>
               </a:rPr>
-              <a:t>Presentación de clientes — sin código de referido</a:t>
+              <a:t>Presentación de clientes: sin código de referido</a:t>
             </a:r>
           </a:p>
         </p:txBody>
@@ -3717,7 +3717,7 @@
                 </a:solidFill>
                 <a:latin typeface="Helvetica Neue"/>
               </a:rPr>
-              <a:t>—  </a:t>
+              <a:t>•  </a:t>
             </a:r>
             <a:r>
               <a:rPr sz="1550">
@@ -3745,7 +3745,7 @@
                 </a:solidFill>
                 <a:latin typeface="Helvetica Neue"/>
               </a:rPr>
-              <a:t>—  </a:t>
+              <a:t>•  </a:t>
             </a:r>
             <a:r>
               <a:rPr sz="1550">
@@ -3773,7 +3773,7 @@
                 </a:solidFill>
                 <a:latin typeface="Helvetica Neue"/>
               </a:rPr>
-              <a:t>—  </a:t>
+              <a:t>•  </a:t>
             </a:r>
             <a:r>
               <a:rPr sz="1550">
@@ -4292,7 +4292,7 @@
                 </a:solidFill>
                 <a:latin typeface="Helvetica Neue"/>
               </a:rPr>
-              <a:t>día de pago — revisado y enviado por transferencia bancaria</a:t>
+              <a:t>día de pago, revisado y enviado por transferencia bancaria</a:t>
             </a:r>
           </a:p>
         </p:txBody>
@@ -4616,7 +4616,7 @@
                 </a:solidFill>
                 <a:latin typeface="Helvetica Neue"/>
               </a:rPr>
-              <a:t>Pago semanal — cómo funciona</a:t>
+              <a:t>Pago semanal: cómo funciona</a:t>
             </a:r>
           </a:p>
         </p:txBody>
@@ -5736,7 +5736,7 @@
                 </a:solidFill>
                 <a:latin typeface="Helvetica Neue"/>
               </a:rPr>
-              <a:t>—  </a:t>
+              <a:t>•  </a:t>
             </a:r>
             <a:r>
               <a:rPr sz="1550">
@@ -5764,7 +5764,7 @@
                 </a:solidFill>
                 <a:latin typeface="Helvetica Neue"/>
               </a:rPr>
-              <a:t>—  </a:t>
+              <a:t>•  </a:t>
             </a:r>
             <a:r>
               <a:rPr sz="1550">
@@ -5792,7 +5792,7 @@
                 </a:solidFill>
                 <a:latin typeface="Helvetica Neue"/>
               </a:rPr>
-              <a:t>—  </a:t>
+              <a:t>•  </a:t>
             </a:r>
             <a:r>
               <a:rPr sz="1550">
@@ -5801,7 +5801,7 @@
                 </a:solidFill>
                 <a:latin typeface="Helvetica Neue"/>
               </a:rPr>
-              <a:t>Se está construyendo junto con el Portal de Proyectos; Joshua confirmará cuando esté disponible — mientras tanto, un resumen semanal por escrito sirve de puente.</a:t>
+              <a:t>Se está construyendo junto con el Portal de Proyectos; Joshua confirmará cuando esté disponible. Mientras tanto, un resumen semanal por escrito sirve de puente.</a:t>
             </a:r>
           </a:p>
         </p:txBody>
@@ -6482,7 +6482,7 @@
                 </a:solidFill>
                 <a:latin typeface="Helvetica Neue"/>
               </a:rPr>
-              <a:t>—  </a:t>
+              <a:t>•  </a:t>
             </a:r>
             <a:r>
               <a:rPr sz="1550">
@@ -6510,7 +6510,7 @@
                 </a:solidFill>
                 <a:latin typeface="Helvetica Neue"/>
               </a:rPr>
-              <a:t>—  </a:t>
+              <a:t>•  </a:t>
             </a:r>
             <a:r>
               <a:rPr sz="1550">
@@ -6538,7 +6538,7 @@
                 </a:solidFill>
                 <a:latin typeface="Helvetica Neue"/>
               </a:rPr>
-              <a:t>—  </a:t>
+              <a:t>•  </a:t>
             </a:r>
             <a:r>
               <a:rPr sz="1550">
@@ -6566,7 +6566,7 @@
                 </a:solidFill>
                 <a:latin typeface="Helvetica Neue"/>
               </a:rPr>
-              <a:t>—  </a:t>
+              <a:t>•  </a:t>
             </a:r>
             <a:r>
               <a:rPr sz="1550">
@@ -6594,7 +6594,7 @@
                 </a:solidFill>
                 <a:latin typeface="Helvetica Neue"/>
               </a:rPr>
-              <a:t>—  </a:t>
+              <a:t>•  </a:t>
             </a:r>
             <a:r>
               <a:rPr sz="1550">
@@ -6921,7 +6921,7 @@
                 </a:solidFill>
                 <a:latin typeface="Helvetica Neue"/>
               </a:rPr>
-              <a:t>—  </a:t>
+              <a:t>•  </a:t>
             </a:r>
             <a:r>
               <a:rPr sz="1550">
@@ -6949,7 +6949,7 @@
                 </a:solidFill>
                 <a:latin typeface="Helvetica Neue"/>
               </a:rPr>
-              <a:t>—  </a:t>
+              <a:t>•  </a:t>
             </a:r>
             <a:r>
               <a:rPr sz="1550">
@@ -6977,7 +6977,7 @@
                 </a:solidFill>
                 <a:latin typeface="Helvetica Neue"/>
               </a:rPr>
-              <a:t>—  </a:t>
+              <a:t>•  </a:t>
             </a:r>
             <a:r>
               <a:rPr sz="1550">
@@ -7005,7 +7005,7 @@
                 </a:solidFill>
                 <a:latin typeface="Helvetica Neue"/>
               </a:rPr>
-              <a:t>—  </a:t>
+              <a:t>•  </a:t>
             </a:r>
             <a:r>
               <a:rPr sz="1550">
@@ -8375,7 +8375,7 @@
                 </a:solidFill>
                 <a:latin typeface="Helvetica Neue"/>
               </a:rPr>
-              <a:t>—  </a:t>
+              <a:t>•  </a:t>
             </a:r>
             <a:r>
               <a:rPr sz="1550">
@@ -8403,7 +8403,7 @@
                 </a:solidFill>
                 <a:latin typeface="Helvetica Neue"/>
               </a:rPr>
-              <a:t>—  </a:t>
+              <a:t>•  </a:t>
             </a:r>
             <a:r>
               <a:rPr sz="1550">
@@ -8431,7 +8431,7 @@
                 </a:solidFill>
                 <a:latin typeface="Helvetica Neue"/>
               </a:rPr>
-              <a:t>—  </a:t>
+              <a:t>•  </a:t>
             </a:r>
             <a:r>
               <a:rPr sz="1550">
@@ -8792,7 +8792,7 @@
                 </a:solidFill>
                 <a:latin typeface="Helvetica Neue"/>
               </a:rPr>
-              <a:t>Un adelanto, no el trabajo actual — referencias de estilismo para la línea de Fashion, que se lanza pronto. Patrones y texturas inspirados en animales, reinterpretados para una gama premium. Tu rol se amplía para incluir esto en cuanto esté disponible; por ahora, el foco es Zebraish Studio.</a:t>
+              <a:t>Un adelanto, no el trabajo actual: referencias de estilismo para la línea de Fashion, que se lanza pronto. Patrones y texturas inspirados en animales, reinterpretados para una gama premium. Tu rol se amplía para incluir esto en cuanto esté disponible; por ahora, el foco es Zebraish Studio.</a:t>
             </a:r>
           </a:p>
         </p:txBody>
@@ -9537,7 +9537,7 @@
                 </a:solidFill>
                 <a:latin typeface="Helvetica Neue"/>
               </a:rPr>
-              <a:t>Joshua Bankole — j0shbankole19@gmail.com — +234 816 532 0780</a:t>
+              <a:t>Joshua Bankole · j0shbankole19@gmail.com · +234 816 532 0780</a:t>
             </a:r>
           </a:p>
         </p:txBody>
@@ -9615,7 +9615,7 @@
                 </a:solidFill>
                 <a:latin typeface="Helvetica Neue"/>
               </a:rPr>
-              <a:t>Christian Prieto — +34 631 53 71 36 — Barcelona, España</a:t>
+              <a:t>Christian Prieto · +34 631 53 71 36 · Barcelona, España</a:t>
             </a:r>
           </a:p>
         </p:txBody>
@@ -10011,7 +10011,7 @@
                 </a:solidFill>
                 <a:latin typeface="Helvetica Neue"/>
               </a:rPr>
-              <a:t>—  </a:t>
+              <a:t>•  </a:t>
             </a:r>
             <a:r>
               <a:rPr sz="1550">
@@ -10039,7 +10039,7 @@
                 </a:solidFill>
                 <a:latin typeface="Helvetica Neue"/>
               </a:rPr>
-              <a:t>—  </a:t>
+              <a:t>•  </a:t>
             </a:r>
             <a:r>
               <a:rPr sz="1550">
@@ -10067,7 +10067,7 @@
                 </a:solidFill>
                 <a:latin typeface="Helvetica Neue"/>
               </a:rPr>
-              <a:t>—  </a:t>
+              <a:t>•  </a:t>
             </a:r>
             <a:r>
               <a:rPr sz="1550">
@@ -10095,7 +10095,7 @@
                 </a:solidFill>
                 <a:latin typeface="Helvetica Neue"/>
               </a:rPr>
-              <a:t>—  </a:t>
+              <a:t>•  </a:t>
             </a:r>
             <a:r>
               <a:rPr sz="1550">
@@ -10422,7 +10422,7 @@
                 </a:solidFill>
                 <a:latin typeface="Helvetica Neue"/>
               </a:rPr>
-              <a:t>—  </a:t>
+              <a:t>•  </a:t>
             </a:r>
             <a:r>
               <a:rPr sz="1550">
@@ -10431,7 +10431,7 @@
                 </a:solidFill>
                 <a:latin typeface="Helvetica Neue"/>
               </a:rPr>
-              <a:t>Te incorporas como Colaborador Oficial de Zebraish — y ahora mismo, tu trabajo es Studio: representarlo, generar reconocimiento para él y traer activamente clientes para él, porque eso es con lo que Zebraish está arrancando.</a:t>
+              <a:t>Te incorporas como Colaborador Oficial de Zebraish, y ahora mismo, tu trabajo es Studio: representarlo, generar reconocimiento para él y traer activamente clientes para él, porque eso es con lo que Zebraish está arrancando.</a:t>
             </a:r>
           </a:p>
           <a:p>
@@ -10450,7 +10450,7 @@
                 </a:solidFill>
                 <a:latin typeface="Helvetica Neue"/>
               </a:rPr>
-              <a:t>—  </a:t>
+              <a:t>•  </a:t>
             </a:r>
             <a:r>
               <a:rPr sz="1550">
@@ -10459,7 +10459,7 @@
                 </a:solidFill>
                 <a:latin typeface="Helvetica Neue"/>
               </a:rPr>
-              <a:t>No necesitas ser una persona de tecnología para hacerlo bien. Tu audiencia confía en ti — ese es el activo. Dirige a la gente hacia Zebraish Studio, explica qué hace en términos simples, y haz la presentación.</a:t>
+              <a:t>No necesitas ser una persona de tecnología para hacerlo bien. Tu audiencia confía en ti. Ese es el activo. Dirige a la gente hacia Zebraish Studio, explica qué hace en términos simples, y haz la presentación.</a:t>
             </a:r>
           </a:p>
           <a:p>
@@ -10478,7 +10478,7 @@
                 </a:solidFill>
                 <a:latin typeface="Helvetica Neue"/>
               </a:rPr>
-              <a:t>—  </a:t>
+              <a:t>•  </a:t>
             </a:r>
             <a:r>
               <a:rPr sz="1550">
@@ -10487,7 +10487,7 @@
                 </a:solidFill>
                 <a:latin typeface="Helvetica Neue"/>
               </a:rPr>
-              <a:t>Fashion se suma a tu rol en cuanto la línea de ropa se lance, algo que llega pronto. Cuando eso ocurra, probablemente encaje aún más contigo — pero el trabajo empieza con Studio.</a:t>
+              <a:t>Fashion se suma a tu rol en cuanto la línea de ropa se lance, algo que llega pronto. Cuando eso ocurra, probablemente encaje aún más contigo, pero el trabajo empieza con Studio.</a:t>
             </a:r>
           </a:p>
         </p:txBody>
@@ -11168,7 +11168,7 @@
                 </a:solidFill>
                 <a:latin typeface="Helvetica Neue"/>
               </a:rPr>
-              <a:t>—  </a:t>
+              <a:t>•  </a:t>
             </a:r>
             <a:r>
               <a:rPr sz="1550">
@@ -11196,7 +11196,7 @@
                 </a:solidFill>
                 <a:latin typeface="Helvetica Neue"/>
               </a:rPr>
-              <a:t>—  </a:t>
+              <a:t>•  </a:t>
             </a:r>
             <a:r>
               <a:rPr sz="1550">
@@ -11205,7 +11205,7 @@
                 </a:solidFill>
                 <a:latin typeface="Helvetica Neue"/>
               </a:rPr>
-              <a:t>Foco actual: promocionar Zebraish Studio y traer clientes para él — esa es la prioridad durante este Periodo.</a:t>
+              <a:t>Foco actual: promocionar Zebraish Studio y traer clientes para él. Esa es la prioridad durante este Periodo.</a:t>
             </a:r>
           </a:p>
           <a:p>
@@ -11224,7 +11224,7 @@
                 </a:solidFill>
                 <a:latin typeface="Helvetica Neue"/>
               </a:rPr>
-              <a:t>—  </a:t>
+              <a:t>•  </a:t>
             </a:r>
             <a:r>
               <a:rPr sz="1550">
@@ -11252,7 +11252,7 @@
                 </a:solidFill>
                 <a:latin typeface="Helvetica Neue"/>
               </a:rPr>
-              <a:t>—  </a:t>
+              <a:t>•  </a:t>
             </a:r>
             <a:r>
               <a:rPr sz="1550">
@@ -11280,7 +11280,7 @@
                 </a:solidFill>
                 <a:latin typeface="Helvetica Neue"/>
               </a:rPr>
-              <a:t>—  </a:t>
+              <a:t>•  </a:t>
             </a:r>
             <a:r>
               <a:rPr sz="1550">
@@ -11289,7 +11289,7 @@
                 </a:solidFill>
                 <a:latin typeface="Helvetica Neue"/>
               </a:rPr>
-              <a:t>Representas a Zebraish, generas reconocimiento de marca, creas contenido y presentas potenciales clientes — todo detallado en el propio Acuerdo.</a:t>
+              <a:t>Representas a Zebraish, generas reconocimiento de marca, creas contenido y presentas potenciales clientes, todo detallado en el propio Acuerdo.</a:t>
             </a:r>
           </a:p>
         </p:txBody>
@@ -11607,7 +11607,7 @@
                 </a:solidFill>
                 <a:latin typeface="Helvetica Neue"/>
               </a:rPr>
-              <a:t>—  </a:t>
+              <a:t>•  </a:t>
             </a:r>
             <a:r>
               <a:rPr sz="1550">
@@ -11616,7 +11616,7 @@
                 </a:solidFill>
                 <a:latin typeface="Helvetica Neue"/>
               </a:rPr>
-              <a:t>Identificar y contactar de forma proactiva a potenciales clientes de Zebraish Studio dentro de tu propia red y audiencia — cualquiera que pueda usar lo que Studio construye — mediante mensajes directos, presentaciones en persona, participación en redes sociales, lo que mejor funcione.</a:t>
+              <a:t>Identificar y contactar de forma proactiva a potenciales clientes de Zebraish Studio dentro de tu propia red y audiencia (cualquiera que pueda usar lo que Studio construye) mediante mensajes directos, presentaciones en persona, participación en redes sociales, lo que mejor funcione.</a:t>
             </a:r>
           </a:p>
           <a:p>
@@ -11635,7 +11635,7 @@
                 </a:solidFill>
                 <a:latin typeface="Helvetica Neue"/>
               </a:rPr>
-              <a:t>—  </a:t>
+              <a:t>•  </a:t>
             </a:r>
             <a:r>
               <a:rPr sz="1550">
@@ -11663,7 +11663,7 @@
                 </a:solidFill>
                 <a:latin typeface="Helvetica Neue"/>
               </a:rPr>
-              <a:t>—  </a:t>
+              <a:t>•  </a:t>
             </a:r>
             <a:r>
               <a:rPr sz="1550">
@@ -11691,7 +11691,7 @@
                 </a:solidFill>
                 <a:latin typeface="Helvetica Neue"/>
               </a:rPr>
-              <a:t>—  </a:t>
+              <a:t>•  </a:t>
             </a:r>
             <a:r>
               <a:rPr sz="1550">
@@ -12015,7 +12015,7 @@
                 </a:solidFill>
                 <a:latin typeface="Helvetica Neue"/>
               </a:rPr>
-              <a:t>El foco de contenido es Zebraish Studio por ahora — el contenido de Fashion se suma en cuanto se lance la línea.</a:t>
+              <a:t>El foco de contenido es Zebraish Studio por ahora. El contenido de Fashion se suma en cuanto se lance la línea.</a:t>
             </a:r>
           </a:p>
         </p:txBody>
